--- a/MODEL DIFFS.pptx
+++ b/MODEL DIFFS.pptx
@@ -24,6 +24,11 @@
     <p:sldId id="269" r:id="rId19"/>
     <p:sldId id="270" r:id="rId20"/>
     <p:sldId id="271" r:id="rId21"/>
+    <p:sldId id="272" r:id="rId23"/>
+    <p:sldId id="273" r:id="rId24"/>
+    <p:sldId id="274" r:id="rId25"/>
+    <p:sldId id="275" r:id="rId26"/>
+    <p:sldId id="276" r:id="rId27"/>
   </p:sldIdLst>
   <p:sldSz cy="6858000" cx="12191675"/>
   <p:notesSz cx="6858000" cy="9144000"/>
@@ -19673,6 +19678,3601 @@
 </p:sld>
 </file>
 
+<file path=ppt/slides/slide17.xml><?xml version="1.0" encoding="utf-8"?>
+<p:sld xmlns:a="http://schemas.openxmlformats.org/drawingml/2006/main" xmlns:p="http://schemas.openxmlformats.org/presentationml/2006/main" xmlns:r="http://schemas.openxmlformats.org/officeDocument/2006/relationships">
+  <p:cSld>
+    <p:spTree>
+      <p:nvGrpSpPr>
+        <p:cNvPr id="1" name=""/>
+        <p:cNvGrpSpPr/>
+        <p:nvPr/>
+      </p:nvGrpSpPr>
+      <p:grpSpPr/>
+      <p:sp>
+        <p:nvSpPr>
+          <p:cNvPr id="3" name="Rectangle 2"/>
+          <p:cNvSpPr/>
+          <p:nvPr/>
+        </p:nvSpPr>
+        <p:spPr>
+          <a:xfrm>
+            <a:off x="0" y="0"/>
+            <a:ext cx="12191695" cy="6858000"/>
+          </a:xfrm>
+          <a:prstGeom prst="rect">
+            <a:avLst/>
+          </a:prstGeom>
+          <a:solidFill>
+            <a:srgbClr val="F8FAFC"/>
+          </a:solidFill>
+          <a:ln>
+            <a:solidFill>
+              <a:srgbClr val="F8FAFC"/>
+            </a:solidFill>
+          </a:ln>
+        </p:spPr>
+        <p:style>
+          <a:lnRef idx="1">
+            <a:schemeClr val="accent1"/>
+          </a:lnRef>
+          <a:fillRef idx="3">
+            <a:schemeClr val="accent1"/>
+          </a:fillRef>
+          <a:effectRef idx="2">
+            <a:schemeClr val="accent1"/>
+          </a:effectRef>
+          <a:fontRef idx="minor">
+            <a:schemeClr val="lt1"/>
+          </a:fontRef>
+        </p:style>
+        <p:txBody>
+          <a:bodyPr rtlCol="0" anchor="ctr"/>
+          <a:lstStyle/>
+          <a:p>
+            <a:pPr algn="ctr"/>
+          </a:p>
+        </p:txBody>
+      </p:sp>
+      <p:sp>
+        <p:nvSpPr>
+          <p:cNvPr id="2" name="Title 1"/>
+          <p:cNvSpPr>
+            <a:spLocks noGrp="1"/>
+          </p:cNvSpPr>
+          <p:nvPr>
+            <p:ph type="title"/>
+          </p:nvPr>
+        </p:nvSpPr>
+        <p:spPr/>
+        <p:txBody>
+          <a:bodyPr/>
+          <a:lstStyle/>
+          <a:p/>
+        </p:txBody>
+      </p:sp>
+      <p:sp>
+        <p:nvSpPr>
+          <p:cNvPr id="4" name="TextBox 3"/>
+          <p:cNvSpPr txBox="1"/>
+          <p:nvPr/>
+        </p:nvSpPr>
+        <p:spPr>
+          <a:xfrm>
+            <a:off x="594360" y="274320"/>
+            <a:ext cx="10972800" cy="228600"/>
+          </a:xfrm>
+          <a:prstGeom prst="rect">
+            <a:avLst/>
+          </a:prstGeom>
+          <a:noFill/>
+        </p:spPr>
+        <p:txBody>
+          <a:bodyPr wrap="none" lIns="27432">
+            <a:spAutoFit/>
+          </a:bodyPr>
+          <a:lstStyle/>
+          <a:p>
+            <a:pPr algn="l"/>
+            <a:r>
+              <a:rPr sz="1000" b="1">
+                <a:solidFill>
+                  <a:srgbClr val="2563EB"/>
+                </a:solidFill>
+                <a:latin typeface="Aptos"/>
+              </a:rPr>
+              <a:t>DIRECTIONAL IMPROVEMENT SCREENING</a:t>
+            </a:r>
+          </a:p>
+        </p:txBody>
+      </p:sp>
+      <p:sp>
+        <p:nvSpPr>
+          <p:cNvPr id="5" name="TextBox 4"/>
+          <p:cNvSpPr txBox="1"/>
+          <p:nvPr/>
+        </p:nvSpPr>
+        <p:spPr>
+          <a:xfrm>
+            <a:off x="594360" y="640080"/>
+            <a:ext cx="10972800" cy="594360"/>
+          </a:xfrm>
+          <a:prstGeom prst="rect">
+            <a:avLst/>
+          </a:prstGeom>
+          <a:noFill/>
+        </p:spPr>
+        <p:txBody>
+          <a:bodyPr wrap="none" lIns="27432">
+            <a:spAutoFit/>
+          </a:bodyPr>
+          <a:lstStyle/>
+          <a:p>
+            <a:pPr algn="l"/>
+            <a:r>
+              <a:rPr sz="2700" b="1">
+                <a:solidFill>
+                  <a:srgbClr val="111827"/>
+                </a:solidFill>
+                <a:latin typeface="Aptos"/>
+              </a:rPr>
+              <a:t>Base-enriched features reveal a test-generation family</a:t>
+            </a:r>
+          </a:p>
+        </p:txBody>
+      </p:sp>
+      <p:sp>
+        <p:nvSpPr>
+          <p:cNvPr id="6" name="TextBox 5"/>
+          <p:cNvSpPr txBox="1"/>
+          <p:nvPr/>
+        </p:nvSpPr>
+        <p:spPr>
+          <a:xfrm>
+            <a:off x="594360" y="1371600"/>
+            <a:ext cx="731520" cy="228600"/>
+          </a:xfrm>
+          <a:prstGeom prst="rect">
+            <a:avLst/>
+          </a:prstGeom>
+          <a:noFill/>
+        </p:spPr>
+        <p:txBody>
+          <a:bodyPr wrap="none" lIns="27432">
+            <a:spAutoFit/>
+          </a:bodyPr>
+          <a:lstStyle/>
+          <a:p>
+            <a:pPr algn="r"/>
+            <a:r>
+              <a:rPr sz="1100" b="1">
+                <a:solidFill>
+                  <a:srgbClr val="111827"/>
+                </a:solidFill>
+                <a:latin typeface="Aptos"/>
+              </a:rPr>
+              <a:t>9537</a:t>
+            </a:r>
+          </a:p>
+        </p:txBody>
+      </p:sp>
+      <p:sp>
+        <p:nvSpPr>
+          <p:cNvPr id="7" name="TextBox 6"/>
+          <p:cNvSpPr txBox="1"/>
+          <p:nvPr/>
+        </p:nvSpPr>
+        <p:spPr>
+          <a:xfrm>
+            <a:off x="1417320" y="1371600"/>
+            <a:ext cx="1371600" cy="228600"/>
+          </a:xfrm>
+          <a:prstGeom prst="rect">
+            <a:avLst/>
+          </a:prstGeom>
+          <a:noFill/>
+        </p:spPr>
+        <p:txBody>
+          <a:bodyPr wrap="none" lIns="27432">
+            <a:spAutoFit/>
+          </a:bodyPr>
+          <a:lstStyle/>
+          <a:p>
+            <a:pPr algn="l"/>
+            <a:r>
+              <a:rPr sz="1000" b="0">
+                <a:solidFill>
+                  <a:srgbClr val="64748B"/>
+                </a:solidFill>
+                <a:latin typeface="Aptos"/>
+              </a:rPr>
+              <a:t>active fraction</a:t>
+            </a:r>
+          </a:p>
+        </p:txBody>
+      </p:sp>
+      <p:sp>
+        <p:nvSpPr>
+          <p:cNvPr id="8" name="Rectangle 7"/>
+          <p:cNvSpPr/>
+          <p:nvPr/>
+        </p:nvSpPr>
+        <p:spPr>
+          <a:xfrm>
+            <a:off x="2834640" y="1399032"/>
+            <a:ext cx="4839919" cy="201168"/>
+          </a:xfrm>
+          <a:prstGeom prst="rect">
+            <a:avLst/>
+          </a:prstGeom>
+          <a:solidFill>
+            <a:srgbClr val="94A3B8"/>
+          </a:solidFill>
+          <a:ln>
+            <a:solidFill>
+              <a:srgbClr val="94A3B8"/>
+            </a:solidFill>
+          </a:ln>
+        </p:spPr>
+        <p:style>
+          <a:lnRef idx="1">
+            <a:schemeClr val="accent1"/>
+          </a:lnRef>
+          <a:fillRef idx="3">
+            <a:schemeClr val="accent1"/>
+          </a:fillRef>
+          <a:effectRef idx="2">
+            <a:schemeClr val="accent1"/>
+          </a:effectRef>
+          <a:fontRef idx="minor">
+            <a:schemeClr val="lt1"/>
+          </a:fontRef>
+        </p:style>
+        <p:txBody>
+          <a:bodyPr rtlCol="0" anchor="ctr"/>
+          <a:lstStyle/>
+          <a:p>
+            <a:pPr algn="ctr"/>
+          </a:p>
+        </p:txBody>
+      </p:sp>
+      <p:sp>
+        <p:nvSpPr>
+          <p:cNvPr id="9" name="TextBox 8"/>
+          <p:cNvSpPr txBox="1"/>
+          <p:nvPr/>
+        </p:nvSpPr>
+        <p:spPr>
+          <a:xfrm>
+            <a:off x="7680960" y="1371600"/>
+            <a:ext cx="548640" cy="228600"/>
+          </a:xfrm>
+          <a:prstGeom prst="rect">
+            <a:avLst/>
+          </a:prstGeom>
+          <a:noFill/>
+        </p:spPr>
+        <p:txBody>
+          <a:bodyPr wrap="none" lIns="27432">
+            <a:spAutoFit/>
+          </a:bodyPr>
+          <a:lstStyle/>
+          <a:p>
+            <a:pPr algn="l"/>
+            <a:r>
+              <a:rPr sz="1000" b="1">
+                <a:solidFill>
+                  <a:srgbClr val="111827"/>
+                </a:solidFill>
+                <a:latin typeface="Aptos"/>
+              </a:rPr>
+              <a:t>7.90</a:t>
+            </a:r>
+          </a:p>
+        </p:txBody>
+      </p:sp>
+      <p:sp>
+        <p:nvSpPr>
+          <p:cNvPr id="10" name="TextBox 9"/>
+          <p:cNvSpPr txBox="1"/>
+          <p:nvPr/>
+        </p:nvSpPr>
+        <p:spPr>
+          <a:xfrm>
+            <a:off x="8229600" y="1371600"/>
+            <a:ext cx="685800" cy="228600"/>
+          </a:xfrm>
+          <a:prstGeom prst="rect">
+            <a:avLst/>
+          </a:prstGeom>
+          <a:noFill/>
+        </p:spPr>
+        <p:txBody>
+          <a:bodyPr wrap="none" lIns="27432">
+            <a:spAutoFit/>
+          </a:bodyPr>
+          <a:lstStyle/>
+          <a:p>
+            <a:pPr algn="l"/>
+            <a:r>
+              <a:rPr sz="1000" b="0">
+                <a:solidFill>
+                  <a:srgbClr val="64748B"/>
+                </a:solidFill>
+                <a:latin typeface="Aptos"/>
+              </a:rPr>
+              <a:t>140/215</a:t>
+            </a:r>
+          </a:p>
+        </p:txBody>
+      </p:sp>
+      <p:sp>
+        <p:nvSpPr>
+          <p:cNvPr id="11" name="TextBox 10"/>
+          <p:cNvSpPr txBox="1"/>
+          <p:nvPr/>
+        </p:nvSpPr>
+        <p:spPr>
+          <a:xfrm>
+            <a:off x="594360" y="1801368"/>
+            <a:ext cx="731520" cy="228600"/>
+          </a:xfrm>
+          <a:prstGeom prst="rect">
+            <a:avLst/>
+          </a:prstGeom>
+          <a:noFill/>
+        </p:spPr>
+        <p:txBody>
+          <a:bodyPr wrap="none" lIns="27432">
+            <a:spAutoFit/>
+          </a:bodyPr>
+          <a:lstStyle/>
+          <a:p>
+            <a:pPr algn="r"/>
+            <a:r>
+              <a:rPr sz="1100" b="1">
+                <a:solidFill>
+                  <a:srgbClr val="111827"/>
+                </a:solidFill>
+                <a:latin typeface="Aptos"/>
+              </a:rPr>
+              <a:t>12883</a:t>
+            </a:r>
+          </a:p>
+        </p:txBody>
+      </p:sp>
+      <p:sp>
+        <p:nvSpPr>
+          <p:cNvPr id="12" name="TextBox 11"/>
+          <p:cNvSpPr txBox="1"/>
+          <p:nvPr/>
+        </p:nvSpPr>
+        <p:spPr>
+          <a:xfrm>
+            <a:off x="1417320" y="1801368"/>
+            <a:ext cx="1371600" cy="228600"/>
+          </a:xfrm>
+          <a:prstGeom prst="rect">
+            <a:avLst/>
+          </a:prstGeom>
+          <a:noFill/>
+        </p:spPr>
+        <p:txBody>
+          <a:bodyPr wrap="none" lIns="27432">
+            <a:spAutoFit/>
+          </a:bodyPr>
+          <a:lstStyle/>
+          <a:p>
+            <a:pPr algn="l"/>
+            <a:r>
+              <a:rPr sz="1000" b="0">
+                <a:solidFill>
+                  <a:srgbClr val="64748B"/>
+                </a:solidFill>
+                <a:latin typeface="Aptos"/>
+              </a:rPr>
+              <a:t>early max</a:t>
+            </a:r>
+          </a:p>
+        </p:txBody>
+      </p:sp>
+      <p:sp>
+        <p:nvSpPr>
+          <p:cNvPr id="13" name="Rectangle 12"/>
+          <p:cNvSpPr/>
+          <p:nvPr/>
+        </p:nvSpPr>
+        <p:spPr>
+          <a:xfrm>
+            <a:off x="2834640" y="1828800"/>
+            <a:ext cx="4692883" cy="201168"/>
+          </a:xfrm>
+          <a:prstGeom prst="rect">
+            <a:avLst/>
+          </a:prstGeom>
+          <a:solidFill>
+            <a:srgbClr val="94A3B8"/>
+          </a:solidFill>
+          <a:ln>
+            <a:solidFill>
+              <a:srgbClr val="94A3B8"/>
+            </a:solidFill>
+          </a:ln>
+        </p:spPr>
+        <p:style>
+          <a:lnRef idx="1">
+            <a:schemeClr val="accent1"/>
+          </a:lnRef>
+          <a:fillRef idx="3">
+            <a:schemeClr val="accent1"/>
+          </a:fillRef>
+          <a:effectRef idx="2">
+            <a:schemeClr val="accent1"/>
+          </a:effectRef>
+          <a:fontRef idx="minor">
+            <a:schemeClr val="lt1"/>
+          </a:fontRef>
+        </p:style>
+        <p:txBody>
+          <a:bodyPr rtlCol="0" anchor="ctr"/>
+          <a:lstStyle/>
+          <a:p>
+            <a:pPr algn="ctr"/>
+          </a:p>
+        </p:txBody>
+      </p:sp>
+      <p:sp>
+        <p:nvSpPr>
+          <p:cNvPr id="14" name="TextBox 13"/>
+          <p:cNvSpPr txBox="1"/>
+          <p:nvPr/>
+        </p:nvSpPr>
+        <p:spPr>
+          <a:xfrm>
+            <a:off x="7680960" y="1801368"/>
+            <a:ext cx="548640" cy="228600"/>
+          </a:xfrm>
+          <a:prstGeom prst="rect">
+            <a:avLst/>
+          </a:prstGeom>
+          <a:noFill/>
+        </p:spPr>
+        <p:txBody>
+          <a:bodyPr wrap="none" lIns="27432">
+            <a:spAutoFit/>
+          </a:bodyPr>
+          <a:lstStyle/>
+          <a:p>
+            <a:pPr algn="l"/>
+            <a:r>
+              <a:rPr sz="1000" b="1">
+                <a:solidFill>
+                  <a:srgbClr val="111827"/>
+                </a:solidFill>
+                <a:latin typeface="Aptos"/>
+              </a:rPr>
+              <a:t>7.66</a:t>
+            </a:r>
+          </a:p>
+        </p:txBody>
+      </p:sp>
+      <p:sp>
+        <p:nvSpPr>
+          <p:cNvPr id="15" name="TextBox 14"/>
+          <p:cNvSpPr txBox="1"/>
+          <p:nvPr/>
+        </p:nvSpPr>
+        <p:spPr>
+          <a:xfrm>
+            <a:off x="8229600" y="1801368"/>
+            <a:ext cx="685800" cy="228600"/>
+          </a:xfrm>
+          <a:prstGeom prst="rect">
+            <a:avLst/>
+          </a:prstGeom>
+          <a:noFill/>
+        </p:spPr>
+        <p:txBody>
+          <a:bodyPr wrap="none" lIns="27432">
+            <a:spAutoFit/>
+          </a:bodyPr>
+          <a:lstStyle/>
+          <a:p>
+            <a:pPr algn="l"/>
+            <a:r>
+              <a:rPr sz="1000" b="0">
+                <a:solidFill>
+                  <a:srgbClr val="64748B"/>
+                </a:solidFill>
+                <a:latin typeface="Aptos"/>
+              </a:rPr>
+              <a:t>139/215</a:t>
+            </a:r>
+          </a:p>
+        </p:txBody>
+      </p:sp>
+      <p:sp>
+        <p:nvSpPr>
+          <p:cNvPr id="16" name="TextBox 15"/>
+          <p:cNvSpPr txBox="1"/>
+          <p:nvPr/>
+        </p:nvSpPr>
+        <p:spPr>
+          <a:xfrm>
+            <a:off x="594360" y="2231136"/>
+            <a:ext cx="731520" cy="228600"/>
+          </a:xfrm>
+          <a:prstGeom prst="rect">
+            <a:avLst/>
+          </a:prstGeom>
+          <a:noFill/>
+        </p:spPr>
+        <p:txBody>
+          <a:bodyPr wrap="none" lIns="27432">
+            <a:spAutoFit/>
+          </a:bodyPr>
+          <a:lstStyle/>
+          <a:p>
+            <a:pPr algn="r"/>
+            <a:r>
+              <a:rPr sz="1100" b="1">
+                <a:solidFill>
+                  <a:srgbClr val="111827"/>
+                </a:solidFill>
+                <a:latin typeface="Aptos"/>
+              </a:rPr>
+              <a:t>3602</a:t>
+            </a:r>
+          </a:p>
+        </p:txBody>
+      </p:sp>
+      <p:sp>
+        <p:nvSpPr>
+          <p:cNvPr id="17" name="TextBox 16"/>
+          <p:cNvSpPr txBox="1"/>
+          <p:nvPr/>
+        </p:nvSpPr>
+        <p:spPr>
+          <a:xfrm>
+            <a:off x="1417320" y="2231136"/>
+            <a:ext cx="1371600" cy="228600"/>
+          </a:xfrm>
+          <a:prstGeom prst="rect">
+            <a:avLst/>
+          </a:prstGeom>
+          <a:noFill/>
+        </p:spPr>
+        <p:txBody>
+          <a:bodyPr wrap="none" lIns="27432">
+            <a:spAutoFit/>
+          </a:bodyPr>
+          <a:lstStyle/>
+          <a:p>
+            <a:pPr algn="l"/>
+            <a:r>
+              <a:rPr sz="1000" b="0">
+                <a:solidFill>
+                  <a:srgbClr val="64748B"/>
+                </a:solidFill>
+                <a:latin typeface="Aptos"/>
+              </a:rPr>
+              <a:t>active fraction</a:t>
+            </a:r>
+          </a:p>
+        </p:txBody>
+      </p:sp>
+      <p:sp>
+        <p:nvSpPr>
+          <p:cNvPr id="18" name="Rectangle 17"/>
+          <p:cNvSpPr/>
+          <p:nvPr/>
+        </p:nvSpPr>
+        <p:spPr>
+          <a:xfrm>
+            <a:off x="2834640" y="2258568"/>
+            <a:ext cx="4558101" cy="201168"/>
+          </a:xfrm>
+          <a:prstGeom prst="rect">
+            <a:avLst/>
+          </a:prstGeom>
+          <a:solidFill>
+            <a:srgbClr val="94A3B8"/>
+          </a:solidFill>
+          <a:ln>
+            <a:solidFill>
+              <a:srgbClr val="94A3B8"/>
+            </a:solidFill>
+          </a:ln>
+        </p:spPr>
+        <p:style>
+          <a:lnRef idx="1">
+            <a:schemeClr val="accent1"/>
+          </a:lnRef>
+          <a:fillRef idx="3">
+            <a:schemeClr val="accent1"/>
+          </a:fillRef>
+          <a:effectRef idx="2">
+            <a:schemeClr val="accent1"/>
+          </a:effectRef>
+          <a:fontRef idx="minor">
+            <a:schemeClr val="lt1"/>
+          </a:fontRef>
+        </p:style>
+        <p:txBody>
+          <a:bodyPr rtlCol="0" anchor="ctr"/>
+          <a:lstStyle/>
+          <a:p>
+            <a:pPr algn="ctr"/>
+          </a:p>
+        </p:txBody>
+      </p:sp>
+      <p:sp>
+        <p:nvSpPr>
+          <p:cNvPr id="19" name="TextBox 18"/>
+          <p:cNvSpPr txBox="1"/>
+          <p:nvPr/>
+        </p:nvSpPr>
+        <p:spPr>
+          <a:xfrm>
+            <a:off x="7680960" y="2231136"/>
+            <a:ext cx="548640" cy="228600"/>
+          </a:xfrm>
+          <a:prstGeom prst="rect">
+            <a:avLst/>
+          </a:prstGeom>
+          <a:noFill/>
+        </p:spPr>
+        <p:txBody>
+          <a:bodyPr wrap="none" lIns="27432">
+            <a:spAutoFit/>
+          </a:bodyPr>
+          <a:lstStyle/>
+          <a:p>
+            <a:pPr algn="l"/>
+            <a:r>
+              <a:rPr sz="1000" b="1">
+                <a:solidFill>
+                  <a:srgbClr val="111827"/>
+                </a:solidFill>
+                <a:latin typeface="Aptos"/>
+              </a:rPr>
+              <a:t>7.44</a:t>
+            </a:r>
+          </a:p>
+        </p:txBody>
+      </p:sp>
+      <p:sp>
+        <p:nvSpPr>
+          <p:cNvPr id="20" name="TextBox 19"/>
+          <p:cNvSpPr txBox="1"/>
+          <p:nvPr/>
+        </p:nvSpPr>
+        <p:spPr>
+          <a:xfrm>
+            <a:off x="8229600" y="2231136"/>
+            <a:ext cx="685800" cy="228600"/>
+          </a:xfrm>
+          <a:prstGeom prst="rect">
+            <a:avLst/>
+          </a:prstGeom>
+          <a:noFill/>
+        </p:spPr>
+        <p:txBody>
+          <a:bodyPr wrap="none" lIns="27432">
+            <a:spAutoFit/>
+          </a:bodyPr>
+          <a:lstStyle/>
+          <a:p>
+            <a:pPr algn="l"/>
+            <a:r>
+              <a:rPr sz="1000" b="0">
+                <a:solidFill>
+                  <a:srgbClr val="64748B"/>
+                </a:solidFill>
+                <a:latin typeface="Aptos"/>
+              </a:rPr>
+              <a:t>164/215</a:t>
+            </a:r>
+          </a:p>
+        </p:txBody>
+      </p:sp>
+      <p:sp>
+        <p:nvSpPr>
+          <p:cNvPr id="21" name="TextBox 20"/>
+          <p:cNvSpPr txBox="1"/>
+          <p:nvPr/>
+        </p:nvSpPr>
+        <p:spPr>
+          <a:xfrm>
+            <a:off x="594360" y="2660904"/>
+            <a:ext cx="731520" cy="228600"/>
+          </a:xfrm>
+          <a:prstGeom prst="rect">
+            <a:avLst/>
+          </a:prstGeom>
+          <a:noFill/>
+        </p:spPr>
+        <p:txBody>
+          <a:bodyPr wrap="none" lIns="27432">
+            <a:spAutoFit/>
+          </a:bodyPr>
+          <a:lstStyle/>
+          <a:p>
+            <a:pPr algn="r"/>
+            <a:r>
+              <a:rPr sz="1100" b="1">
+                <a:solidFill>
+                  <a:srgbClr val="F59E0B"/>
+                </a:solidFill>
+                <a:latin typeface="Aptos"/>
+              </a:rPr>
+              <a:t>5422</a:t>
+            </a:r>
+          </a:p>
+        </p:txBody>
+      </p:sp>
+      <p:sp>
+        <p:nvSpPr>
+          <p:cNvPr id="22" name="TextBox 21"/>
+          <p:cNvSpPr txBox="1"/>
+          <p:nvPr/>
+        </p:nvSpPr>
+        <p:spPr>
+          <a:xfrm>
+            <a:off x="1417320" y="2660904"/>
+            <a:ext cx="1371600" cy="228600"/>
+          </a:xfrm>
+          <a:prstGeom prst="rect">
+            <a:avLst/>
+          </a:prstGeom>
+          <a:noFill/>
+        </p:spPr>
+        <p:txBody>
+          <a:bodyPr wrap="none" lIns="27432">
+            <a:spAutoFit/>
+          </a:bodyPr>
+          <a:lstStyle/>
+          <a:p>
+            <a:pPr algn="l"/>
+            <a:r>
+              <a:rPr sz="1000" b="0">
+                <a:solidFill>
+                  <a:srgbClr val="64748B"/>
+                </a:solidFill>
+                <a:latin typeface="Aptos"/>
+              </a:rPr>
+              <a:t>active fraction</a:t>
+            </a:r>
+          </a:p>
+        </p:txBody>
+      </p:sp>
+      <p:sp>
+        <p:nvSpPr>
+          <p:cNvPr id="23" name="Rectangle 22"/>
+          <p:cNvSpPr/>
+          <p:nvPr/>
+        </p:nvSpPr>
+        <p:spPr>
+          <a:xfrm>
+            <a:off x="2834640" y="2688336"/>
+            <a:ext cx="4441698" cy="201168"/>
+          </a:xfrm>
+          <a:prstGeom prst="rect">
+            <a:avLst/>
+          </a:prstGeom>
+          <a:solidFill>
+            <a:srgbClr val="F59E0B"/>
+          </a:solidFill>
+          <a:ln>
+            <a:solidFill>
+              <a:srgbClr val="F59E0B"/>
+            </a:solidFill>
+          </a:ln>
+        </p:spPr>
+        <p:style>
+          <a:lnRef idx="1">
+            <a:schemeClr val="accent1"/>
+          </a:lnRef>
+          <a:fillRef idx="3">
+            <a:schemeClr val="accent1"/>
+          </a:fillRef>
+          <a:effectRef idx="2">
+            <a:schemeClr val="accent1"/>
+          </a:effectRef>
+          <a:fontRef idx="minor">
+            <a:schemeClr val="lt1"/>
+          </a:fontRef>
+        </p:style>
+        <p:txBody>
+          <a:bodyPr rtlCol="0" anchor="ctr"/>
+          <a:lstStyle/>
+          <a:p>
+            <a:pPr algn="ctr"/>
+          </a:p>
+        </p:txBody>
+      </p:sp>
+      <p:sp>
+        <p:nvSpPr>
+          <p:cNvPr id="24" name="TextBox 23"/>
+          <p:cNvSpPr txBox="1"/>
+          <p:nvPr/>
+        </p:nvSpPr>
+        <p:spPr>
+          <a:xfrm>
+            <a:off x="7680960" y="2660904"/>
+            <a:ext cx="548640" cy="228600"/>
+          </a:xfrm>
+          <a:prstGeom prst="rect">
+            <a:avLst/>
+          </a:prstGeom>
+          <a:noFill/>
+        </p:spPr>
+        <p:txBody>
+          <a:bodyPr wrap="none" lIns="27432">
+            <a:spAutoFit/>
+          </a:bodyPr>
+          <a:lstStyle/>
+          <a:p>
+            <a:pPr algn="l"/>
+            <a:r>
+              <a:rPr sz="1000" b="1">
+                <a:solidFill>
+                  <a:srgbClr val="111827"/>
+                </a:solidFill>
+                <a:latin typeface="Aptos"/>
+              </a:rPr>
+              <a:t>7.25</a:t>
+            </a:r>
+          </a:p>
+        </p:txBody>
+      </p:sp>
+      <p:sp>
+        <p:nvSpPr>
+          <p:cNvPr id="25" name="TextBox 24"/>
+          <p:cNvSpPr txBox="1"/>
+          <p:nvPr/>
+        </p:nvSpPr>
+        <p:spPr>
+          <a:xfrm>
+            <a:off x="8229600" y="2660904"/>
+            <a:ext cx="685800" cy="228600"/>
+          </a:xfrm>
+          <a:prstGeom prst="rect">
+            <a:avLst/>
+          </a:prstGeom>
+          <a:noFill/>
+        </p:spPr>
+        <p:txBody>
+          <a:bodyPr wrap="none" lIns="27432">
+            <a:spAutoFit/>
+          </a:bodyPr>
+          <a:lstStyle/>
+          <a:p>
+            <a:pPr algn="l"/>
+            <a:r>
+              <a:rPr sz="1000" b="0">
+                <a:solidFill>
+                  <a:srgbClr val="64748B"/>
+                </a:solidFill>
+                <a:latin typeface="Aptos"/>
+              </a:rPr>
+              <a:t>135/215</a:t>
+            </a:r>
+          </a:p>
+        </p:txBody>
+      </p:sp>
+      <p:sp>
+        <p:nvSpPr>
+          <p:cNvPr id="26" name="TextBox 25"/>
+          <p:cNvSpPr txBox="1"/>
+          <p:nvPr/>
+        </p:nvSpPr>
+        <p:spPr>
+          <a:xfrm>
+            <a:off x="594360" y="3090672"/>
+            <a:ext cx="731520" cy="228600"/>
+          </a:xfrm>
+          <a:prstGeom prst="rect">
+            <a:avLst/>
+          </a:prstGeom>
+          <a:noFill/>
+        </p:spPr>
+        <p:txBody>
+          <a:bodyPr wrap="none" lIns="27432">
+            <a:spAutoFit/>
+          </a:bodyPr>
+          <a:lstStyle/>
+          <a:p>
+            <a:pPr algn="r"/>
+            <a:r>
+              <a:rPr sz="1100" b="1">
+                <a:solidFill>
+                  <a:srgbClr val="111827"/>
+                </a:solidFill>
+                <a:latin typeface="Aptos"/>
+              </a:rPr>
+              <a:t>14295</a:t>
+            </a:r>
+          </a:p>
+        </p:txBody>
+      </p:sp>
+      <p:sp>
+        <p:nvSpPr>
+          <p:cNvPr id="27" name="TextBox 26"/>
+          <p:cNvSpPr txBox="1"/>
+          <p:nvPr/>
+        </p:nvSpPr>
+        <p:spPr>
+          <a:xfrm>
+            <a:off x="1417320" y="3090672"/>
+            <a:ext cx="1371600" cy="228600"/>
+          </a:xfrm>
+          <a:prstGeom prst="rect">
+            <a:avLst/>
+          </a:prstGeom>
+          <a:noFill/>
+        </p:spPr>
+        <p:txBody>
+          <a:bodyPr wrap="none" lIns="27432">
+            <a:spAutoFit/>
+          </a:bodyPr>
+          <a:lstStyle/>
+          <a:p>
+            <a:pPr algn="l"/>
+            <a:r>
+              <a:rPr sz="1000" b="0">
+                <a:solidFill>
+                  <a:srgbClr val="64748B"/>
+                </a:solidFill>
+                <a:latin typeface="Aptos"/>
+              </a:rPr>
+              <a:t>active fraction</a:t>
+            </a:r>
+          </a:p>
+        </p:txBody>
+      </p:sp>
+      <p:sp>
+        <p:nvSpPr>
+          <p:cNvPr id="28" name="Rectangle 27"/>
+          <p:cNvSpPr/>
+          <p:nvPr/>
+        </p:nvSpPr>
+        <p:spPr>
+          <a:xfrm>
+            <a:off x="2834640" y="3118103"/>
+            <a:ext cx="4331421" cy="201168"/>
+          </a:xfrm>
+          <a:prstGeom prst="rect">
+            <a:avLst/>
+          </a:prstGeom>
+          <a:solidFill>
+            <a:srgbClr val="94A3B8"/>
+          </a:solidFill>
+          <a:ln>
+            <a:solidFill>
+              <a:srgbClr val="94A3B8"/>
+            </a:solidFill>
+          </a:ln>
+        </p:spPr>
+        <p:style>
+          <a:lnRef idx="1">
+            <a:schemeClr val="accent1"/>
+          </a:lnRef>
+          <a:fillRef idx="3">
+            <a:schemeClr val="accent1"/>
+          </a:fillRef>
+          <a:effectRef idx="2">
+            <a:schemeClr val="accent1"/>
+          </a:effectRef>
+          <a:fontRef idx="minor">
+            <a:schemeClr val="lt1"/>
+          </a:fontRef>
+        </p:style>
+        <p:txBody>
+          <a:bodyPr rtlCol="0" anchor="ctr"/>
+          <a:lstStyle/>
+          <a:p>
+            <a:pPr algn="ctr"/>
+          </a:p>
+        </p:txBody>
+      </p:sp>
+      <p:sp>
+        <p:nvSpPr>
+          <p:cNvPr id="29" name="TextBox 28"/>
+          <p:cNvSpPr txBox="1"/>
+          <p:nvPr/>
+        </p:nvSpPr>
+        <p:spPr>
+          <a:xfrm>
+            <a:off x="7680960" y="3090672"/>
+            <a:ext cx="548640" cy="228600"/>
+          </a:xfrm>
+          <a:prstGeom prst="rect">
+            <a:avLst/>
+          </a:prstGeom>
+          <a:noFill/>
+        </p:spPr>
+        <p:txBody>
+          <a:bodyPr wrap="none" lIns="27432">
+            <a:spAutoFit/>
+          </a:bodyPr>
+          <a:lstStyle/>
+          <a:p>
+            <a:pPr algn="l"/>
+            <a:r>
+              <a:rPr sz="1000" b="1">
+                <a:solidFill>
+                  <a:srgbClr val="111827"/>
+                </a:solidFill>
+                <a:latin typeface="Aptos"/>
+              </a:rPr>
+              <a:t>7.07</a:t>
+            </a:r>
+          </a:p>
+        </p:txBody>
+      </p:sp>
+      <p:sp>
+        <p:nvSpPr>
+          <p:cNvPr id="30" name="TextBox 29"/>
+          <p:cNvSpPr txBox="1"/>
+          <p:nvPr/>
+        </p:nvSpPr>
+        <p:spPr>
+          <a:xfrm>
+            <a:off x="8229600" y="3090672"/>
+            <a:ext cx="685800" cy="228600"/>
+          </a:xfrm>
+          <a:prstGeom prst="rect">
+            <a:avLst/>
+          </a:prstGeom>
+          <a:noFill/>
+        </p:spPr>
+        <p:txBody>
+          <a:bodyPr wrap="none" lIns="27432">
+            <a:spAutoFit/>
+          </a:bodyPr>
+          <a:lstStyle/>
+          <a:p>
+            <a:pPr algn="l"/>
+            <a:r>
+              <a:rPr sz="1000" b="0">
+                <a:solidFill>
+                  <a:srgbClr val="64748B"/>
+                </a:solidFill>
+                <a:latin typeface="Aptos"/>
+              </a:rPr>
+              <a:t>156/215</a:t>
+            </a:r>
+          </a:p>
+        </p:txBody>
+      </p:sp>
+      <p:sp>
+        <p:nvSpPr>
+          <p:cNvPr id="31" name="TextBox 30"/>
+          <p:cNvSpPr txBox="1"/>
+          <p:nvPr/>
+        </p:nvSpPr>
+        <p:spPr>
+          <a:xfrm>
+            <a:off x="594360" y="3520439"/>
+            <a:ext cx="731520" cy="228600"/>
+          </a:xfrm>
+          <a:prstGeom prst="rect">
+            <a:avLst/>
+          </a:prstGeom>
+          <a:noFill/>
+        </p:spPr>
+        <p:txBody>
+          <a:bodyPr wrap="none" lIns="27432">
+            <a:spAutoFit/>
+          </a:bodyPr>
+          <a:lstStyle/>
+          <a:p>
+            <a:pPr algn="r"/>
+            <a:r>
+              <a:rPr sz="1100" b="1">
+                <a:solidFill>
+                  <a:srgbClr val="111827"/>
+                </a:solidFill>
+                <a:latin typeface="Aptos"/>
+              </a:rPr>
+              <a:t>13397</a:t>
+            </a:r>
+          </a:p>
+        </p:txBody>
+      </p:sp>
+      <p:sp>
+        <p:nvSpPr>
+          <p:cNvPr id="32" name="TextBox 31"/>
+          <p:cNvSpPr txBox="1"/>
+          <p:nvPr/>
+        </p:nvSpPr>
+        <p:spPr>
+          <a:xfrm>
+            <a:off x="1417320" y="3520439"/>
+            <a:ext cx="1371600" cy="228600"/>
+          </a:xfrm>
+          <a:prstGeom prst="rect">
+            <a:avLst/>
+          </a:prstGeom>
+          <a:noFill/>
+        </p:spPr>
+        <p:txBody>
+          <a:bodyPr wrap="none" lIns="27432">
+            <a:spAutoFit/>
+          </a:bodyPr>
+          <a:lstStyle/>
+          <a:p>
+            <a:pPr algn="l"/>
+            <a:r>
+              <a:rPr sz="1000" b="0">
+                <a:solidFill>
+                  <a:srgbClr val="64748B"/>
+                </a:solidFill>
+                <a:latin typeface="Aptos"/>
+              </a:rPr>
+              <a:t>active fraction</a:t>
+            </a:r>
+          </a:p>
+        </p:txBody>
+      </p:sp>
+      <p:sp>
+        <p:nvSpPr>
+          <p:cNvPr id="33" name="Rectangle 32"/>
+          <p:cNvSpPr/>
+          <p:nvPr/>
+        </p:nvSpPr>
+        <p:spPr>
+          <a:xfrm>
+            <a:off x="2834640" y="3547871"/>
+            <a:ext cx="4313041" cy="201168"/>
+          </a:xfrm>
+          <a:prstGeom prst="rect">
+            <a:avLst/>
+          </a:prstGeom>
+          <a:solidFill>
+            <a:srgbClr val="94A3B8"/>
+          </a:solidFill>
+          <a:ln>
+            <a:solidFill>
+              <a:srgbClr val="94A3B8"/>
+            </a:solidFill>
+          </a:ln>
+        </p:spPr>
+        <p:style>
+          <a:lnRef idx="1">
+            <a:schemeClr val="accent1"/>
+          </a:lnRef>
+          <a:fillRef idx="3">
+            <a:schemeClr val="accent1"/>
+          </a:fillRef>
+          <a:effectRef idx="2">
+            <a:schemeClr val="accent1"/>
+          </a:effectRef>
+          <a:fontRef idx="minor">
+            <a:schemeClr val="lt1"/>
+          </a:fontRef>
+        </p:style>
+        <p:txBody>
+          <a:bodyPr rtlCol="0" anchor="ctr"/>
+          <a:lstStyle/>
+          <a:p>
+            <a:pPr algn="ctr"/>
+          </a:p>
+        </p:txBody>
+      </p:sp>
+      <p:sp>
+        <p:nvSpPr>
+          <p:cNvPr id="34" name="TextBox 33"/>
+          <p:cNvSpPr txBox="1"/>
+          <p:nvPr/>
+        </p:nvSpPr>
+        <p:spPr>
+          <a:xfrm>
+            <a:off x="7680960" y="3520439"/>
+            <a:ext cx="548640" cy="228600"/>
+          </a:xfrm>
+          <a:prstGeom prst="rect">
+            <a:avLst/>
+          </a:prstGeom>
+          <a:noFill/>
+        </p:spPr>
+        <p:txBody>
+          <a:bodyPr wrap="none" lIns="27432">
+            <a:spAutoFit/>
+          </a:bodyPr>
+          <a:lstStyle/>
+          <a:p>
+            <a:pPr algn="l"/>
+            <a:r>
+              <a:rPr sz="1000" b="1">
+                <a:solidFill>
+                  <a:srgbClr val="111827"/>
+                </a:solidFill>
+                <a:latin typeface="Aptos"/>
+              </a:rPr>
+              <a:t>7.04</a:t>
+            </a:r>
+          </a:p>
+        </p:txBody>
+      </p:sp>
+      <p:sp>
+        <p:nvSpPr>
+          <p:cNvPr id="35" name="TextBox 34"/>
+          <p:cNvSpPr txBox="1"/>
+          <p:nvPr/>
+        </p:nvSpPr>
+        <p:spPr>
+          <a:xfrm>
+            <a:off x="8229600" y="3520439"/>
+            <a:ext cx="685800" cy="228600"/>
+          </a:xfrm>
+          <a:prstGeom prst="rect">
+            <a:avLst/>
+          </a:prstGeom>
+          <a:noFill/>
+        </p:spPr>
+        <p:txBody>
+          <a:bodyPr wrap="none" lIns="27432">
+            <a:spAutoFit/>
+          </a:bodyPr>
+          <a:lstStyle/>
+          <a:p>
+            <a:pPr algn="l"/>
+            <a:r>
+              <a:rPr sz="1000" b="0">
+                <a:solidFill>
+                  <a:srgbClr val="64748B"/>
+                </a:solidFill>
+                <a:latin typeface="Aptos"/>
+              </a:rPr>
+              <a:t>178/215</a:t>
+            </a:r>
+          </a:p>
+        </p:txBody>
+      </p:sp>
+      <p:sp>
+        <p:nvSpPr>
+          <p:cNvPr id="36" name="TextBox 35"/>
+          <p:cNvSpPr txBox="1"/>
+          <p:nvPr/>
+        </p:nvSpPr>
+        <p:spPr>
+          <a:xfrm>
+            <a:off x="594360" y="3950208"/>
+            <a:ext cx="731520" cy="228600"/>
+          </a:xfrm>
+          <a:prstGeom prst="rect">
+            <a:avLst/>
+          </a:prstGeom>
+          <a:noFill/>
+        </p:spPr>
+        <p:txBody>
+          <a:bodyPr wrap="none" lIns="27432">
+            <a:spAutoFit/>
+          </a:bodyPr>
+          <a:lstStyle/>
+          <a:p>
+            <a:pPr algn="r"/>
+            <a:r>
+              <a:rPr sz="1100" b="1">
+                <a:solidFill>
+                  <a:srgbClr val="111827"/>
+                </a:solidFill>
+                <a:latin typeface="Aptos"/>
+              </a:rPr>
+              <a:t>15916</a:t>
+            </a:r>
+          </a:p>
+        </p:txBody>
+      </p:sp>
+      <p:sp>
+        <p:nvSpPr>
+          <p:cNvPr id="37" name="TextBox 36"/>
+          <p:cNvSpPr txBox="1"/>
+          <p:nvPr/>
+        </p:nvSpPr>
+        <p:spPr>
+          <a:xfrm>
+            <a:off x="1417320" y="3950208"/>
+            <a:ext cx="1371600" cy="228600"/>
+          </a:xfrm>
+          <a:prstGeom prst="rect">
+            <a:avLst/>
+          </a:prstGeom>
+          <a:noFill/>
+        </p:spPr>
+        <p:txBody>
+          <a:bodyPr wrap="none" lIns="27432">
+            <a:spAutoFit/>
+          </a:bodyPr>
+          <a:lstStyle/>
+          <a:p>
+            <a:pPr algn="l"/>
+            <a:r>
+              <a:rPr sz="1000" b="0">
+                <a:solidFill>
+                  <a:srgbClr val="64748B"/>
+                </a:solidFill>
+                <a:latin typeface="Aptos"/>
+              </a:rPr>
+              <a:t>active fraction</a:t>
+            </a:r>
+          </a:p>
+        </p:txBody>
+      </p:sp>
+      <p:sp>
+        <p:nvSpPr>
+          <p:cNvPr id="38" name="Rectangle 37"/>
+          <p:cNvSpPr/>
+          <p:nvPr/>
+        </p:nvSpPr>
+        <p:spPr>
+          <a:xfrm>
+            <a:off x="2834640" y="3977640"/>
+            <a:ext cx="4313041" cy="201168"/>
+          </a:xfrm>
+          <a:prstGeom prst="rect">
+            <a:avLst/>
+          </a:prstGeom>
+          <a:solidFill>
+            <a:srgbClr val="94A3B8"/>
+          </a:solidFill>
+          <a:ln>
+            <a:solidFill>
+              <a:srgbClr val="94A3B8"/>
+            </a:solidFill>
+          </a:ln>
+        </p:spPr>
+        <p:style>
+          <a:lnRef idx="1">
+            <a:schemeClr val="accent1"/>
+          </a:lnRef>
+          <a:fillRef idx="3">
+            <a:schemeClr val="accent1"/>
+          </a:fillRef>
+          <a:effectRef idx="2">
+            <a:schemeClr val="accent1"/>
+          </a:effectRef>
+          <a:fontRef idx="minor">
+            <a:schemeClr val="lt1"/>
+          </a:fontRef>
+        </p:style>
+        <p:txBody>
+          <a:bodyPr rtlCol="0" anchor="ctr"/>
+          <a:lstStyle/>
+          <a:p>
+            <a:pPr algn="ctr"/>
+          </a:p>
+        </p:txBody>
+      </p:sp>
+      <p:sp>
+        <p:nvSpPr>
+          <p:cNvPr id="39" name="TextBox 38"/>
+          <p:cNvSpPr txBox="1"/>
+          <p:nvPr/>
+        </p:nvSpPr>
+        <p:spPr>
+          <a:xfrm>
+            <a:off x="7680960" y="3950208"/>
+            <a:ext cx="548640" cy="228600"/>
+          </a:xfrm>
+          <a:prstGeom prst="rect">
+            <a:avLst/>
+          </a:prstGeom>
+          <a:noFill/>
+        </p:spPr>
+        <p:txBody>
+          <a:bodyPr wrap="none" lIns="27432">
+            <a:spAutoFit/>
+          </a:bodyPr>
+          <a:lstStyle/>
+          <a:p>
+            <a:pPr algn="l"/>
+            <a:r>
+              <a:rPr sz="1000" b="1">
+                <a:solidFill>
+                  <a:srgbClr val="111827"/>
+                </a:solidFill>
+                <a:latin typeface="Aptos"/>
+              </a:rPr>
+              <a:t>7.04</a:t>
+            </a:r>
+          </a:p>
+        </p:txBody>
+      </p:sp>
+      <p:sp>
+        <p:nvSpPr>
+          <p:cNvPr id="40" name="TextBox 39"/>
+          <p:cNvSpPr txBox="1"/>
+          <p:nvPr/>
+        </p:nvSpPr>
+        <p:spPr>
+          <a:xfrm>
+            <a:off x="8229600" y="3950208"/>
+            <a:ext cx="685800" cy="228600"/>
+          </a:xfrm>
+          <a:prstGeom prst="rect">
+            <a:avLst/>
+          </a:prstGeom>
+          <a:noFill/>
+        </p:spPr>
+        <p:txBody>
+          <a:bodyPr wrap="none" lIns="27432">
+            <a:spAutoFit/>
+          </a:bodyPr>
+          <a:lstStyle/>
+          <a:p>
+            <a:pPr algn="l"/>
+            <a:r>
+              <a:rPr sz="1000" b="0">
+                <a:solidFill>
+                  <a:srgbClr val="64748B"/>
+                </a:solidFill>
+                <a:latin typeface="Aptos"/>
+              </a:rPr>
+              <a:t>136/215</a:t>
+            </a:r>
+          </a:p>
+        </p:txBody>
+      </p:sp>
+      <p:sp>
+        <p:nvSpPr>
+          <p:cNvPr id="41" name="TextBox 40"/>
+          <p:cNvSpPr txBox="1"/>
+          <p:nvPr/>
+        </p:nvSpPr>
+        <p:spPr>
+          <a:xfrm>
+            <a:off x="594360" y="4379976"/>
+            <a:ext cx="731520" cy="228600"/>
+          </a:xfrm>
+          <a:prstGeom prst="rect">
+            <a:avLst/>
+          </a:prstGeom>
+          <a:noFill/>
+        </p:spPr>
+        <p:txBody>
+          <a:bodyPr wrap="none" lIns="27432">
+            <a:spAutoFit/>
+          </a:bodyPr>
+          <a:lstStyle/>
+          <a:p>
+            <a:pPr algn="r"/>
+            <a:r>
+              <a:rPr sz="1100" b="1">
+                <a:solidFill>
+                  <a:srgbClr val="111827"/>
+                </a:solidFill>
+                <a:latin typeface="Aptos"/>
+              </a:rPr>
+              <a:t>10168</a:t>
+            </a:r>
+          </a:p>
+        </p:txBody>
+      </p:sp>
+      <p:sp>
+        <p:nvSpPr>
+          <p:cNvPr id="42" name="TextBox 41"/>
+          <p:cNvSpPr txBox="1"/>
+          <p:nvPr/>
+        </p:nvSpPr>
+        <p:spPr>
+          <a:xfrm>
+            <a:off x="1417320" y="4379976"/>
+            <a:ext cx="1371600" cy="228600"/>
+          </a:xfrm>
+          <a:prstGeom prst="rect">
+            <a:avLst/>
+          </a:prstGeom>
+          <a:noFill/>
+        </p:spPr>
+        <p:txBody>
+          <a:bodyPr wrap="none" lIns="27432">
+            <a:spAutoFit/>
+          </a:bodyPr>
+          <a:lstStyle/>
+          <a:p>
+            <a:pPr algn="l"/>
+            <a:r>
+              <a:rPr sz="1000" b="0">
+                <a:solidFill>
+                  <a:srgbClr val="64748B"/>
+                </a:solidFill>
+                <a:latin typeface="Aptos"/>
+              </a:rPr>
+              <a:t>active fraction</a:t>
+            </a:r>
+          </a:p>
+        </p:txBody>
+      </p:sp>
+      <p:sp>
+        <p:nvSpPr>
+          <p:cNvPr id="43" name="Rectangle 42"/>
+          <p:cNvSpPr/>
+          <p:nvPr/>
+        </p:nvSpPr>
+        <p:spPr>
+          <a:xfrm>
+            <a:off x="2834640" y="4407408"/>
+            <a:ext cx="4276283" cy="201168"/>
+          </a:xfrm>
+          <a:prstGeom prst="rect">
+            <a:avLst/>
+          </a:prstGeom>
+          <a:solidFill>
+            <a:srgbClr val="94A3B8"/>
+          </a:solidFill>
+          <a:ln>
+            <a:solidFill>
+              <a:srgbClr val="94A3B8"/>
+            </a:solidFill>
+          </a:ln>
+        </p:spPr>
+        <p:style>
+          <a:lnRef idx="1">
+            <a:schemeClr val="accent1"/>
+          </a:lnRef>
+          <a:fillRef idx="3">
+            <a:schemeClr val="accent1"/>
+          </a:fillRef>
+          <a:effectRef idx="2">
+            <a:schemeClr val="accent1"/>
+          </a:effectRef>
+          <a:fontRef idx="minor">
+            <a:schemeClr val="lt1"/>
+          </a:fontRef>
+        </p:style>
+        <p:txBody>
+          <a:bodyPr rtlCol="0" anchor="ctr"/>
+          <a:lstStyle/>
+          <a:p>
+            <a:pPr algn="ctr"/>
+          </a:p>
+        </p:txBody>
+      </p:sp>
+      <p:sp>
+        <p:nvSpPr>
+          <p:cNvPr id="44" name="TextBox 43"/>
+          <p:cNvSpPr txBox="1"/>
+          <p:nvPr/>
+        </p:nvSpPr>
+        <p:spPr>
+          <a:xfrm>
+            <a:off x="7680960" y="4379976"/>
+            <a:ext cx="548640" cy="228600"/>
+          </a:xfrm>
+          <a:prstGeom prst="rect">
+            <a:avLst/>
+          </a:prstGeom>
+          <a:noFill/>
+        </p:spPr>
+        <p:txBody>
+          <a:bodyPr wrap="none" lIns="27432">
+            <a:spAutoFit/>
+          </a:bodyPr>
+          <a:lstStyle/>
+          <a:p>
+            <a:pPr algn="l"/>
+            <a:r>
+              <a:rPr sz="1000" b="1">
+                <a:solidFill>
+                  <a:srgbClr val="111827"/>
+                </a:solidFill>
+                <a:latin typeface="Aptos"/>
+              </a:rPr>
+              <a:t>6.98</a:t>
+            </a:r>
+          </a:p>
+        </p:txBody>
+      </p:sp>
+      <p:sp>
+        <p:nvSpPr>
+          <p:cNvPr id="45" name="TextBox 44"/>
+          <p:cNvSpPr txBox="1"/>
+          <p:nvPr/>
+        </p:nvSpPr>
+        <p:spPr>
+          <a:xfrm>
+            <a:off x="8229600" y="4379976"/>
+            <a:ext cx="685800" cy="228600"/>
+          </a:xfrm>
+          <a:prstGeom prst="rect">
+            <a:avLst/>
+          </a:prstGeom>
+          <a:noFill/>
+        </p:spPr>
+        <p:txBody>
+          <a:bodyPr wrap="none" lIns="27432">
+            <a:spAutoFit/>
+          </a:bodyPr>
+          <a:lstStyle/>
+          <a:p>
+            <a:pPr algn="l"/>
+            <a:r>
+              <a:rPr sz="1000" b="0">
+                <a:solidFill>
+                  <a:srgbClr val="64748B"/>
+                </a:solidFill>
+                <a:latin typeface="Aptos"/>
+              </a:rPr>
+              <a:t>156/215</a:t>
+            </a:r>
+          </a:p>
+        </p:txBody>
+      </p:sp>
+      <p:sp>
+        <p:nvSpPr>
+          <p:cNvPr id="46" name="TextBox 45"/>
+          <p:cNvSpPr txBox="1"/>
+          <p:nvPr/>
+        </p:nvSpPr>
+        <p:spPr>
+          <a:xfrm>
+            <a:off x="594360" y="4809744"/>
+            <a:ext cx="731520" cy="228600"/>
+          </a:xfrm>
+          <a:prstGeom prst="rect">
+            <a:avLst/>
+          </a:prstGeom>
+          <a:noFill/>
+        </p:spPr>
+        <p:txBody>
+          <a:bodyPr wrap="none" lIns="27432">
+            <a:spAutoFit/>
+          </a:bodyPr>
+          <a:lstStyle/>
+          <a:p>
+            <a:pPr algn="r"/>
+            <a:r>
+              <a:rPr sz="1100" b="1">
+                <a:solidFill>
+                  <a:srgbClr val="111827"/>
+                </a:solidFill>
+                <a:latin typeface="Aptos"/>
+              </a:rPr>
+              <a:t>13801</a:t>
+            </a:r>
+          </a:p>
+        </p:txBody>
+      </p:sp>
+      <p:sp>
+        <p:nvSpPr>
+          <p:cNvPr id="47" name="TextBox 46"/>
+          <p:cNvSpPr txBox="1"/>
+          <p:nvPr/>
+        </p:nvSpPr>
+        <p:spPr>
+          <a:xfrm>
+            <a:off x="1417320" y="4809744"/>
+            <a:ext cx="1371600" cy="228600"/>
+          </a:xfrm>
+          <a:prstGeom prst="rect">
+            <a:avLst/>
+          </a:prstGeom>
+          <a:noFill/>
+        </p:spPr>
+        <p:txBody>
+          <a:bodyPr wrap="none" lIns="27432">
+            <a:spAutoFit/>
+          </a:bodyPr>
+          <a:lstStyle/>
+          <a:p>
+            <a:pPr algn="l"/>
+            <a:r>
+              <a:rPr sz="1000" b="0">
+                <a:solidFill>
+                  <a:srgbClr val="64748B"/>
+                </a:solidFill>
+                <a:latin typeface="Aptos"/>
+              </a:rPr>
+              <a:t>active fraction</a:t>
+            </a:r>
+          </a:p>
+        </p:txBody>
+      </p:sp>
+      <p:sp>
+        <p:nvSpPr>
+          <p:cNvPr id="48" name="Rectangle 47"/>
+          <p:cNvSpPr/>
+          <p:nvPr/>
+        </p:nvSpPr>
+        <p:spPr>
+          <a:xfrm>
+            <a:off x="2834640" y="4837176"/>
+            <a:ext cx="4251777" cy="201168"/>
+          </a:xfrm>
+          <a:prstGeom prst="rect">
+            <a:avLst/>
+          </a:prstGeom>
+          <a:solidFill>
+            <a:srgbClr val="94A3B8"/>
+          </a:solidFill>
+          <a:ln>
+            <a:solidFill>
+              <a:srgbClr val="94A3B8"/>
+            </a:solidFill>
+          </a:ln>
+        </p:spPr>
+        <p:style>
+          <a:lnRef idx="1">
+            <a:schemeClr val="accent1"/>
+          </a:lnRef>
+          <a:fillRef idx="3">
+            <a:schemeClr val="accent1"/>
+          </a:fillRef>
+          <a:effectRef idx="2">
+            <a:schemeClr val="accent1"/>
+          </a:effectRef>
+          <a:fontRef idx="minor">
+            <a:schemeClr val="lt1"/>
+          </a:fontRef>
+        </p:style>
+        <p:txBody>
+          <a:bodyPr rtlCol="0" anchor="ctr"/>
+          <a:lstStyle/>
+          <a:p>
+            <a:pPr algn="ctr"/>
+          </a:p>
+        </p:txBody>
+      </p:sp>
+      <p:sp>
+        <p:nvSpPr>
+          <p:cNvPr id="49" name="TextBox 48"/>
+          <p:cNvSpPr txBox="1"/>
+          <p:nvPr/>
+        </p:nvSpPr>
+        <p:spPr>
+          <a:xfrm>
+            <a:off x="7680960" y="4809744"/>
+            <a:ext cx="548640" cy="228600"/>
+          </a:xfrm>
+          <a:prstGeom prst="rect">
+            <a:avLst/>
+          </a:prstGeom>
+          <a:noFill/>
+        </p:spPr>
+        <p:txBody>
+          <a:bodyPr wrap="none" lIns="27432">
+            <a:spAutoFit/>
+          </a:bodyPr>
+          <a:lstStyle/>
+          <a:p>
+            <a:pPr algn="l"/>
+            <a:r>
+              <a:rPr sz="1000" b="1">
+                <a:solidFill>
+                  <a:srgbClr val="111827"/>
+                </a:solidFill>
+                <a:latin typeface="Aptos"/>
+              </a:rPr>
+              <a:t>6.94</a:t>
+            </a:r>
+          </a:p>
+        </p:txBody>
+      </p:sp>
+      <p:sp>
+        <p:nvSpPr>
+          <p:cNvPr id="50" name="TextBox 49"/>
+          <p:cNvSpPr txBox="1"/>
+          <p:nvPr/>
+        </p:nvSpPr>
+        <p:spPr>
+          <a:xfrm>
+            <a:off x="8229600" y="4809744"/>
+            <a:ext cx="685800" cy="228600"/>
+          </a:xfrm>
+          <a:prstGeom prst="rect">
+            <a:avLst/>
+          </a:prstGeom>
+          <a:noFill/>
+        </p:spPr>
+        <p:txBody>
+          <a:bodyPr wrap="none" lIns="27432">
+            <a:spAutoFit/>
+          </a:bodyPr>
+          <a:lstStyle/>
+          <a:p>
+            <a:pPr algn="l"/>
+            <a:r>
+              <a:rPr sz="1000" b="0">
+                <a:solidFill>
+                  <a:srgbClr val="64748B"/>
+                </a:solidFill>
+                <a:latin typeface="Aptos"/>
+              </a:rPr>
+              <a:t>164/215</a:t>
+            </a:r>
+          </a:p>
+        </p:txBody>
+      </p:sp>
+      <p:sp>
+        <p:nvSpPr>
+          <p:cNvPr id="51" name="TextBox 50"/>
+          <p:cNvSpPr txBox="1"/>
+          <p:nvPr/>
+        </p:nvSpPr>
+        <p:spPr>
+          <a:xfrm>
+            <a:off x="594360" y="5239512"/>
+            <a:ext cx="731520" cy="228600"/>
+          </a:xfrm>
+          <a:prstGeom prst="rect">
+            <a:avLst/>
+          </a:prstGeom>
+          <a:noFill/>
+        </p:spPr>
+        <p:txBody>
+          <a:bodyPr wrap="none" lIns="27432">
+            <a:spAutoFit/>
+          </a:bodyPr>
+          <a:lstStyle/>
+          <a:p>
+            <a:pPr algn="r"/>
+            <a:r>
+              <a:rPr sz="1100" b="1">
+                <a:solidFill>
+                  <a:srgbClr val="111827"/>
+                </a:solidFill>
+                <a:latin typeface="Aptos"/>
+              </a:rPr>
+              <a:t>12308</a:t>
+            </a:r>
+          </a:p>
+        </p:txBody>
+      </p:sp>
+      <p:sp>
+        <p:nvSpPr>
+          <p:cNvPr id="52" name="TextBox 51"/>
+          <p:cNvSpPr txBox="1"/>
+          <p:nvPr/>
+        </p:nvSpPr>
+        <p:spPr>
+          <a:xfrm>
+            <a:off x="1417320" y="5239512"/>
+            <a:ext cx="1371600" cy="228600"/>
+          </a:xfrm>
+          <a:prstGeom prst="rect">
+            <a:avLst/>
+          </a:prstGeom>
+          <a:noFill/>
+        </p:spPr>
+        <p:txBody>
+          <a:bodyPr wrap="none" lIns="27432">
+            <a:spAutoFit/>
+          </a:bodyPr>
+          <a:lstStyle/>
+          <a:p>
+            <a:pPr algn="l"/>
+            <a:r>
+              <a:rPr sz="1000" b="0">
+                <a:solidFill>
+                  <a:srgbClr val="64748B"/>
+                </a:solidFill>
+                <a:latin typeface="Aptos"/>
+              </a:rPr>
+              <a:t>active fraction</a:t>
+            </a:r>
+          </a:p>
+        </p:txBody>
+      </p:sp>
+      <p:sp>
+        <p:nvSpPr>
+          <p:cNvPr id="53" name="Rectangle 52"/>
+          <p:cNvSpPr/>
+          <p:nvPr/>
+        </p:nvSpPr>
+        <p:spPr>
+          <a:xfrm>
+            <a:off x="2834640" y="5266944"/>
+            <a:ext cx="4215018" cy="201168"/>
+          </a:xfrm>
+          <a:prstGeom prst="rect">
+            <a:avLst/>
+          </a:prstGeom>
+          <a:solidFill>
+            <a:srgbClr val="94A3B8"/>
+          </a:solidFill>
+          <a:ln>
+            <a:solidFill>
+              <a:srgbClr val="94A3B8"/>
+            </a:solidFill>
+          </a:ln>
+        </p:spPr>
+        <p:style>
+          <a:lnRef idx="1">
+            <a:schemeClr val="accent1"/>
+          </a:lnRef>
+          <a:fillRef idx="3">
+            <a:schemeClr val="accent1"/>
+          </a:fillRef>
+          <a:effectRef idx="2">
+            <a:schemeClr val="accent1"/>
+          </a:effectRef>
+          <a:fontRef idx="minor">
+            <a:schemeClr val="lt1"/>
+          </a:fontRef>
+        </p:style>
+        <p:txBody>
+          <a:bodyPr rtlCol="0" anchor="ctr"/>
+          <a:lstStyle/>
+          <a:p>
+            <a:pPr algn="ctr"/>
+          </a:p>
+        </p:txBody>
+      </p:sp>
+      <p:sp>
+        <p:nvSpPr>
+          <p:cNvPr id="54" name="TextBox 53"/>
+          <p:cNvSpPr txBox="1"/>
+          <p:nvPr/>
+        </p:nvSpPr>
+        <p:spPr>
+          <a:xfrm>
+            <a:off x="7680960" y="5239512"/>
+            <a:ext cx="548640" cy="228600"/>
+          </a:xfrm>
+          <a:prstGeom prst="rect">
+            <a:avLst/>
+          </a:prstGeom>
+          <a:noFill/>
+        </p:spPr>
+        <p:txBody>
+          <a:bodyPr wrap="none" lIns="27432">
+            <a:spAutoFit/>
+          </a:bodyPr>
+          <a:lstStyle/>
+          <a:p>
+            <a:pPr algn="l"/>
+            <a:r>
+              <a:rPr sz="1000" b="1">
+                <a:solidFill>
+                  <a:srgbClr val="111827"/>
+                </a:solidFill>
+                <a:latin typeface="Aptos"/>
+              </a:rPr>
+              <a:t>6.88</a:t>
+            </a:r>
+          </a:p>
+        </p:txBody>
+      </p:sp>
+      <p:sp>
+        <p:nvSpPr>
+          <p:cNvPr id="55" name="TextBox 54"/>
+          <p:cNvSpPr txBox="1"/>
+          <p:nvPr/>
+        </p:nvSpPr>
+        <p:spPr>
+          <a:xfrm>
+            <a:off x="8229600" y="5239512"/>
+            <a:ext cx="685800" cy="228600"/>
+          </a:xfrm>
+          <a:prstGeom prst="rect">
+            <a:avLst/>
+          </a:prstGeom>
+          <a:noFill/>
+        </p:spPr>
+        <p:txBody>
+          <a:bodyPr wrap="none" lIns="27432">
+            <a:spAutoFit/>
+          </a:bodyPr>
+          <a:lstStyle/>
+          <a:p>
+            <a:pPr algn="l"/>
+            <a:r>
+              <a:rPr sz="1000" b="0">
+                <a:solidFill>
+                  <a:srgbClr val="64748B"/>
+                </a:solidFill>
+                <a:latin typeface="Aptos"/>
+              </a:rPr>
+              <a:t>145/215</a:t>
+            </a:r>
+          </a:p>
+        </p:txBody>
+      </p:sp>
+      <p:sp>
+        <p:nvSpPr>
+          <p:cNvPr id="56" name="Rectangle 55"/>
+          <p:cNvSpPr/>
+          <p:nvPr/>
+        </p:nvSpPr>
+        <p:spPr>
+          <a:xfrm>
+            <a:off x="9052560" y="1371600"/>
+            <a:ext cx="2514600" cy="4480560"/>
+          </a:xfrm>
+          <a:prstGeom prst="rect">
+            <a:avLst/>
+          </a:prstGeom>
+          <a:solidFill>
+            <a:srgbClr val="FFF7ED"/>
+          </a:solidFill>
+          <a:ln>
+            <a:solidFill>
+              <a:srgbClr val="FFF7ED"/>
+            </a:solidFill>
+          </a:ln>
+        </p:spPr>
+        <p:style>
+          <a:lnRef idx="1">
+            <a:schemeClr val="accent1"/>
+          </a:lnRef>
+          <a:fillRef idx="3">
+            <a:schemeClr val="accent1"/>
+          </a:fillRef>
+          <a:effectRef idx="2">
+            <a:schemeClr val="accent1"/>
+          </a:effectRef>
+          <a:fontRef idx="minor">
+            <a:schemeClr val="lt1"/>
+          </a:fontRef>
+        </p:style>
+        <p:txBody>
+          <a:bodyPr rtlCol="0" anchor="ctr"/>
+          <a:lstStyle/>
+          <a:p>
+            <a:pPr algn="ctr"/>
+          </a:p>
+        </p:txBody>
+      </p:sp>
+      <p:sp>
+        <p:nvSpPr>
+          <p:cNvPr id="57" name="TextBox 56"/>
+          <p:cNvSpPr txBox="1"/>
+          <p:nvPr/>
+        </p:nvSpPr>
+        <p:spPr>
+          <a:xfrm>
+            <a:off x="9326880" y="1737360"/>
+            <a:ext cx="1965960" cy="274320"/>
+          </a:xfrm>
+          <a:prstGeom prst="rect">
+            <a:avLst/>
+          </a:prstGeom>
+          <a:noFill/>
+        </p:spPr>
+        <p:txBody>
+          <a:bodyPr wrap="none" lIns="27432">
+            <a:spAutoFit/>
+          </a:bodyPr>
+          <a:lstStyle/>
+          <a:p>
+            <a:pPr algn="ctr"/>
+            <a:r>
+              <a:rPr sz="1400" b="1">
+                <a:solidFill>
+                  <a:srgbClr val="F59E0B"/>
+                </a:solidFill>
+                <a:latin typeface="Aptos"/>
+              </a:rPr>
+              <a:t>FEATURE 5422</a:t>
+            </a:r>
+          </a:p>
+        </p:txBody>
+      </p:sp>
+      <p:sp>
+        <p:nvSpPr>
+          <p:cNvPr id="58" name="TextBox 57"/>
+          <p:cNvSpPr txBox="1"/>
+          <p:nvPr/>
+        </p:nvSpPr>
+        <p:spPr>
+          <a:xfrm>
+            <a:off x="9326880" y="2194560"/>
+            <a:ext cx="1965960" cy="3017520"/>
+          </a:xfrm>
+          <a:prstGeom prst="rect">
+            <a:avLst/>
+          </a:prstGeom>
+          <a:noFill/>
+        </p:spPr>
+        <p:txBody>
+          <a:bodyPr wrap="none" lIns="27432">
+            <a:spAutoFit/>
+          </a:bodyPr>
+          <a:lstStyle/>
+          <a:p>
+            <a:pPr algn="ctr"/>
+            <a:r>
+              <a:rPr sz="1800" b="1">
+                <a:solidFill>
+                  <a:srgbClr val="111827"/>
+                </a:solidFill>
+                <a:latin typeface="Aptos"/>
+              </a:rPr>
+              <a:t>#4
+E/V = -7.25
+135/215 base support
+reverse ROC 0.644
+6404: rank #989</a:t>
+            </a:r>
+          </a:p>
+        </p:txBody>
+      </p:sp>
+      <p:sp>
+        <p:nvSpPr>
+          <p:cNvPr id="59" name="TextBox 58"/>
+          <p:cNvSpPr txBox="1"/>
+          <p:nvPr/>
+        </p:nvSpPr>
+        <p:spPr>
+          <a:xfrm>
+            <a:off x="594360" y="6547104"/>
+            <a:ext cx="6400800" cy="164592"/>
+          </a:xfrm>
+          <a:prstGeom prst="rect">
+            <a:avLst/>
+          </a:prstGeom>
+          <a:noFill/>
+        </p:spPr>
+        <p:txBody>
+          <a:bodyPr wrap="none" lIns="27432">
+            <a:spAutoFit/>
+          </a:bodyPr>
+          <a:lstStyle/>
+          <a:p>
+            <a:pPr algn="l"/>
+            <a:r>
+              <a:rPr sz="800" b="0">
+                <a:solidFill>
+                  <a:srgbClr val="94A3B8"/>
+                </a:solidFill>
+                <a:latin typeface="Aptos"/>
+              </a:rPr>
+              <a:t>DSTK100 - exploratory improvement-feature audit</a:t>
+            </a:r>
+          </a:p>
+        </p:txBody>
+      </p:sp>
+      <p:sp>
+        <p:nvSpPr>
+          <p:cNvPr id="60" name="TextBox 59"/>
+          <p:cNvSpPr txBox="1"/>
+          <p:nvPr/>
+        </p:nvSpPr>
+        <p:spPr>
+          <a:xfrm>
+            <a:off x="11155680" y="6510528"/>
+            <a:ext cx="365760" cy="182880"/>
+          </a:xfrm>
+          <a:prstGeom prst="rect">
+            <a:avLst/>
+          </a:prstGeom>
+          <a:noFill/>
+        </p:spPr>
+        <p:txBody>
+          <a:bodyPr wrap="none" lIns="27432">
+            <a:spAutoFit/>
+          </a:bodyPr>
+          <a:lstStyle/>
+          <a:p>
+            <a:pPr algn="r"/>
+            <a:r>
+              <a:rPr sz="800" b="0">
+                <a:solidFill>
+                  <a:srgbClr val="94A3B8"/>
+                </a:solidFill>
+                <a:latin typeface="Aptos"/>
+              </a:rPr>
+              <a:t>17</a:t>
+            </a:r>
+          </a:p>
+        </p:txBody>
+      </p:sp>
+    </p:spTree>
+  </p:cSld>
+  <p:clrMapOvr>
+    <a:masterClrMapping/>
+  </p:clrMapOvr>
+</p:sld>
+</file>
+
+<file path=ppt/slides/slide18.xml><?xml version="1.0" encoding="utf-8"?>
+<p:sld xmlns:a="http://schemas.openxmlformats.org/drawingml/2006/main" xmlns:p="http://schemas.openxmlformats.org/presentationml/2006/main" xmlns:r="http://schemas.openxmlformats.org/officeDocument/2006/relationships">
+  <p:cSld>
+    <p:spTree>
+      <p:nvGrpSpPr>
+        <p:cNvPr id="1" name=""/>
+        <p:cNvGrpSpPr/>
+        <p:nvPr/>
+      </p:nvGrpSpPr>
+      <p:grpSpPr/>
+      <p:sp>
+        <p:nvSpPr>
+          <p:cNvPr id="3" name="Rectangle 2"/>
+          <p:cNvSpPr/>
+          <p:nvPr/>
+        </p:nvSpPr>
+        <p:spPr>
+          <a:xfrm>
+            <a:off x="0" y="0"/>
+            <a:ext cx="12191695" cy="6858000"/>
+          </a:xfrm>
+          <a:prstGeom prst="rect">
+            <a:avLst/>
+          </a:prstGeom>
+          <a:solidFill>
+            <a:srgbClr val="F8FAFC"/>
+          </a:solidFill>
+          <a:ln>
+            <a:solidFill>
+              <a:srgbClr val="F8FAFC"/>
+            </a:solidFill>
+          </a:ln>
+        </p:spPr>
+        <p:style>
+          <a:lnRef idx="1">
+            <a:schemeClr val="accent1"/>
+          </a:lnRef>
+          <a:fillRef idx="3">
+            <a:schemeClr val="accent1"/>
+          </a:fillRef>
+          <a:effectRef idx="2">
+            <a:schemeClr val="accent1"/>
+          </a:effectRef>
+          <a:fontRef idx="minor">
+            <a:schemeClr val="lt1"/>
+          </a:fontRef>
+        </p:style>
+        <p:txBody>
+          <a:bodyPr rtlCol="0" anchor="ctr"/>
+          <a:lstStyle/>
+          <a:p>
+            <a:pPr algn="ctr"/>
+          </a:p>
+        </p:txBody>
+      </p:sp>
+      <p:sp>
+        <p:nvSpPr>
+          <p:cNvPr id="2" name="Title 1"/>
+          <p:cNvSpPr>
+            <a:spLocks noGrp="1"/>
+          </p:cNvSpPr>
+          <p:nvPr>
+            <p:ph type="title"/>
+          </p:nvPr>
+        </p:nvSpPr>
+        <p:spPr/>
+        <p:txBody>
+          <a:bodyPr/>
+          <a:lstStyle/>
+          <a:p/>
+        </p:txBody>
+      </p:sp>
+      <p:sp>
+        <p:nvSpPr>
+          <p:cNvPr id="4" name="TextBox 3"/>
+          <p:cNvSpPr txBox="1"/>
+          <p:nvPr/>
+        </p:nvSpPr>
+        <p:spPr>
+          <a:xfrm>
+            <a:off x="594360" y="274320"/>
+            <a:ext cx="10972800" cy="228600"/>
+          </a:xfrm>
+          <a:prstGeom prst="rect">
+            <a:avLst/>
+          </a:prstGeom>
+          <a:noFill/>
+        </p:spPr>
+        <p:txBody>
+          <a:bodyPr wrap="none" lIns="27432">
+            <a:spAutoFit/>
+          </a:bodyPr>
+          <a:lstStyle/>
+          <a:p>
+            <a:pPr algn="l"/>
+            <a:r>
+              <a:rPr sz="1000" b="1">
+                <a:solidFill>
+                  <a:srgbClr val="2563EB"/>
+                </a:solidFill>
+                <a:latin typeface="Aptos"/>
+              </a:rPr>
+              <a:t>ACTIVATION TIMING</a:t>
+            </a:r>
+          </a:p>
+        </p:txBody>
+      </p:sp>
+      <p:sp>
+        <p:nvSpPr>
+          <p:cNvPr id="5" name="TextBox 4"/>
+          <p:cNvSpPr txBox="1"/>
+          <p:nvPr/>
+        </p:nvSpPr>
+        <p:spPr>
+          <a:xfrm>
+            <a:off x="594360" y="640080"/>
+            <a:ext cx="10972800" cy="594360"/>
+          </a:xfrm>
+          <a:prstGeom prst="rect">
+            <a:avLst/>
+          </a:prstGeom>
+          <a:noFill/>
+        </p:spPr>
+        <p:txBody>
+          <a:bodyPr wrap="none" lIns="27432">
+            <a:spAutoFit/>
+          </a:bodyPr>
+          <a:lstStyle/>
+          <a:p>
+            <a:pPr algn="l"/>
+            <a:r>
+              <a:rPr sz="2700" b="1">
+                <a:solidFill>
+                  <a:srgbClr val="111827"/>
+                </a:solidFill>
+                <a:latin typeface="Aptos"/>
+              </a:rPr>
+              <a:t>5422 appears around the transition into generated tests</a:t>
+            </a:r>
+          </a:p>
+        </p:txBody>
+      </p:sp>
+      <p:sp>
+        <p:nvSpPr>
+          <p:cNvPr id="6" name="Rectangle 5"/>
+          <p:cNvSpPr/>
+          <p:nvPr/>
+        </p:nvSpPr>
+        <p:spPr>
+          <a:xfrm>
+            <a:off x="822960" y="5033772"/>
+            <a:ext cx="914400" cy="178308"/>
+          </a:xfrm>
+          <a:prstGeom prst="rect">
+            <a:avLst/>
+          </a:prstGeom>
+          <a:solidFill>
+            <a:srgbClr val="FDBA74"/>
+          </a:solidFill>
+          <a:ln>
+            <a:solidFill>
+              <a:srgbClr val="FDBA74"/>
+            </a:solidFill>
+          </a:ln>
+        </p:spPr>
+        <p:style>
+          <a:lnRef idx="1">
+            <a:schemeClr val="accent1"/>
+          </a:lnRef>
+          <a:fillRef idx="3">
+            <a:schemeClr val="accent1"/>
+          </a:fillRef>
+          <a:effectRef idx="2">
+            <a:schemeClr val="accent1"/>
+          </a:effectRef>
+          <a:fontRef idx="minor">
+            <a:schemeClr val="lt1"/>
+          </a:fontRef>
+        </p:style>
+        <p:txBody>
+          <a:bodyPr rtlCol="0" anchor="ctr"/>
+          <a:lstStyle/>
+          <a:p>
+            <a:pPr algn="ctr"/>
+          </a:p>
+        </p:txBody>
+      </p:sp>
+      <p:sp>
+        <p:nvSpPr>
+          <p:cNvPr id="7" name="TextBox 6"/>
+          <p:cNvSpPr txBox="1"/>
+          <p:nvPr/>
+        </p:nvSpPr>
+        <p:spPr>
+          <a:xfrm>
+            <a:off x="822960" y="4759452"/>
+            <a:ext cx="914400" cy="228600"/>
+          </a:xfrm>
+          <a:prstGeom prst="rect">
+            <a:avLst/>
+          </a:prstGeom>
+          <a:noFill/>
+        </p:spPr>
+        <p:txBody>
+          <a:bodyPr wrap="none" lIns="27432">
+            <a:spAutoFit/>
+          </a:bodyPr>
+          <a:lstStyle/>
+          <a:p>
+            <a:pPr algn="ctr"/>
+            <a:r>
+              <a:rPr sz="1300" b="1">
+                <a:solidFill>
+                  <a:srgbClr val="111827"/>
+                </a:solidFill>
+                <a:latin typeface="Aptos"/>
+              </a:rPr>
+              <a:t>3</a:t>
+            </a:r>
+          </a:p>
+        </p:txBody>
+      </p:sp>
+      <p:sp>
+        <p:nvSpPr>
+          <p:cNvPr id="8" name="TextBox 7"/>
+          <p:cNvSpPr txBox="1"/>
+          <p:nvPr/>
+        </p:nvSpPr>
+        <p:spPr>
+          <a:xfrm>
+            <a:off x="731520" y="5349240"/>
+            <a:ext cx="1097280" cy="274320"/>
+          </a:xfrm>
+          <a:prstGeom prst="rect">
+            <a:avLst/>
+          </a:prstGeom>
+          <a:noFill/>
+        </p:spPr>
+        <p:txBody>
+          <a:bodyPr wrap="none" lIns="27432">
+            <a:spAutoFit/>
+          </a:bodyPr>
+          <a:lstStyle/>
+          <a:p>
+            <a:pPr algn="ctr"/>
+            <a:r>
+              <a:rPr sz="1100" b="0">
+                <a:solidFill>
+                  <a:srgbClr val="64748B"/>
+                </a:solidFill>
+                <a:latin typeface="Aptos"/>
+              </a:rPr>
+              <a:t>0-10%</a:t>
+            </a:r>
+          </a:p>
+        </p:txBody>
+      </p:sp>
+      <p:sp>
+        <p:nvSpPr>
+          <p:cNvPr id="9" name="Rectangle 8"/>
+          <p:cNvSpPr/>
+          <p:nvPr/>
+        </p:nvSpPr>
+        <p:spPr>
+          <a:xfrm>
+            <a:off x="2194560" y="3726180"/>
+            <a:ext cx="914400" cy="1485900"/>
+          </a:xfrm>
+          <a:prstGeom prst="rect">
+            <a:avLst/>
+          </a:prstGeom>
+          <a:solidFill>
+            <a:srgbClr val="FDBA74"/>
+          </a:solidFill>
+          <a:ln>
+            <a:solidFill>
+              <a:srgbClr val="FDBA74"/>
+            </a:solidFill>
+          </a:ln>
+        </p:spPr>
+        <p:style>
+          <a:lnRef idx="1">
+            <a:schemeClr val="accent1"/>
+          </a:lnRef>
+          <a:fillRef idx="3">
+            <a:schemeClr val="accent1"/>
+          </a:fillRef>
+          <a:effectRef idx="2">
+            <a:schemeClr val="accent1"/>
+          </a:effectRef>
+          <a:fontRef idx="minor">
+            <a:schemeClr val="lt1"/>
+          </a:fontRef>
+        </p:style>
+        <p:txBody>
+          <a:bodyPr rtlCol="0" anchor="ctr"/>
+          <a:lstStyle/>
+          <a:p>
+            <a:pPr algn="ctr"/>
+          </a:p>
+        </p:txBody>
+      </p:sp>
+      <p:sp>
+        <p:nvSpPr>
+          <p:cNvPr id="10" name="TextBox 9"/>
+          <p:cNvSpPr txBox="1"/>
+          <p:nvPr/>
+        </p:nvSpPr>
+        <p:spPr>
+          <a:xfrm>
+            <a:off x="2194560" y="3451860"/>
+            <a:ext cx="914400" cy="228600"/>
+          </a:xfrm>
+          <a:prstGeom prst="rect">
+            <a:avLst/>
+          </a:prstGeom>
+          <a:noFill/>
+        </p:spPr>
+        <p:txBody>
+          <a:bodyPr wrap="none" lIns="27432">
+            <a:spAutoFit/>
+          </a:bodyPr>
+          <a:lstStyle/>
+          <a:p>
+            <a:pPr algn="ctr"/>
+            <a:r>
+              <a:rPr sz="1300" b="1">
+                <a:solidFill>
+                  <a:srgbClr val="111827"/>
+                </a:solidFill>
+                <a:latin typeface="Aptos"/>
+              </a:rPr>
+              <a:t>25</a:t>
+            </a:r>
+          </a:p>
+        </p:txBody>
+      </p:sp>
+      <p:sp>
+        <p:nvSpPr>
+          <p:cNvPr id="11" name="TextBox 10"/>
+          <p:cNvSpPr txBox="1"/>
+          <p:nvPr/>
+        </p:nvSpPr>
+        <p:spPr>
+          <a:xfrm>
+            <a:off x="2103120" y="5349240"/>
+            <a:ext cx="1097280" cy="274320"/>
+          </a:xfrm>
+          <a:prstGeom prst="rect">
+            <a:avLst/>
+          </a:prstGeom>
+          <a:noFill/>
+        </p:spPr>
+        <p:txBody>
+          <a:bodyPr wrap="none" lIns="27432">
+            <a:spAutoFit/>
+          </a:bodyPr>
+          <a:lstStyle/>
+          <a:p>
+            <a:pPr algn="ctr"/>
+            <a:r>
+              <a:rPr sz="1100" b="0">
+                <a:solidFill>
+                  <a:srgbClr val="64748B"/>
+                </a:solidFill>
+                <a:latin typeface="Aptos"/>
+              </a:rPr>
+              <a:t>10-25%</a:t>
+            </a:r>
+          </a:p>
+        </p:txBody>
+      </p:sp>
+      <p:sp>
+        <p:nvSpPr>
+          <p:cNvPr id="12" name="Rectangle 11"/>
+          <p:cNvSpPr/>
+          <p:nvPr/>
+        </p:nvSpPr>
+        <p:spPr>
+          <a:xfrm>
+            <a:off x="3566160" y="1883664"/>
+            <a:ext cx="914400" cy="3328416"/>
+          </a:xfrm>
+          <a:prstGeom prst="rect">
+            <a:avLst/>
+          </a:prstGeom>
+          <a:solidFill>
+            <a:srgbClr val="F59E0B"/>
+          </a:solidFill>
+          <a:ln>
+            <a:solidFill>
+              <a:srgbClr val="F59E0B"/>
+            </a:solidFill>
+          </a:ln>
+        </p:spPr>
+        <p:style>
+          <a:lnRef idx="1">
+            <a:schemeClr val="accent1"/>
+          </a:lnRef>
+          <a:fillRef idx="3">
+            <a:schemeClr val="accent1"/>
+          </a:fillRef>
+          <a:effectRef idx="2">
+            <a:schemeClr val="accent1"/>
+          </a:effectRef>
+          <a:fontRef idx="minor">
+            <a:schemeClr val="lt1"/>
+          </a:fontRef>
+        </p:style>
+        <p:txBody>
+          <a:bodyPr rtlCol="0" anchor="ctr"/>
+          <a:lstStyle/>
+          <a:p>
+            <a:pPr algn="ctr"/>
+          </a:p>
+        </p:txBody>
+      </p:sp>
+      <p:sp>
+        <p:nvSpPr>
+          <p:cNvPr id="13" name="TextBox 12"/>
+          <p:cNvSpPr txBox="1"/>
+          <p:nvPr/>
+        </p:nvSpPr>
+        <p:spPr>
+          <a:xfrm>
+            <a:off x="3566160" y="1609344"/>
+            <a:ext cx="914400" cy="228600"/>
+          </a:xfrm>
+          <a:prstGeom prst="rect">
+            <a:avLst/>
+          </a:prstGeom>
+          <a:noFill/>
+        </p:spPr>
+        <p:txBody>
+          <a:bodyPr wrap="none" lIns="27432">
+            <a:spAutoFit/>
+          </a:bodyPr>
+          <a:lstStyle/>
+          <a:p>
+            <a:pPr algn="ctr"/>
+            <a:r>
+              <a:rPr sz="1300" b="1">
+                <a:solidFill>
+                  <a:srgbClr val="111827"/>
+                </a:solidFill>
+                <a:latin typeface="Aptos"/>
+              </a:rPr>
+              <a:t>56</a:t>
+            </a:r>
+          </a:p>
+        </p:txBody>
+      </p:sp>
+      <p:sp>
+        <p:nvSpPr>
+          <p:cNvPr id="14" name="TextBox 13"/>
+          <p:cNvSpPr txBox="1"/>
+          <p:nvPr/>
+        </p:nvSpPr>
+        <p:spPr>
+          <a:xfrm>
+            <a:off x="3474720" y="5349240"/>
+            <a:ext cx="1097280" cy="274320"/>
+          </a:xfrm>
+          <a:prstGeom prst="rect">
+            <a:avLst/>
+          </a:prstGeom>
+          <a:noFill/>
+        </p:spPr>
+        <p:txBody>
+          <a:bodyPr wrap="none" lIns="27432">
+            <a:spAutoFit/>
+          </a:bodyPr>
+          <a:lstStyle/>
+          <a:p>
+            <a:pPr algn="ctr"/>
+            <a:r>
+              <a:rPr sz="1100" b="0">
+                <a:solidFill>
+                  <a:srgbClr val="64748B"/>
+                </a:solidFill>
+                <a:latin typeface="Aptos"/>
+              </a:rPr>
+              <a:t>25-50%</a:t>
+            </a:r>
+          </a:p>
+        </p:txBody>
+      </p:sp>
+      <p:sp>
+        <p:nvSpPr>
+          <p:cNvPr id="15" name="Rectangle 14"/>
+          <p:cNvSpPr/>
+          <p:nvPr/>
+        </p:nvSpPr>
+        <p:spPr>
+          <a:xfrm>
+            <a:off x="4937760" y="4261104"/>
+            <a:ext cx="914400" cy="950976"/>
+          </a:xfrm>
+          <a:prstGeom prst="rect">
+            <a:avLst/>
+          </a:prstGeom>
+          <a:solidFill>
+            <a:srgbClr val="FDBA74"/>
+          </a:solidFill>
+          <a:ln>
+            <a:solidFill>
+              <a:srgbClr val="FDBA74"/>
+            </a:solidFill>
+          </a:ln>
+        </p:spPr>
+        <p:style>
+          <a:lnRef idx="1">
+            <a:schemeClr val="accent1"/>
+          </a:lnRef>
+          <a:fillRef idx="3">
+            <a:schemeClr val="accent1"/>
+          </a:fillRef>
+          <a:effectRef idx="2">
+            <a:schemeClr val="accent1"/>
+          </a:effectRef>
+          <a:fontRef idx="minor">
+            <a:schemeClr val="lt1"/>
+          </a:fontRef>
+        </p:style>
+        <p:txBody>
+          <a:bodyPr rtlCol="0" anchor="ctr"/>
+          <a:lstStyle/>
+          <a:p>
+            <a:pPr algn="ctr"/>
+          </a:p>
+        </p:txBody>
+      </p:sp>
+      <p:sp>
+        <p:nvSpPr>
+          <p:cNvPr id="16" name="TextBox 15"/>
+          <p:cNvSpPr txBox="1"/>
+          <p:nvPr/>
+        </p:nvSpPr>
+        <p:spPr>
+          <a:xfrm>
+            <a:off x="4937760" y="3986784"/>
+            <a:ext cx="914400" cy="228600"/>
+          </a:xfrm>
+          <a:prstGeom prst="rect">
+            <a:avLst/>
+          </a:prstGeom>
+          <a:noFill/>
+        </p:spPr>
+        <p:txBody>
+          <a:bodyPr wrap="none" lIns="27432">
+            <a:spAutoFit/>
+          </a:bodyPr>
+          <a:lstStyle/>
+          <a:p>
+            <a:pPr algn="ctr"/>
+            <a:r>
+              <a:rPr sz="1300" b="1">
+                <a:solidFill>
+                  <a:srgbClr val="111827"/>
+                </a:solidFill>
+                <a:latin typeface="Aptos"/>
+              </a:rPr>
+              <a:t>16</a:t>
+            </a:r>
+          </a:p>
+        </p:txBody>
+      </p:sp>
+      <p:sp>
+        <p:nvSpPr>
+          <p:cNvPr id="17" name="TextBox 16"/>
+          <p:cNvSpPr txBox="1"/>
+          <p:nvPr/>
+        </p:nvSpPr>
+        <p:spPr>
+          <a:xfrm>
+            <a:off x="4846320" y="5349240"/>
+            <a:ext cx="1097280" cy="274320"/>
+          </a:xfrm>
+          <a:prstGeom prst="rect">
+            <a:avLst/>
+          </a:prstGeom>
+          <a:noFill/>
+        </p:spPr>
+        <p:txBody>
+          <a:bodyPr wrap="none" lIns="27432">
+            <a:spAutoFit/>
+          </a:bodyPr>
+          <a:lstStyle/>
+          <a:p>
+            <a:pPr algn="ctr"/>
+            <a:r>
+              <a:rPr sz="1100" b="0">
+                <a:solidFill>
+                  <a:srgbClr val="64748B"/>
+                </a:solidFill>
+                <a:latin typeface="Aptos"/>
+              </a:rPr>
+              <a:t>50-75%</a:t>
+            </a:r>
+          </a:p>
+        </p:txBody>
+      </p:sp>
+      <p:sp>
+        <p:nvSpPr>
+          <p:cNvPr id="18" name="Rectangle 17"/>
+          <p:cNvSpPr/>
+          <p:nvPr/>
+        </p:nvSpPr>
+        <p:spPr>
+          <a:xfrm>
+            <a:off x="6309360" y="4082796"/>
+            <a:ext cx="914400" cy="1129284"/>
+          </a:xfrm>
+          <a:prstGeom prst="rect">
+            <a:avLst/>
+          </a:prstGeom>
+          <a:solidFill>
+            <a:srgbClr val="FDBA74"/>
+          </a:solidFill>
+          <a:ln>
+            <a:solidFill>
+              <a:srgbClr val="FDBA74"/>
+            </a:solidFill>
+          </a:ln>
+        </p:spPr>
+        <p:style>
+          <a:lnRef idx="1">
+            <a:schemeClr val="accent1"/>
+          </a:lnRef>
+          <a:fillRef idx="3">
+            <a:schemeClr val="accent1"/>
+          </a:fillRef>
+          <a:effectRef idx="2">
+            <a:schemeClr val="accent1"/>
+          </a:effectRef>
+          <a:fontRef idx="minor">
+            <a:schemeClr val="lt1"/>
+          </a:fontRef>
+        </p:style>
+        <p:txBody>
+          <a:bodyPr rtlCol="0" anchor="ctr"/>
+          <a:lstStyle/>
+          <a:p>
+            <a:pPr algn="ctr"/>
+          </a:p>
+        </p:txBody>
+      </p:sp>
+      <p:sp>
+        <p:nvSpPr>
+          <p:cNvPr id="19" name="TextBox 18"/>
+          <p:cNvSpPr txBox="1"/>
+          <p:nvPr/>
+        </p:nvSpPr>
+        <p:spPr>
+          <a:xfrm>
+            <a:off x="6309360" y="3808476"/>
+            <a:ext cx="914400" cy="228600"/>
+          </a:xfrm>
+          <a:prstGeom prst="rect">
+            <a:avLst/>
+          </a:prstGeom>
+          <a:noFill/>
+        </p:spPr>
+        <p:txBody>
+          <a:bodyPr wrap="none" lIns="27432">
+            <a:spAutoFit/>
+          </a:bodyPr>
+          <a:lstStyle/>
+          <a:p>
+            <a:pPr algn="ctr"/>
+            <a:r>
+              <a:rPr sz="1300" b="1">
+                <a:solidFill>
+                  <a:srgbClr val="111827"/>
+                </a:solidFill>
+                <a:latin typeface="Aptos"/>
+              </a:rPr>
+              <a:t>19</a:t>
+            </a:r>
+          </a:p>
+        </p:txBody>
+      </p:sp>
+      <p:sp>
+        <p:nvSpPr>
+          <p:cNvPr id="20" name="TextBox 19"/>
+          <p:cNvSpPr txBox="1"/>
+          <p:nvPr/>
+        </p:nvSpPr>
+        <p:spPr>
+          <a:xfrm>
+            <a:off x="6217920" y="5349240"/>
+            <a:ext cx="1097280" cy="274320"/>
+          </a:xfrm>
+          <a:prstGeom prst="rect">
+            <a:avLst/>
+          </a:prstGeom>
+          <a:noFill/>
+        </p:spPr>
+        <p:txBody>
+          <a:bodyPr wrap="none" lIns="27432">
+            <a:spAutoFit/>
+          </a:bodyPr>
+          <a:lstStyle/>
+          <a:p>
+            <a:pPr algn="ctr"/>
+            <a:r>
+              <a:rPr sz="1100" b="0">
+                <a:solidFill>
+                  <a:srgbClr val="64748B"/>
+                </a:solidFill>
+                <a:latin typeface="Aptos"/>
+              </a:rPr>
+              <a:t>75-100%</a:t>
+            </a:r>
+          </a:p>
+        </p:txBody>
+      </p:sp>
+      <p:sp>
+        <p:nvSpPr>
+          <p:cNvPr id="21" name="TextBox 20"/>
+          <p:cNvSpPr txBox="1"/>
+          <p:nvPr/>
+        </p:nvSpPr>
+        <p:spPr>
+          <a:xfrm>
+            <a:off x="731520" y="5806440"/>
+            <a:ext cx="6949440" cy="274320"/>
+          </a:xfrm>
+          <a:prstGeom prst="rect">
+            <a:avLst/>
+          </a:prstGeom>
+          <a:noFill/>
+        </p:spPr>
+        <p:txBody>
+          <a:bodyPr wrap="none" lIns="27432">
+            <a:spAutoFit/>
+          </a:bodyPr>
+          <a:lstStyle/>
+          <a:p>
+            <a:pPr algn="ctr"/>
+            <a:r>
+              <a:rPr sz="1300" b="0">
+                <a:solidFill>
+                  <a:srgbClr val="64748B"/>
+                </a:solidFill>
+                <a:latin typeface="Aptos"/>
+              </a:rPr>
+              <a:t>First activation among 119 contamination improvements</a:t>
+            </a:r>
+          </a:p>
+        </p:txBody>
+      </p:sp>
+      <p:sp>
+        <p:nvSpPr>
+          <p:cNvPr id="22" name="Rectangle 21"/>
+          <p:cNvSpPr/>
+          <p:nvPr/>
+        </p:nvSpPr>
+        <p:spPr>
+          <a:xfrm>
+            <a:off x="8229600" y="1371600"/>
+            <a:ext cx="3200400" cy="4526280"/>
+          </a:xfrm>
+          <a:prstGeom prst="rect">
+            <a:avLst/>
+          </a:prstGeom>
+          <a:solidFill>
+            <a:srgbClr val="EFF6FF"/>
+          </a:solidFill>
+          <a:ln>
+            <a:solidFill>
+              <a:srgbClr val="EFF6FF"/>
+            </a:solidFill>
+          </a:ln>
+        </p:spPr>
+        <p:style>
+          <a:lnRef idx="1">
+            <a:schemeClr val="accent1"/>
+          </a:lnRef>
+          <a:fillRef idx="3">
+            <a:schemeClr val="accent1"/>
+          </a:fillRef>
+          <a:effectRef idx="2">
+            <a:schemeClr val="accent1"/>
+          </a:effectRef>
+          <a:fontRef idx="minor">
+            <a:schemeClr val="lt1"/>
+          </a:fontRef>
+        </p:style>
+        <p:txBody>
+          <a:bodyPr rtlCol="0" anchor="ctr"/>
+          <a:lstStyle/>
+          <a:p>
+            <a:pPr algn="ctr"/>
+          </a:p>
+        </p:txBody>
+      </p:sp>
+      <p:sp>
+        <p:nvSpPr>
+          <p:cNvPr id="23" name="TextBox 22"/>
+          <p:cNvSpPr txBox="1"/>
+          <p:nvPr/>
+        </p:nvSpPr>
+        <p:spPr>
+          <a:xfrm>
+            <a:off x="8595360" y="1783080"/>
+            <a:ext cx="2468880" cy="3291840"/>
+          </a:xfrm>
+          <a:prstGeom prst="rect">
+            <a:avLst/>
+          </a:prstGeom>
+          <a:noFill/>
+        </p:spPr>
+        <p:txBody>
+          <a:bodyPr wrap="none" lIns="27432">
+            <a:spAutoFit/>
+          </a:bodyPr>
+          <a:lstStyle/>
+          <a:p>
+            <a:pPr algn="ctr"/>
+            <a:r>
+              <a:rPr sz="2000" b="1">
+                <a:solidFill>
+                  <a:srgbClr val="111827"/>
+                </a:solidFill>
+                <a:latin typeface="Aptos"/>
+              </a:rPr>
+              <a:t>39.2%
+median first activation
+119/119 active
+3 in first 10%
+28 by first 25%</a:t>
+            </a:r>
+          </a:p>
+        </p:txBody>
+      </p:sp>
+      <p:sp>
+        <p:nvSpPr>
+          <p:cNvPr id="24" name="TextBox 23"/>
+          <p:cNvSpPr txBox="1"/>
+          <p:nvPr/>
+        </p:nvSpPr>
+        <p:spPr>
+          <a:xfrm>
+            <a:off x="8549640" y="5074920"/>
+            <a:ext cx="2560320" cy="548640"/>
+          </a:xfrm>
+          <a:prstGeom prst="rect">
+            <a:avLst/>
+          </a:prstGeom>
+          <a:noFill/>
+        </p:spPr>
+        <p:txBody>
+          <a:bodyPr wrap="none" lIns="27432">
+            <a:spAutoFit/>
+          </a:bodyPr>
+          <a:lstStyle/>
+          <a:p>
+            <a:pPr algn="ctr"/>
+            <a:r>
+              <a:rPr sz="1200" b="1">
+                <a:solidFill>
+                  <a:srgbClr val="EF4444"/>
+                </a:solidFill>
+                <a:latin typeface="Aptos"/>
+              </a:rPr>
+              <a:t>Timing does not prove precedence to the first test marker.</a:t>
+            </a:r>
+          </a:p>
+        </p:txBody>
+      </p:sp>
+      <p:sp>
+        <p:nvSpPr>
+          <p:cNvPr id="25" name="TextBox 24"/>
+          <p:cNvSpPr txBox="1"/>
+          <p:nvPr/>
+        </p:nvSpPr>
+        <p:spPr>
+          <a:xfrm>
+            <a:off x="594360" y="6547104"/>
+            <a:ext cx="6400800" cy="164592"/>
+          </a:xfrm>
+          <a:prstGeom prst="rect">
+            <a:avLst/>
+          </a:prstGeom>
+          <a:noFill/>
+        </p:spPr>
+        <p:txBody>
+          <a:bodyPr wrap="none" lIns="27432">
+            <a:spAutoFit/>
+          </a:bodyPr>
+          <a:lstStyle/>
+          <a:p>
+            <a:pPr algn="l"/>
+            <a:r>
+              <a:rPr sz="800" b="0">
+                <a:solidFill>
+                  <a:srgbClr val="94A3B8"/>
+                </a:solidFill>
+                <a:latin typeface="Aptos"/>
+              </a:rPr>
+              <a:t>DSTK100 - exploratory improvement-feature audit</a:t>
+            </a:r>
+          </a:p>
+        </p:txBody>
+      </p:sp>
+      <p:sp>
+        <p:nvSpPr>
+          <p:cNvPr id="26" name="TextBox 25"/>
+          <p:cNvSpPr txBox="1"/>
+          <p:nvPr/>
+        </p:nvSpPr>
+        <p:spPr>
+          <a:xfrm>
+            <a:off x="11155680" y="6510528"/>
+            <a:ext cx="365760" cy="182880"/>
+          </a:xfrm>
+          <a:prstGeom prst="rect">
+            <a:avLst/>
+          </a:prstGeom>
+          <a:noFill/>
+        </p:spPr>
+        <p:txBody>
+          <a:bodyPr wrap="none" lIns="27432">
+            <a:spAutoFit/>
+          </a:bodyPr>
+          <a:lstStyle/>
+          <a:p>
+            <a:pPr algn="r"/>
+            <a:r>
+              <a:rPr sz="800" b="0">
+                <a:solidFill>
+                  <a:srgbClr val="94A3B8"/>
+                </a:solidFill>
+                <a:latin typeface="Aptos"/>
+              </a:rPr>
+              <a:t>18</a:t>
+            </a:r>
+          </a:p>
+        </p:txBody>
+      </p:sp>
+    </p:spTree>
+  </p:cSld>
+  <p:clrMapOvr>
+    <a:masterClrMapping/>
+  </p:clrMapOvr>
+</p:sld>
+</file>
+
+<file path=ppt/slides/slide19.xml><?xml version="1.0" encoding="utf-8"?>
+<p:sld xmlns:a="http://schemas.openxmlformats.org/drawingml/2006/main" xmlns:p="http://schemas.openxmlformats.org/presentationml/2006/main" xmlns:r="http://schemas.openxmlformats.org/officeDocument/2006/relationships">
+  <p:cSld>
+    <p:spTree>
+      <p:nvGrpSpPr>
+        <p:cNvPr id="1" name=""/>
+        <p:cNvGrpSpPr/>
+        <p:nvPr/>
+      </p:nvGrpSpPr>
+      <p:grpSpPr/>
+      <p:sp>
+        <p:nvSpPr>
+          <p:cNvPr id="3" name="Rectangle 2"/>
+          <p:cNvSpPr/>
+          <p:nvPr/>
+        </p:nvSpPr>
+        <p:spPr>
+          <a:xfrm>
+            <a:off x="0" y="0"/>
+            <a:ext cx="12191695" cy="6858000"/>
+          </a:xfrm>
+          <a:prstGeom prst="rect">
+            <a:avLst/>
+          </a:prstGeom>
+          <a:solidFill>
+            <a:srgbClr val="F8FAFC"/>
+          </a:solidFill>
+          <a:ln>
+            <a:solidFill>
+              <a:srgbClr val="F8FAFC"/>
+            </a:solidFill>
+          </a:ln>
+        </p:spPr>
+        <p:style>
+          <a:lnRef idx="1">
+            <a:schemeClr val="accent1"/>
+          </a:lnRef>
+          <a:fillRef idx="3">
+            <a:schemeClr val="accent1"/>
+          </a:fillRef>
+          <a:effectRef idx="2">
+            <a:schemeClr val="accent1"/>
+          </a:effectRef>
+          <a:fontRef idx="minor">
+            <a:schemeClr val="lt1"/>
+          </a:fontRef>
+        </p:style>
+        <p:txBody>
+          <a:bodyPr rtlCol="0" anchor="ctr"/>
+          <a:lstStyle/>
+          <a:p>
+            <a:pPr algn="ctr"/>
+          </a:p>
+        </p:txBody>
+      </p:sp>
+      <p:sp>
+        <p:nvSpPr>
+          <p:cNvPr id="2" name="Title 1"/>
+          <p:cNvSpPr>
+            <a:spLocks noGrp="1"/>
+          </p:cNvSpPr>
+          <p:nvPr>
+            <p:ph type="title"/>
+          </p:nvPr>
+        </p:nvSpPr>
+        <p:spPr/>
+        <p:txBody>
+          <a:bodyPr/>
+          <a:lstStyle/>
+          <a:p/>
+        </p:txBody>
+      </p:sp>
+      <p:sp>
+        <p:nvSpPr>
+          <p:cNvPr id="4" name="TextBox 3"/>
+          <p:cNvSpPr txBox="1"/>
+          <p:nvPr/>
+        </p:nvSpPr>
+        <p:spPr>
+          <a:xfrm>
+            <a:off x="594360" y="274320"/>
+            <a:ext cx="10972800" cy="228600"/>
+          </a:xfrm>
+          <a:prstGeom prst="rect">
+            <a:avLst/>
+          </a:prstGeom>
+          <a:noFill/>
+        </p:spPr>
+        <p:txBody>
+          <a:bodyPr wrap="none" lIns="27432">
+            <a:spAutoFit/>
+          </a:bodyPr>
+          <a:lstStyle/>
+          <a:p>
+            <a:pPr algn="l"/>
+            <a:r>
+              <a:rPr sz="1000" b="1">
+                <a:solidFill>
+                  <a:srgbClr val="2563EB"/>
+                </a:solidFill>
+                <a:latin typeface="Aptos"/>
+              </a:rPr>
+              <a:t>FEATURE INTERPRETATION</a:t>
+            </a:r>
+          </a:p>
+        </p:txBody>
+      </p:sp>
+      <p:sp>
+        <p:nvSpPr>
+          <p:cNvPr id="5" name="TextBox 4"/>
+          <p:cNvSpPr txBox="1"/>
+          <p:nvPr/>
+        </p:nvSpPr>
+        <p:spPr>
+          <a:xfrm>
+            <a:off x="594360" y="640080"/>
+            <a:ext cx="10972800" cy="594360"/>
+          </a:xfrm>
+          <a:prstGeom prst="rect">
+            <a:avLst/>
+          </a:prstGeom>
+          <a:noFill/>
+        </p:spPr>
+        <p:txBody>
+          <a:bodyPr wrap="none" lIns="27432">
+            <a:spAutoFit/>
+          </a:bodyPr>
+          <a:lstStyle/>
+          <a:p>
+            <a:pPr algn="l"/>
+            <a:r>
+              <a:rPr sz="2700" b="1">
+                <a:solidFill>
+                  <a:srgbClr val="111827"/>
+                </a:solidFill>
+                <a:latin typeface="Aptos"/>
+              </a:rPr>
+              <a:t>5422 is a literal test-module feature - not a correctness direction</a:t>
+            </a:r>
+          </a:p>
+        </p:txBody>
+      </p:sp>
+      <p:sp>
+        <p:nvSpPr>
+          <p:cNvPr id="6" name="Rectangle 5"/>
+          <p:cNvSpPr/>
+          <p:nvPr/>
+        </p:nvSpPr>
+        <p:spPr>
+          <a:xfrm>
+            <a:off x="594360" y="1371600"/>
+            <a:ext cx="5760720" cy="4480560"/>
+          </a:xfrm>
+          <a:prstGeom prst="rect">
+            <a:avLst/>
+          </a:prstGeom>
+          <a:solidFill>
+            <a:srgbClr val="172033"/>
+          </a:solidFill>
+          <a:ln>
+            <a:solidFill>
+              <a:srgbClr val="172033"/>
+            </a:solidFill>
+          </a:ln>
+        </p:spPr>
+        <p:style>
+          <a:lnRef idx="1">
+            <a:schemeClr val="accent1"/>
+          </a:lnRef>
+          <a:fillRef idx="3">
+            <a:schemeClr val="accent1"/>
+          </a:fillRef>
+          <a:effectRef idx="2">
+            <a:schemeClr val="accent1"/>
+          </a:effectRef>
+          <a:fontRef idx="minor">
+            <a:schemeClr val="lt1"/>
+          </a:fontRef>
+        </p:style>
+        <p:txBody>
+          <a:bodyPr rtlCol="0" anchor="ctr"/>
+          <a:lstStyle/>
+          <a:p>
+            <a:pPr algn="ctr"/>
+          </a:p>
+        </p:txBody>
+      </p:sp>
+      <p:sp>
+        <p:nvSpPr>
+          <p:cNvPr id="7" name="TextBox 6"/>
+          <p:cNvSpPr txBox="1"/>
+          <p:nvPr/>
+        </p:nvSpPr>
+        <p:spPr>
+          <a:xfrm>
+            <a:off x="914400" y="1691640"/>
+            <a:ext cx="5029200" cy="274320"/>
+          </a:xfrm>
+          <a:prstGeom prst="rect">
+            <a:avLst/>
+          </a:prstGeom>
+          <a:noFill/>
+        </p:spPr>
+        <p:txBody>
+          <a:bodyPr wrap="none" lIns="27432">
+            <a:spAutoFit/>
+          </a:bodyPr>
+          <a:lstStyle/>
+          <a:p>
+            <a:pPr algn="l"/>
+            <a:r>
+              <a:rPr sz="1200" b="1">
+                <a:solidFill>
+                  <a:srgbClr val="06B6D4"/>
+                </a:solidFill>
+                <a:latin typeface="Aptos"/>
+              </a:rPr>
+              <a:t>HIGH-ACTIVATION CONTEXT</a:t>
+            </a:r>
+          </a:p>
+        </p:txBody>
+      </p:sp>
+      <p:sp>
+        <p:nvSpPr>
+          <p:cNvPr id="8" name="TextBox 7"/>
+          <p:cNvSpPr txBox="1"/>
+          <p:nvPr/>
+        </p:nvSpPr>
+        <p:spPr>
+          <a:xfrm>
+            <a:off x="914400" y="2240280"/>
+            <a:ext cx="5074920" cy="2103120"/>
+          </a:xfrm>
+          <a:prstGeom prst="rect">
+            <a:avLst/>
+          </a:prstGeom>
+          <a:noFill/>
+        </p:spPr>
+        <p:txBody>
+          <a:bodyPr wrap="none" lIns="27432">
+            <a:spAutoFit/>
+          </a:bodyPr>
+          <a:lstStyle/>
+          <a:p>
+            <a:pPr algn="l"/>
+            <a:r>
+              <a:rPr sz="1900" b="0">
+                <a:solidFill>
+                  <a:srgbClr val="FFFFFF"/>
+                </a:solidFill>
+                <a:latin typeface="Aptos"/>
+              </a:rPr>
+              <a:t># tests/test_task_func.py
+import unittest
+from task_func import task_func
+class TestTaskFunc(unittest.TestCase):</a:t>
+            </a:r>
+          </a:p>
+        </p:txBody>
+      </p:sp>
+      <p:sp>
+        <p:nvSpPr>
+          <p:cNvPr id="9" name="TextBox 8"/>
+          <p:cNvSpPr txBox="1"/>
+          <p:nvPr/>
+        </p:nvSpPr>
+        <p:spPr>
+          <a:xfrm>
+            <a:off x="914400" y="4892040"/>
+            <a:ext cx="5029200" cy="320040"/>
+          </a:xfrm>
+          <a:prstGeom prst="rect">
+            <a:avLst/>
+          </a:prstGeom>
+          <a:noFill/>
+        </p:spPr>
+        <p:txBody>
+          <a:bodyPr wrap="none" lIns="27432">
+            <a:spAutoFit/>
+          </a:bodyPr>
+          <a:lstStyle/>
+          <a:p>
+            <a:pPr algn="l"/>
+            <a:r>
+              <a:rPr sz="1400" b="1">
+                <a:solidFill>
+                  <a:srgbClr val="CBD5E1"/>
+                </a:solidFill>
+                <a:latin typeface="Aptos"/>
+              </a:rPr>
+              <a:t>Dominant tokens: test - tests - / - .py</a:t>
+            </a:r>
+          </a:p>
+        </p:txBody>
+      </p:sp>
+      <p:sp>
+        <p:nvSpPr>
+          <p:cNvPr id="10" name="Rectangle 9"/>
+          <p:cNvSpPr/>
+          <p:nvPr/>
+        </p:nvSpPr>
+        <p:spPr>
+          <a:xfrm>
+            <a:off x="6720840" y="1371600"/>
+            <a:ext cx="4846320" cy="4480560"/>
+          </a:xfrm>
+          <a:prstGeom prst="rect">
+            <a:avLst/>
+          </a:prstGeom>
+          <a:solidFill>
+            <a:srgbClr val="FFF7ED"/>
+          </a:solidFill>
+          <a:ln>
+            <a:solidFill>
+              <a:srgbClr val="FFF7ED"/>
+            </a:solidFill>
+          </a:ln>
+        </p:spPr>
+        <p:style>
+          <a:lnRef idx="1">
+            <a:schemeClr val="accent1"/>
+          </a:lnRef>
+          <a:fillRef idx="3">
+            <a:schemeClr val="accent1"/>
+          </a:fillRef>
+          <a:effectRef idx="2">
+            <a:schemeClr val="accent1"/>
+          </a:effectRef>
+          <a:fontRef idx="minor">
+            <a:schemeClr val="lt1"/>
+          </a:fontRef>
+        </p:style>
+        <p:txBody>
+          <a:bodyPr rtlCol="0" anchor="ctr"/>
+          <a:lstStyle/>
+          <a:p>
+            <a:pPr algn="ctr"/>
+          </a:p>
+        </p:txBody>
+      </p:sp>
+      <p:sp>
+        <p:nvSpPr>
+          <p:cNvPr id="11" name="TextBox 10"/>
+          <p:cNvSpPr txBox="1"/>
+          <p:nvPr/>
+        </p:nvSpPr>
+        <p:spPr>
+          <a:xfrm>
+            <a:off x="7132320" y="1737360"/>
+            <a:ext cx="3840480" cy="3566160"/>
+          </a:xfrm>
+          <a:prstGeom prst="rect">
+            <a:avLst/>
+          </a:prstGeom>
+          <a:noFill/>
+        </p:spPr>
+        <p:txBody>
+          <a:bodyPr wrap="none" lIns="27432">
+            <a:spAutoFit/>
+          </a:bodyPr>
+          <a:lstStyle/>
+          <a:p>
+            <a:pPr algn="ctr"/>
+            <a:r>
+              <a:rPr sz="2000" b="1">
+                <a:solidFill>
+                  <a:srgbClr val="111827"/>
+                </a:solidFill>
+                <a:latin typeface="Aptos"/>
+              </a:rPr>
+              <a:t>119/119 contaminations
+vs
+16/96 other improvements
+Exploratory OR ~ 1,166
+Strong detector; causal usefulness untested.</a:t>
+            </a:r>
+          </a:p>
+        </p:txBody>
+      </p:sp>
+      <p:sp>
+        <p:nvSpPr>
+          <p:cNvPr id="12" name="TextBox 11"/>
+          <p:cNvSpPr txBox="1"/>
+          <p:nvPr/>
+        </p:nvSpPr>
+        <p:spPr>
+          <a:xfrm>
+            <a:off x="594360" y="6547104"/>
+            <a:ext cx="6400800" cy="164592"/>
+          </a:xfrm>
+          <a:prstGeom prst="rect">
+            <a:avLst/>
+          </a:prstGeom>
+          <a:noFill/>
+        </p:spPr>
+        <p:txBody>
+          <a:bodyPr wrap="none" lIns="27432">
+            <a:spAutoFit/>
+          </a:bodyPr>
+          <a:lstStyle/>
+          <a:p>
+            <a:pPr algn="l"/>
+            <a:r>
+              <a:rPr sz="800" b="0">
+                <a:solidFill>
+                  <a:srgbClr val="94A3B8"/>
+                </a:solidFill>
+                <a:latin typeface="Aptos"/>
+              </a:rPr>
+              <a:t>DSTK100 - exploratory improvement-feature audit</a:t>
+            </a:r>
+          </a:p>
+        </p:txBody>
+      </p:sp>
+      <p:sp>
+        <p:nvSpPr>
+          <p:cNvPr id="13" name="TextBox 12"/>
+          <p:cNvSpPr txBox="1"/>
+          <p:nvPr/>
+        </p:nvSpPr>
+        <p:spPr>
+          <a:xfrm>
+            <a:off x="11155680" y="6510528"/>
+            <a:ext cx="365760" cy="182880"/>
+          </a:xfrm>
+          <a:prstGeom prst="rect">
+            <a:avLst/>
+          </a:prstGeom>
+          <a:noFill/>
+        </p:spPr>
+        <p:txBody>
+          <a:bodyPr wrap="none" lIns="27432">
+            <a:spAutoFit/>
+          </a:bodyPr>
+          <a:lstStyle/>
+          <a:p>
+            <a:pPr algn="r"/>
+            <a:r>
+              <a:rPr sz="800" b="0">
+                <a:solidFill>
+                  <a:srgbClr val="94A3B8"/>
+                </a:solidFill>
+                <a:latin typeface="Aptos"/>
+              </a:rPr>
+              <a:t>19</a:t>
+            </a:r>
+          </a:p>
+        </p:txBody>
+      </p:sp>
+    </p:spTree>
+  </p:cSld>
+  <p:clrMapOvr>
+    <a:masterClrMapping/>
+  </p:clrMapOvr>
+</p:sld>
+</file>
+
 <file path=ppt/slides/slide2.xml><?xml version="1.0" encoding="utf-8"?>
 <p:sld xmlns:a="http://schemas.openxmlformats.org/drawingml/2006/main" xmlns:r="http://schemas.openxmlformats.org/officeDocument/2006/relationships" xmlns:mc="http://schemas.openxmlformats.org/markup-compatibility/2006" xmlns:mv="urn:schemas-microsoft-com:mac:vml" xmlns:p="http://schemas.openxmlformats.org/presentationml/2006/main" xmlns:c="http://schemas.openxmlformats.org/drawingml/2006/chart" xmlns:dgm="http://schemas.openxmlformats.org/drawingml/2006/diagram" xmlns:o="urn:schemas-microsoft-com:office:office" xmlns:v="urn:schemas-microsoft-com:vml" xmlns:pvml="urn:schemas-microsoft-com:office:powerpoint" xmlns:com="http://schemas.openxmlformats.org/drawingml/2006/compatibility" xmlns:p14="http://schemas.microsoft.com/office/powerpoint/2010/main" xmlns:p15="http://schemas.microsoft.com/office/powerpoint/2012/main" xmlns:ahyp="http://schemas.microsoft.com/office/drawing/2018/hyperlinkcolor">
   <p:cSld>
@@ -20827,6 +24427,3588 @@
               <a:t>Behavior localizes the difference. Features turn it into a testable hypothesis.</a:t>
             </a:r>
             <a:endParaRPr/>
+          </a:p>
+        </p:txBody>
+      </p:sp>
+    </p:spTree>
+  </p:cSld>
+  <p:clrMapOvr>
+    <a:masterClrMapping/>
+  </p:clrMapOvr>
+</p:sld>
+</file>
+
+<file path=ppt/slides/slide20.xml><?xml version="1.0" encoding="utf-8"?>
+<p:sld xmlns:a="http://schemas.openxmlformats.org/drawingml/2006/main" xmlns:p="http://schemas.openxmlformats.org/presentationml/2006/main" xmlns:r="http://schemas.openxmlformats.org/officeDocument/2006/relationships">
+  <p:cSld>
+    <p:spTree>
+      <p:nvGrpSpPr>
+        <p:cNvPr id="1" name=""/>
+        <p:cNvGrpSpPr/>
+        <p:nvPr/>
+      </p:nvGrpSpPr>
+      <p:grpSpPr/>
+      <p:sp>
+        <p:nvSpPr>
+          <p:cNvPr id="3" name="Rectangle 2"/>
+          <p:cNvSpPr/>
+          <p:nvPr/>
+        </p:nvSpPr>
+        <p:spPr>
+          <a:xfrm>
+            <a:off x="0" y="0"/>
+            <a:ext cx="12191695" cy="6858000"/>
+          </a:xfrm>
+          <a:prstGeom prst="rect">
+            <a:avLst/>
+          </a:prstGeom>
+          <a:solidFill>
+            <a:srgbClr val="F8FAFC"/>
+          </a:solidFill>
+          <a:ln>
+            <a:solidFill>
+              <a:srgbClr val="F8FAFC"/>
+            </a:solidFill>
+          </a:ln>
+        </p:spPr>
+        <p:style>
+          <a:lnRef idx="1">
+            <a:schemeClr val="accent1"/>
+          </a:lnRef>
+          <a:fillRef idx="3">
+            <a:schemeClr val="accent1"/>
+          </a:fillRef>
+          <a:effectRef idx="2">
+            <a:schemeClr val="accent1"/>
+          </a:effectRef>
+          <a:fontRef idx="minor">
+            <a:schemeClr val="lt1"/>
+          </a:fontRef>
+        </p:style>
+        <p:txBody>
+          <a:bodyPr rtlCol="0" anchor="ctr"/>
+          <a:lstStyle/>
+          <a:p>
+            <a:pPr algn="ctr"/>
+          </a:p>
+        </p:txBody>
+      </p:sp>
+      <p:sp>
+        <p:nvSpPr>
+          <p:cNvPr id="2" name="Title 1"/>
+          <p:cNvSpPr>
+            <a:spLocks noGrp="1"/>
+          </p:cNvSpPr>
+          <p:nvPr>
+            <p:ph type="title"/>
+          </p:nvPr>
+        </p:nvSpPr>
+        <p:spPr/>
+        <p:txBody>
+          <a:bodyPr/>
+          <a:lstStyle/>
+          <a:p/>
+        </p:txBody>
+      </p:sp>
+      <p:sp>
+        <p:nvSpPr>
+          <p:cNvPr id="4" name="TextBox 3"/>
+          <p:cNvSpPr txBox="1"/>
+          <p:nvPr/>
+        </p:nvSpPr>
+        <p:spPr>
+          <a:xfrm>
+            <a:off x="594360" y="274320"/>
+            <a:ext cx="10972800" cy="228600"/>
+          </a:xfrm>
+          <a:prstGeom prst="rect">
+            <a:avLst/>
+          </a:prstGeom>
+          <a:noFill/>
+        </p:spPr>
+        <p:txBody>
+          <a:bodyPr wrap="none" lIns="27432">
+            <a:spAutoFit/>
+          </a:bodyPr>
+          <a:lstStyle/>
+          <a:p>
+            <a:pPr algn="l"/>
+            <a:r>
+              <a:rPr sz="1000" b="1">
+                <a:solidFill>
+                  <a:srgbClr val="2563EB"/>
+                </a:solidFill>
+                <a:latin typeface="Aptos"/>
+              </a:rPr>
+              <a:t>IMPROVEMENT TAXONOMY</a:t>
+            </a:r>
+          </a:p>
+        </p:txBody>
+      </p:sp>
+      <p:sp>
+        <p:nvSpPr>
+          <p:cNvPr id="5" name="TextBox 4"/>
+          <p:cNvSpPr txBox="1"/>
+          <p:nvPr/>
+        </p:nvSpPr>
+        <p:spPr>
+          <a:xfrm>
+            <a:off x="594360" y="640080"/>
+            <a:ext cx="10972800" cy="594360"/>
+          </a:xfrm>
+          <a:prstGeom prst="rect">
+            <a:avLst/>
+          </a:prstGeom>
+          <a:noFill/>
+        </p:spPr>
+        <p:txBody>
+          <a:bodyPr wrap="none" lIns="27432">
+            <a:spAutoFit/>
+          </a:bodyPr>
+          <a:lstStyle/>
+          <a:p>
+            <a:pPr algn="l"/>
+            <a:r>
+              <a:rPr sz="2700" b="1">
+                <a:solidFill>
+                  <a:srgbClr val="111827"/>
+                </a:solidFill>
+                <a:latin typeface="Aptos"/>
+              </a:rPr>
+              <a:t>BigCodeBench improvements contain distinct error mechanisms</a:t>
+            </a:r>
+          </a:p>
+        </p:txBody>
+      </p:sp>
+      <p:sp>
+        <p:nvSpPr>
+          <p:cNvPr id="6" name="TextBox 5"/>
+          <p:cNvSpPr txBox="1"/>
+          <p:nvPr/>
+        </p:nvSpPr>
+        <p:spPr>
+          <a:xfrm>
+            <a:off x="685800" y="1417320"/>
+            <a:ext cx="2560320" cy="274320"/>
+          </a:xfrm>
+          <a:prstGeom prst="rect">
+            <a:avLst/>
+          </a:prstGeom>
+          <a:noFill/>
+        </p:spPr>
+        <p:txBody>
+          <a:bodyPr wrap="none" lIns="27432">
+            <a:spAutoFit/>
+          </a:bodyPr>
+          <a:lstStyle/>
+          <a:p>
+            <a:pPr algn="l"/>
+            <a:r>
+              <a:rPr sz="1200" b="1">
+                <a:solidFill>
+                  <a:srgbClr val="111827"/>
+                </a:solidFill>
+                <a:latin typeface="Aptos"/>
+              </a:rPr>
+              <a:t>Test/import contamination</a:t>
+            </a:r>
+          </a:p>
+        </p:txBody>
+      </p:sp>
+      <p:sp>
+        <p:nvSpPr>
+          <p:cNvPr id="7" name="Rectangle 6"/>
+          <p:cNvSpPr/>
+          <p:nvPr/>
+        </p:nvSpPr>
+        <p:spPr>
+          <a:xfrm>
+            <a:off x="3337560" y="1453896"/>
+            <a:ext cx="5984748" cy="219456"/>
+          </a:xfrm>
+          <a:prstGeom prst="rect">
+            <a:avLst/>
+          </a:prstGeom>
+          <a:solidFill>
+            <a:srgbClr val="F59E0B"/>
+          </a:solidFill>
+          <a:ln>
+            <a:solidFill>
+              <a:srgbClr val="F59E0B"/>
+            </a:solidFill>
+          </a:ln>
+        </p:spPr>
+        <p:style>
+          <a:lnRef idx="1">
+            <a:schemeClr val="accent1"/>
+          </a:lnRef>
+          <a:fillRef idx="3">
+            <a:schemeClr val="accent1"/>
+          </a:fillRef>
+          <a:effectRef idx="2">
+            <a:schemeClr val="accent1"/>
+          </a:effectRef>
+          <a:fontRef idx="minor">
+            <a:schemeClr val="lt1"/>
+          </a:fontRef>
+        </p:style>
+        <p:txBody>
+          <a:bodyPr rtlCol="0" anchor="ctr"/>
+          <a:lstStyle/>
+          <a:p>
+            <a:pPr algn="ctr"/>
+          </a:p>
+        </p:txBody>
+      </p:sp>
+      <p:sp>
+        <p:nvSpPr>
+          <p:cNvPr id="8" name="TextBox 7"/>
+          <p:cNvSpPr txBox="1"/>
+          <p:nvPr/>
+        </p:nvSpPr>
+        <p:spPr>
+          <a:xfrm>
+            <a:off x="9418320" y="1417320"/>
+            <a:ext cx="548640" cy="274320"/>
+          </a:xfrm>
+          <a:prstGeom prst="rect">
+            <a:avLst/>
+          </a:prstGeom>
+          <a:noFill/>
+        </p:spPr>
+        <p:txBody>
+          <a:bodyPr wrap="none" lIns="27432">
+            <a:spAutoFit/>
+          </a:bodyPr>
+          <a:lstStyle/>
+          <a:p>
+            <a:pPr algn="l"/>
+            <a:r>
+              <a:rPr sz="1200" b="1">
+                <a:solidFill>
+                  <a:srgbClr val="111827"/>
+                </a:solidFill>
+                <a:latin typeface="Aptos"/>
+              </a:rPr>
+              <a:t>119</a:t>
+            </a:r>
+          </a:p>
+        </p:txBody>
+      </p:sp>
+      <p:sp>
+        <p:nvSpPr>
+          <p:cNvPr id="9" name="TextBox 8"/>
+          <p:cNvSpPr txBox="1"/>
+          <p:nvPr/>
+        </p:nvSpPr>
+        <p:spPr>
+          <a:xfrm>
+            <a:off x="685800" y="1929384"/>
+            <a:ext cx="2560320" cy="274320"/>
+          </a:xfrm>
+          <a:prstGeom prst="rect">
+            <a:avLst/>
+          </a:prstGeom>
+          <a:noFill/>
+        </p:spPr>
+        <p:txBody>
+          <a:bodyPr wrap="none" lIns="27432">
+            <a:spAutoFit/>
+          </a:bodyPr>
+          <a:lstStyle/>
+          <a:p>
+            <a:pPr algn="l"/>
+            <a:r>
+              <a:rPr sz="1200" b="0">
+                <a:solidFill>
+                  <a:srgbClr val="111827"/>
+                </a:solidFill>
+                <a:latin typeface="Aptos"/>
+              </a:rPr>
+              <a:t>Wrong output / logic</a:t>
+            </a:r>
+          </a:p>
+        </p:txBody>
+      </p:sp>
+      <p:sp>
+        <p:nvSpPr>
+          <p:cNvPr id="10" name="Rectangle 9"/>
+          <p:cNvSpPr/>
+          <p:nvPr/>
+        </p:nvSpPr>
+        <p:spPr>
+          <a:xfrm>
+            <a:off x="3337560" y="1965960"/>
+            <a:ext cx="2414016" cy="219456"/>
+          </a:xfrm>
+          <a:prstGeom prst="rect">
+            <a:avLst/>
+          </a:prstGeom>
+          <a:solidFill>
+            <a:srgbClr val="94A3B8"/>
+          </a:solidFill>
+          <a:ln>
+            <a:solidFill>
+              <a:srgbClr val="94A3B8"/>
+            </a:solidFill>
+          </a:ln>
+        </p:spPr>
+        <p:style>
+          <a:lnRef idx="1">
+            <a:schemeClr val="accent1"/>
+          </a:lnRef>
+          <a:fillRef idx="3">
+            <a:schemeClr val="accent1"/>
+          </a:fillRef>
+          <a:effectRef idx="2">
+            <a:schemeClr val="accent1"/>
+          </a:effectRef>
+          <a:fontRef idx="minor">
+            <a:schemeClr val="lt1"/>
+          </a:fontRef>
+        </p:style>
+        <p:txBody>
+          <a:bodyPr rtlCol="0" anchor="ctr"/>
+          <a:lstStyle/>
+          <a:p>
+            <a:pPr algn="ctr"/>
+          </a:p>
+        </p:txBody>
+      </p:sp>
+      <p:sp>
+        <p:nvSpPr>
+          <p:cNvPr id="11" name="TextBox 10"/>
+          <p:cNvSpPr txBox="1"/>
+          <p:nvPr/>
+        </p:nvSpPr>
+        <p:spPr>
+          <a:xfrm>
+            <a:off x="9418320" y="1929384"/>
+            <a:ext cx="548640" cy="274320"/>
+          </a:xfrm>
+          <a:prstGeom prst="rect">
+            <a:avLst/>
+          </a:prstGeom>
+          <a:noFill/>
+        </p:spPr>
+        <p:txBody>
+          <a:bodyPr wrap="none" lIns="27432">
+            <a:spAutoFit/>
+          </a:bodyPr>
+          <a:lstStyle/>
+          <a:p>
+            <a:pPr algn="l"/>
+            <a:r>
+              <a:rPr sz="1200" b="1">
+                <a:solidFill>
+                  <a:srgbClr val="111827"/>
+                </a:solidFill>
+                <a:latin typeface="Aptos"/>
+              </a:rPr>
+              <a:t>48</a:t>
+            </a:r>
+          </a:p>
+        </p:txBody>
+      </p:sp>
+      <p:sp>
+        <p:nvSpPr>
+          <p:cNvPr id="12" name="TextBox 11"/>
+          <p:cNvSpPr txBox="1"/>
+          <p:nvPr/>
+        </p:nvSpPr>
+        <p:spPr>
+          <a:xfrm>
+            <a:off x="685800" y="2441448"/>
+            <a:ext cx="2560320" cy="274320"/>
+          </a:xfrm>
+          <a:prstGeom prst="rect">
+            <a:avLst/>
+          </a:prstGeom>
+          <a:noFill/>
+        </p:spPr>
+        <p:txBody>
+          <a:bodyPr wrap="none" lIns="27432">
+            <a:spAutoFit/>
+          </a:bodyPr>
+          <a:lstStyle/>
+          <a:p>
+            <a:pPr algn="l"/>
+            <a:r>
+              <a:rPr sz="1200" b="0">
+                <a:solidFill>
+                  <a:srgbClr val="111827"/>
+                </a:solidFill>
+                <a:latin typeface="Aptos"/>
+              </a:rPr>
+              <a:t>Missing name / import</a:t>
+            </a:r>
+          </a:p>
+        </p:txBody>
+      </p:sp>
+      <p:sp>
+        <p:nvSpPr>
+          <p:cNvPr id="13" name="Rectangle 12"/>
+          <p:cNvSpPr/>
+          <p:nvPr/>
+        </p:nvSpPr>
+        <p:spPr>
+          <a:xfrm>
+            <a:off x="3337560" y="2478024"/>
+            <a:ext cx="804672" cy="219456"/>
+          </a:xfrm>
+          <a:prstGeom prst="rect">
+            <a:avLst/>
+          </a:prstGeom>
+          <a:solidFill>
+            <a:srgbClr val="94A3B8"/>
+          </a:solidFill>
+          <a:ln>
+            <a:solidFill>
+              <a:srgbClr val="94A3B8"/>
+            </a:solidFill>
+          </a:ln>
+        </p:spPr>
+        <p:style>
+          <a:lnRef idx="1">
+            <a:schemeClr val="accent1"/>
+          </a:lnRef>
+          <a:fillRef idx="3">
+            <a:schemeClr val="accent1"/>
+          </a:fillRef>
+          <a:effectRef idx="2">
+            <a:schemeClr val="accent1"/>
+          </a:effectRef>
+          <a:fontRef idx="minor">
+            <a:schemeClr val="lt1"/>
+          </a:fontRef>
+        </p:style>
+        <p:txBody>
+          <a:bodyPr rtlCol="0" anchor="ctr"/>
+          <a:lstStyle/>
+          <a:p>
+            <a:pPr algn="ctr"/>
+          </a:p>
+        </p:txBody>
+      </p:sp>
+      <p:sp>
+        <p:nvSpPr>
+          <p:cNvPr id="14" name="TextBox 13"/>
+          <p:cNvSpPr txBox="1"/>
+          <p:nvPr/>
+        </p:nvSpPr>
+        <p:spPr>
+          <a:xfrm>
+            <a:off x="9418320" y="2441448"/>
+            <a:ext cx="548640" cy="274320"/>
+          </a:xfrm>
+          <a:prstGeom prst="rect">
+            <a:avLst/>
+          </a:prstGeom>
+          <a:noFill/>
+        </p:spPr>
+        <p:txBody>
+          <a:bodyPr wrap="none" lIns="27432">
+            <a:spAutoFit/>
+          </a:bodyPr>
+          <a:lstStyle/>
+          <a:p>
+            <a:pPr algn="l"/>
+            <a:r>
+              <a:rPr sz="1200" b="1">
+                <a:solidFill>
+                  <a:srgbClr val="111827"/>
+                </a:solidFill>
+                <a:latin typeface="Aptos"/>
+              </a:rPr>
+              <a:t>16</a:t>
+            </a:r>
+          </a:p>
+        </p:txBody>
+      </p:sp>
+      <p:sp>
+        <p:nvSpPr>
+          <p:cNvPr id="15" name="TextBox 14"/>
+          <p:cNvSpPr txBox="1"/>
+          <p:nvPr/>
+        </p:nvSpPr>
+        <p:spPr>
+          <a:xfrm>
+            <a:off x="685800" y="2953512"/>
+            <a:ext cx="2560320" cy="274320"/>
+          </a:xfrm>
+          <a:prstGeom prst="rect">
+            <a:avLst/>
+          </a:prstGeom>
+          <a:noFill/>
+        </p:spPr>
+        <p:txBody>
+          <a:bodyPr wrap="none" lIns="27432">
+            <a:spAutoFit/>
+          </a:bodyPr>
+          <a:lstStyle/>
+          <a:p>
+            <a:pPr algn="l"/>
+            <a:r>
+              <a:rPr sz="1200" b="0">
+                <a:solidFill>
+                  <a:srgbClr val="111827"/>
+                </a:solidFill>
+                <a:latin typeface="Aptos"/>
+              </a:rPr>
+              <a:t>Unexpected value</a:t>
+            </a:r>
+          </a:p>
+        </p:txBody>
+      </p:sp>
+      <p:sp>
+        <p:nvSpPr>
+          <p:cNvPr id="16" name="Rectangle 15"/>
+          <p:cNvSpPr/>
+          <p:nvPr/>
+        </p:nvSpPr>
+        <p:spPr>
+          <a:xfrm>
+            <a:off x="3337560" y="2990088"/>
+            <a:ext cx="452628" cy="219456"/>
+          </a:xfrm>
+          <a:prstGeom prst="rect">
+            <a:avLst/>
+          </a:prstGeom>
+          <a:solidFill>
+            <a:srgbClr val="94A3B8"/>
+          </a:solidFill>
+          <a:ln>
+            <a:solidFill>
+              <a:srgbClr val="94A3B8"/>
+            </a:solidFill>
+          </a:ln>
+        </p:spPr>
+        <p:style>
+          <a:lnRef idx="1">
+            <a:schemeClr val="accent1"/>
+          </a:lnRef>
+          <a:fillRef idx="3">
+            <a:schemeClr val="accent1"/>
+          </a:fillRef>
+          <a:effectRef idx="2">
+            <a:schemeClr val="accent1"/>
+          </a:effectRef>
+          <a:fontRef idx="minor">
+            <a:schemeClr val="lt1"/>
+          </a:fontRef>
+        </p:style>
+        <p:txBody>
+          <a:bodyPr rtlCol="0" anchor="ctr"/>
+          <a:lstStyle/>
+          <a:p>
+            <a:pPr algn="ctr"/>
+          </a:p>
+        </p:txBody>
+      </p:sp>
+      <p:sp>
+        <p:nvSpPr>
+          <p:cNvPr id="17" name="TextBox 16"/>
+          <p:cNvSpPr txBox="1"/>
+          <p:nvPr/>
+        </p:nvSpPr>
+        <p:spPr>
+          <a:xfrm>
+            <a:off x="9418320" y="2953512"/>
+            <a:ext cx="548640" cy="274320"/>
+          </a:xfrm>
+          <a:prstGeom prst="rect">
+            <a:avLst/>
+          </a:prstGeom>
+          <a:noFill/>
+        </p:spPr>
+        <p:txBody>
+          <a:bodyPr wrap="none" lIns="27432">
+            <a:spAutoFit/>
+          </a:bodyPr>
+          <a:lstStyle/>
+          <a:p>
+            <a:pPr algn="l"/>
+            <a:r>
+              <a:rPr sz="1200" b="1">
+                <a:solidFill>
+                  <a:srgbClr val="111827"/>
+                </a:solidFill>
+                <a:latin typeface="Aptos"/>
+              </a:rPr>
+              <a:t>9</a:t>
+            </a:r>
+          </a:p>
+        </p:txBody>
+      </p:sp>
+      <p:sp>
+        <p:nvSpPr>
+          <p:cNvPr id="18" name="TextBox 17"/>
+          <p:cNvSpPr txBox="1"/>
+          <p:nvPr/>
+        </p:nvSpPr>
+        <p:spPr>
+          <a:xfrm>
+            <a:off x="685800" y="3465576"/>
+            <a:ext cx="2560320" cy="274320"/>
+          </a:xfrm>
+          <a:prstGeom prst="rect">
+            <a:avLst/>
+          </a:prstGeom>
+          <a:noFill/>
+        </p:spPr>
+        <p:txBody>
+          <a:bodyPr wrap="none" lIns="27432">
+            <a:spAutoFit/>
+          </a:bodyPr>
+          <a:lstStyle/>
+          <a:p>
+            <a:pPr algn="l"/>
+            <a:r>
+              <a:rPr sz="1200" b="0">
+                <a:solidFill>
+                  <a:srgbClr val="111827"/>
+                </a:solidFill>
+                <a:latin typeface="Aptos"/>
+              </a:rPr>
+              <a:t>Wrong type</a:t>
+            </a:r>
+          </a:p>
+        </p:txBody>
+      </p:sp>
+      <p:sp>
+        <p:nvSpPr>
+          <p:cNvPr id="19" name="Rectangle 18"/>
+          <p:cNvSpPr/>
+          <p:nvPr/>
+        </p:nvSpPr>
+        <p:spPr>
+          <a:xfrm>
+            <a:off x="3337560" y="3502152"/>
+            <a:ext cx="352044" cy="219456"/>
+          </a:xfrm>
+          <a:prstGeom prst="rect">
+            <a:avLst/>
+          </a:prstGeom>
+          <a:solidFill>
+            <a:srgbClr val="94A3B8"/>
+          </a:solidFill>
+          <a:ln>
+            <a:solidFill>
+              <a:srgbClr val="94A3B8"/>
+            </a:solidFill>
+          </a:ln>
+        </p:spPr>
+        <p:style>
+          <a:lnRef idx="1">
+            <a:schemeClr val="accent1"/>
+          </a:lnRef>
+          <a:fillRef idx="3">
+            <a:schemeClr val="accent1"/>
+          </a:fillRef>
+          <a:effectRef idx="2">
+            <a:schemeClr val="accent1"/>
+          </a:effectRef>
+          <a:fontRef idx="minor">
+            <a:schemeClr val="lt1"/>
+          </a:fontRef>
+        </p:style>
+        <p:txBody>
+          <a:bodyPr rtlCol="0" anchor="ctr"/>
+          <a:lstStyle/>
+          <a:p>
+            <a:pPr algn="ctr"/>
+          </a:p>
+        </p:txBody>
+      </p:sp>
+      <p:sp>
+        <p:nvSpPr>
+          <p:cNvPr id="20" name="TextBox 19"/>
+          <p:cNvSpPr txBox="1"/>
+          <p:nvPr/>
+        </p:nvSpPr>
+        <p:spPr>
+          <a:xfrm>
+            <a:off x="9418320" y="3465576"/>
+            <a:ext cx="548640" cy="274320"/>
+          </a:xfrm>
+          <a:prstGeom prst="rect">
+            <a:avLst/>
+          </a:prstGeom>
+          <a:noFill/>
+        </p:spPr>
+        <p:txBody>
+          <a:bodyPr wrap="none" lIns="27432">
+            <a:spAutoFit/>
+          </a:bodyPr>
+          <a:lstStyle/>
+          <a:p>
+            <a:pPr algn="l"/>
+            <a:r>
+              <a:rPr sz="1200" b="1">
+                <a:solidFill>
+                  <a:srgbClr val="111827"/>
+                </a:solidFill>
+                <a:latin typeface="Aptos"/>
+              </a:rPr>
+              <a:t>7</a:t>
+            </a:r>
+          </a:p>
+        </p:txBody>
+      </p:sp>
+      <p:sp>
+        <p:nvSpPr>
+          <p:cNvPr id="21" name="TextBox 20"/>
+          <p:cNvSpPr txBox="1"/>
+          <p:nvPr/>
+        </p:nvSpPr>
+        <p:spPr>
+          <a:xfrm>
+            <a:off x="685800" y="3977640"/>
+            <a:ext cx="2560320" cy="274320"/>
+          </a:xfrm>
+          <a:prstGeom prst="rect">
+            <a:avLst/>
+          </a:prstGeom>
+          <a:noFill/>
+        </p:spPr>
+        <p:txBody>
+          <a:bodyPr wrap="none" lIns="27432">
+            <a:spAutoFit/>
+          </a:bodyPr>
+          <a:lstStyle/>
+          <a:p>
+            <a:pPr algn="l"/>
+            <a:r>
+              <a:rPr sz="1200" b="0">
+                <a:solidFill>
+                  <a:srgbClr val="111827"/>
+                </a:solidFill>
+                <a:latin typeface="Aptos"/>
+              </a:rPr>
+              <a:t>Other runtime</a:t>
+            </a:r>
+          </a:p>
+        </p:txBody>
+      </p:sp>
+      <p:sp>
+        <p:nvSpPr>
+          <p:cNvPr id="22" name="Rectangle 21"/>
+          <p:cNvSpPr/>
+          <p:nvPr/>
+        </p:nvSpPr>
+        <p:spPr>
+          <a:xfrm>
+            <a:off x="3337560" y="4014216"/>
+            <a:ext cx="301752" cy="219456"/>
+          </a:xfrm>
+          <a:prstGeom prst="rect">
+            <a:avLst/>
+          </a:prstGeom>
+          <a:solidFill>
+            <a:srgbClr val="94A3B8"/>
+          </a:solidFill>
+          <a:ln>
+            <a:solidFill>
+              <a:srgbClr val="94A3B8"/>
+            </a:solidFill>
+          </a:ln>
+        </p:spPr>
+        <p:style>
+          <a:lnRef idx="1">
+            <a:schemeClr val="accent1"/>
+          </a:lnRef>
+          <a:fillRef idx="3">
+            <a:schemeClr val="accent1"/>
+          </a:fillRef>
+          <a:effectRef idx="2">
+            <a:schemeClr val="accent1"/>
+          </a:effectRef>
+          <a:fontRef idx="minor">
+            <a:schemeClr val="lt1"/>
+          </a:fontRef>
+        </p:style>
+        <p:txBody>
+          <a:bodyPr rtlCol="0" anchor="ctr"/>
+          <a:lstStyle/>
+          <a:p>
+            <a:pPr algn="ctr"/>
+          </a:p>
+        </p:txBody>
+      </p:sp>
+      <p:sp>
+        <p:nvSpPr>
+          <p:cNvPr id="23" name="TextBox 22"/>
+          <p:cNvSpPr txBox="1"/>
+          <p:nvPr/>
+        </p:nvSpPr>
+        <p:spPr>
+          <a:xfrm>
+            <a:off x="9418320" y="3977640"/>
+            <a:ext cx="548640" cy="274320"/>
+          </a:xfrm>
+          <a:prstGeom prst="rect">
+            <a:avLst/>
+          </a:prstGeom>
+          <a:noFill/>
+        </p:spPr>
+        <p:txBody>
+          <a:bodyPr wrap="none" lIns="27432">
+            <a:spAutoFit/>
+          </a:bodyPr>
+          <a:lstStyle/>
+          <a:p>
+            <a:pPr algn="l"/>
+            <a:r>
+              <a:rPr sz="1200" b="1">
+                <a:solidFill>
+                  <a:srgbClr val="111827"/>
+                </a:solidFill>
+                <a:latin typeface="Aptos"/>
+              </a:rPr>
+              <a:t>6</a:t>
+            </a:r>
+          </a:p>
+        </p:txBody>
+      </p:sp>
+      <p:sp>
+        <p:nvSpPr>
+          <p:cNvPr id="24" name="TextBox 23"/>
+          <p:cNvSpPr txBox="1"/>
+          <p:nvPr/>
+        </p:nvSpPr>
+        <p:spPr>
+          <a:xfrm>
+            <a:off x="685800" y="4489704"/>
+            <a:ext cx="2560320" cy="274320"/>
+          </a:xfrm>
+          <a:prstGeom prst="rect">
+            <a:avLst/>
+          </a:prstGeom>
+          <a:noFill/>
+        </p:spPr>
+        <p:txBody>
+          <a:bodyPr wrap="none" lIns="27432">
+            <a:spAutoFit/>
+          </a:bodyPr>
+          <a:lstStyle/>
+          <a:p>
+            <a:pPr algn="l"/>
+            <a:r>
+              <a:rPr sz="1200" b="0">
+                <a:solidFill>
+                  <a:srgbClr val="111827"/>
+                </a:solidFill>
+                <a:latin typeface="Aptos"/>
+              </a:rPr>
+              <a:t>Wrong API / attribute</a:t>
+            </a:r>
+          </a:p>
+        </p:txBody>
+      </p:sp>
+      <p:sp>
+        <p:nvSpPr>
+          <p:cNvPr id="25" name="Rectangle 24"/>
+          <p:cNvSpPr/>
+          <p:nvPr/>
+        </p:nvSpPr>
+        <p:spPr>
+          <a:xfrm>
+            <a:off x="3337560" y="4526280"/>
+            <a:ext cx="251460" cy="219456"/>
+          </a:xfrm>
+          <a:prstGeom prst="rect">
+            <a:avLst/>
+          </a:prstGeom>
+          <a:solidFill>
+            <a:srgbClr val="94A3B8"/>
+          </a:solidFill>
+          <a:ln>
+            <a:solidFill>
+              <a:srgbClr val="94A3B8"/>
+            </a:solidFill>
+          </a:ln>
+        </p:spPr>
+        <p:style>
+          <a:lnRef idx="1">
+            <a:schemeClr val="accent1"/>
+          </a:lnRef>
+          <a:fillRef idx="3">
+            <a:schemeClr val="accent1"/>
+          </a:fillRef>
+          <a:effectRef idx="2">
+            <a:schemeClr val="accent1"/>
+          </a:effectRef>
+          <a:fontRef idx="minor">
+            <a:schemeClr val="lt1"/>
+          </a:fontRef>
+        </p:style>
+        <p:txBody>
+          <a:bodyPr rtlCol="0" anchor="ctr"/>
+          <a:lstStyle/>
+          <a:p>
+            <a:pPr algn="ctr"/>
+          </a:p>
+        </p:txBody>
+      </p:sp>
+      <p:sp>
+        <p:nvSpPr>
+          <p:cNvPr id="26" name="TextBox 25"/>
+          <p:cNvSpPr txBox="1"/>
+          <p:nvPr/>
+        </p:nvSpPr>
+        <p:spPr>
+          <a:xfrm>
+            <a:off x="9418320" y="4489704"/>
+            <a:ext cx="548640" cy="274320"/>
+          </a:xfrm>
+          <a:prstGeom prst="rect">
+            <a:avLst/>
+          </a:prstGeom>
+          <a:noFill/>
+        </p:spPr>
+        <p:txBody>
+          <a:bodyPr wrap="none" lIns="27432">
+            <a:spAutoFit/>
+          </a:bodyPr>
+          <a:lstStyle/>
+          <a:p>
+            <a:pPr algn="l"/>
+            <a:r>
+              <a:rPr sz="1200" b="1">
+                <a:solidFill>
+                  <a:srgbClr val="111827"/>
+                </a:solidFill>
+                <a:latin typeface="Aptos"/>
+              </a:rPr>
+              <a:t>5</a:t>
+            </a:r>
+          </a:p>
+        </p:txBody>
+      </p:sp>
+      <p:sp>
+        <p:nvSpPr>
+          <p:cNvPr id="27" name="TextBox 26"/>
+          <p:cNvSpPr txBox="1"/>
+          <p:nvPr/>
+        </p:nvSpPr>
+        <p:spPr>
+          <a:xfrm>
+            <a:off x="685800" y="5001768"/>
+            <a:ext cx="2560320" cy="274320"/>
+          </a:xfrm>
+          <a:prstGeom prst="rect">
+            <a:avLst/>
+          </a:prstGeom>
+          <a:noFill/>
+        </p:spPr>
+        <p:txBody>
+          <a:bodyPr wrap="none" lIns="27432">
+            <a:spAutoFit/>
+          </a:bodyPr>
+          <a:lstStyle/>
+          <a:p>
+            <a:pPr algn="l"/>
+            <a:r>
+              <a:rPr sz="1200" b="0">
+                <a:solidFill>
+                  <a:srgbClr val="111827"/>
+                </a:solidFill>
+                <a:latin typeface="Aptos"/>
+              </a:rPr>
+              <a:t>Truncation / extraction</a:t>
+            </a:r>
+          </a:p>
+        </p:txBody>
+      </p:sp>
+      <p:sp>
+        <p:nvSpPr>
+          <p:cNvPr id="28" name="Rectangle 27"/>
+          <p:cNvSpPr/>
+          <p:nvPr/>
+        </p:nvSpPr>
+        <p:spPr>
+          <a:xfrm>
+            <a:off x="3337560" y="5038344"/>
+            <a:ext cx="251460" cy="219456"/>
+          </a:xfrm>
+          <a:prstGeom prst="rect">
+            <a:avLst/>
+          </a:prstGeom>
+          <a:solidFill>
+            <a:srgbClr val="94A3B8"/>
+          </a:solidFill>
+          <a:ln>
+            <a:solidFill>
+              <a:srgbClr val="94A3B8"/>
+            </a:solidFill>
+          </a:ln>
+        </p:spPr>
+        <p:style>
+          <a:lnRef idx="1">
+            <a:schemeClr val="accent1"/>
+          </a:lnRef>
+          <a:fillRef idx="3">
+            <a:schemeClr val="accent1"/>
+          </a:fillRef>
+          <a:effectRef idx="2">
+            <a:schemeClr val="accent1"/>
+          </a:effectRef>
+          <a:fontRef idx="minor">
+            <a:schemeClr val="lt1"/>
+          </a:fontRef>
+        </p:style>
+        <p:txBody>
+          <a:bodyPr rtlCol="0" anchor="ctr"/>
+          <a:lstStyle/>
+          <a:p>
+            <a:pPr algn="ctr"/>
+          </a:p>
+        </p:txBody>
+      </p:sp>
+      <p:sp>
+        <p:nvSpPr>
+          <p:cNvPr id="29" name="TextBox 28"/>
+          <p:cNvSpPr txBox="1"/>
+          <p:nvPr/>
+        </p:nvSpPr>
+        <p:spPr>
+          <a:xfrm>
+            <a:off x="9418320" y="5001768"/>
+            <a:ext cx="548640" cy="274320"/>
+          </a:xfrm>
+          <a:prstGeom prst="rect">
+            <a:avLst/>
+          </a:prstGeom>
+          <a:noFill/>
+        </p:spPr>
+        <p:txBody>
+          <a:bodyPr wrap="none" lIns="27432">
+            <a:spAutoFit/>
+          </a:bodyPr>
+          <a:lstStyle/>
+          <a:p>
+            <a:pPr algn="l"/>
+            <a:r>
+              <a:rPr sz="1200" b="1">
+                <a:solidFill>
+                  <a:srgbClr val="111827"/>
+                </a:solidFill>
+                <a:latin typeface="Aptos"/>
+              </a:rPr>
+              <a:t>5</a:t>
+            </a:r>
+          </a:p>
+        </p:txBody>
+      </p:sp>
+      <p:sp>
+        <p:nvSpPr>
+          <p:cNvPr id="30" name="TextBox 29"/>
+          <p:cNvSpPr txBox="1"/>
+          <p:nvPr/>
+        </p:nvSpPr>
+        <p:spPr>
+          <a:xfrm>
+            <a:off x="9966960" y="1828800"/>
+            <a:ext cx="1371600" cy="2103120"/>
+          </a:xfrm>
+          <a:prstGeom prst="rect">
+            <a:avLst/>
+          </a:prstGeom>
+          <a:noFill/>
+        </p:spPr>
+        <p:txBody>
+          <a:bodyPr wrap="none" lIns="27432">
+            <a:spAutoFit/>
+          </a:bodyPr>
+          <a:lstStyle/>
+          <a:p>
+            <a:pPr algn="ctr"/>
+            <a:r>
+              <a:rPr sz="1700" b="1">
+                <a:solidFill>
+                  <a:srgbClr val="F59E0B"/>
+                </a:solidFill>
+                <a:latin typeface="Aptos"/>
+              </a:rPr>
+              <a:t>119/215 = 55.3%
+Rule-based taxonomy;
+manual validation required.</a:t>
+            </a:r>
+          </a:p>
+        </p:txBody>
+      </p:sp>
+      <p:sp>
+        <p:nvSpPr>
+          <p:cNvPr id="31" name="TextBox 30"/>
+          <p:cNvSpPr txBox="1"/>
+          <p:nvPr/>
+        </p:nvSpPr>
+        <p:spPr>
+          <a:xfrm>
+            <a:off x="594360" y="6547104"/>
+            <a:ext cx="6400800" cy="164592"/>
+          </a:xfrm>
+          <a:prstGeom prst="rect">
+            <a:avLst/>
+          </a:prstGeom>
+          <a:noFill/>
+        </p:spPr>
+        <p:txBody>
+          <a:bodyPr wrap="none" lIns="27432">
+            <a:spAutoFit/>
+          </a:bodyPr>
+          <a:lstStyle/>
+          <a:p>
+            <a:pPr algn="l"/>
+            <a:r>
+              <a:rPr sz="800" b="0">
+                <a:solidFill>
+                  <a:srgbClr val="94A3B8"/>
+                </a:solidFill>
+                <a:latin typeface="Aptos"/>
+              </a:rPr>
+              <a:t>DSTK100 - exploratory improvement-feature audit</a:t>
+            </a:r>
+          </a:p>
+        </p:txBody>
+      </p:sp>
+      <p:sp>
+        <p:nvSpPr>
+          <p:cNvPr id="32" name="TextBox 31"/>
+          <p:cNvSpPr txBox="1"/>
+          <p:nvPr/>
+        </p:nvSpPr>
+        <p:spPr>
+          <a:xfrm>
+            <a:off x="11155680" y="6510528"/>
+            <a:ext cx="365760" cy="182880"/>
+          </a:xfrm>
+          <a:prstGeom prst="rect">
+            <a:avLst/>
+          </a:prstGeom>
+          <a:noFill/>
+        </p:spPr>
+        <p:txBody>
+          <a:bodyPr wrap="none" lIns="27432">
+            <a:spAutoFit/>
+          </a:bodyPr>
+          <a:lstStyle/>
+          <a:p>
+            <a:pPr algn="r"/>
+            <a:r>
+              <a:rPr sz="800" b="0">
+                <a:solidFill>
+                  <a:srgbClr val="94A3B8"/>
+                </a:solidFill>
+                <a:latin typeface="Aptos"/>
+              </a:rPr>
+              <a:t>20</a:t>
+            </a:r>
+          </a:p>
+        </p:txBody>
+      </p:sp>
+    </p:spTree>
+  </p:cSld>
+  <p:clrMapOvr>
+    <a:masterClrMapping/>
+  </p:clrMapOvr>
+</p:sld>
+</file>
+
+<file path=ppt/slides/slide21.xml><?xml version="1.0" encoding="utf-8"?>
+<p:sld xmlns:a="http://schemas.openxmlformats.org/drawingml/2006/main" xmlns:p="http://schemas.openxmlformats.org/presentationml/2006/main" xmlns:r="http://schemas.openxmlformats.org/officeDocument/2006/relationships">
+  <p:cSld>
+    <p:spTree>
+      <p:nvGrpSpPr>
+        <p:cNvPr id="1" name=""/>
+        <p:cNvGrpSpPr/>
+        <p:nvPr/>
+      </p:nvGrpSpPr>
+      <p:grpSpPr/>
+      <p:sp>
+        <p:nvSpPr>
+          <p:cNvPr id="3" name="Rectangle 2"/>
+          <p:cNvSpPr/>
+          <p:nvPr/>
+        </p:nvSpPr>
+        <p:spPr>
+          <a:xfrm>
+            <a:off x="0" y="0"/>
+            <a:ext cx="12191695" cy="6858000"/>
+          </a:xfrm>
+          <a:prstGeom prst="rect">
+            <a:avLst/>
+          </a:prstGeom>
+          <a:solidFill>
+            <a:srgbClr val="F8FAFC"/>
+          </a:solidFill>
+          <a:ln>
+            <a:solidFill>
+              <a:srgbClr val="F8FAFC"/>
+            </a:solidFill>
+          </a:ln>
+        </p:spPr>
+        <p:style>
+          <a:lnRef idx="1">
+            <a:schemeClr val="accent1"/>
+          </a:lnRef>
+          <a:fillRef idx="3">
+            <a:schemeClr val="accent1"/>
+          </a:fillRef>
+          <a:effectRef idx="2">
+            <a:schemeClr val="accent1"/>
+          </a:effectRef>
+          <a:fontRef idx="minor">
+            <a:schemeClr val="lt1"/>
+          </a:fontRef>
+        </p:style>
+        <p:txBody>
+          <a:bodyPr rtlCol="0" anchor="ctr"/>
+          <a:lstStyle/>
+          <a:p>
+            <a:pPr algn="ctr"/>
+          </a:p>
+        </p:txBody>
+      </p:sp>
+      <p:sp>
+        <p:nvSpPr>
+          <p:cNvPr id="2" name="Title 1"/>
+          <p:cNvSpPr>
+            <a:spLocks noGrp="1"/>
+          </p:cNvSpPr>
+          <p:nvPr>
+            <p:ph type="title"/>
+          </p:nvPr>
+        </p:nvSpPr>
+        <p:spPr/>
+        <p:txBody>
+          <a:bodyPr/>
+          <a:lstStyle/>
+          <a:p/>
+        </p:txBody>
+      </p:sp>
+      <p:sp>
+        <p:nvSpPr>
+          <p:cNvPr id="4" name="TextBox 3"/>
+          <p:cNvSpPr txBox="1"/>
+          <p:nvPr/>
+        </p:nvSpPr>
+        <p:spPr>
+          <a:xfrm>
+            <a:off x="594360" y="274320"/>
+            <a:ext cx="10972800" cy="228600"/>
+          </a:xfrm>
+          <a:prstGeom prst="rect">
+            <a:avLst/>
+          </a:prstGeom>
+          <a:noFill/>
+        </p:spPr>
+        <p:txBody>
+          <a:bodyPr wrap="none" lIns="27432">
+            <a:spAutoFit/>
+          </a:bodyPr>
+          <a:lstStyle/>
+          <a:p>
+            <a:pPr algn="l"/>
+            <a:r>
+              <a:rPr sz="1000" b="1">
+                <a:solidFill>
+                  <a:srgbClr val="2563EB"/>
+                </a:solidFill>
+                <a:latin typeface="Aptos"/>
+              </a:rPr>
+              <a:t>TOP-10 SEMANTICS</a:t>
+            </a:r>
+          </a:p>
+        </p:txBody>
+      </p:sp>
+      <p:sp>
+        <p:nvSpPr>
+          <p:cNvPr id="5" name="TextBox 4"/>
+          <p:cNvSpPr txBox="1"/>
+          <p:nvPr/>
+        </p:nvSpPr>
+        <p:spPr>
+          <a:xfrm>
+            <a:off x="594360" y="640080"/>
+            <a:ext cx="10972800" cy="594360"/>
+          </a:xfrm>
+          <a:prstGeom prst="rect">
+            <a:avLst/>
+          </a:prstGeom>
+          <a:noFill/>
+        </p:spPr>
+        <p:txBody>
+          <a:bodyPr wrap="none" lIns="27432">
+            <a:spAutoFit/>
+          </a:bodyPr>
+          <a:lstStyle/>
+          <a:p>
+            <a:pPr algn="l"/>
+            <a:r>
+              <a:rPr sz="2700" b="1">
+                <a:solidFill>
+                  <a:srgbClr val="111827"/>
+                </a:solidFill>
+                <a:latin typeface="Aptos"/>
+              </a:rPr>
+              <a:t>The negative screen decomposes generated tests into sparse components</a:t>
+            </a:r>
+          </a:p>
+        </p:txBody>
+      </p:sp>
+      <p:sp>
+        <p:nvSpPr>
+          <p:cNvPr id="6" name="TextBox 5"/>
+          <p:cNvSpPr txBox="1"/>
+          <p:nvPr/>
+        </p:nvSpPr>
+        <p:spPr>
+          <a:xfrm>
+            <a:off x="640080" y="1353312"/>
+            <a:ext cx="731520" cy="228600"/>
+          </a:xfrm>
+          <a:prstGeom prst="rect">
+            <a:avLst/>
+          </a:prstGeom>
+          <a:noFill/>
+        </p:spPr>
+        <p:txBody>
+          <a:bodyPr wrap="none" lIns="27432">
+            <a:spAutoFit/>
+          </a:bodyPr>
+          <a:lstStyle/>
+          <a:p>
+            <a:pPr algn="l"/>
+            <a:r>
+              <a:rPr sz="1000" b="1">
+                <a:solidFill>
+                  <a:srgbClr val="2563EB"/>
+                </a:solidFill>
+                <a:latin typeface="Aptos"/>
+              </a:rPr>
+              <a:t>ID</a:t>
+            </a:r>
+          </a:p>
+        </p:txBody>
+      </p:sp>
+      <p:sp>
+        <p:nvSpPr>
+          <p:cNvPr id="7" name="TextBox 6"/>
+          <p:cNvSpPr txBox="1"/>
+          <p:nvPr/>
+        </p:nvSpPr>
+        <p:spPr>
+          <a:xfrm>
+            <a:off x="1463040" y="1353312"/>
+            <a:ext cx="2286000" cy="228600"/>
+          </a:xfrm>
+          <a:prstGeom prst="rect">
+            <a:avLst/>
+          </a:prstGeom>
+          <a:noFill/>
+        </p:spPr>
+        <p:txBody>
+          <a:bodyPr wrap="none" lIns="27432">
+            <a:spAutoFit/>
+          </a:bodyPr>
+          <a:lstStyle/>
+          <a:p>
+            <a:pPr algn="l"/>
+            <a:r>
+              <a:rPr sz="1000" b="1">
+                <a:solidFill>
+                  <a:srgbClr val="2563EB"/>
+                </a:solidFill>
+                <a:latin typeface="Aptos"/>
+              </a:rPr>
+              <a:t>TOKENS</a:t>
+            </a:r>
+          </a:p>
+        </p:txBody>
+      </p:sp>
+      <p:sp>
+        <p:nvSpPr>
+          <p:cNvPr id="8" name="TextBox 7"/>
+          <p:cNvSpPr txBox="1"/>
+          <p:nvPr/>
+        </p:nvSpPr>
+        <p:spPr>
+          <a:xfrm>
+            <a:off x="3886200" y="1353312"/>
+            <a:ext cx="3474720" cy="228600"/>
+          </a:xfrm>
+          <a:prstGeom prst="rect">
+            <a:avLst/>
+          </a:prstGeom>
+          <a:noFill/>
+        </p:spPr>
+        <p:txBody>
+          <a:bodyPr wrap="none" lIns="27432">
+            <a:spAutoFit/>
+          </a:bodyPr>
+          <a:lstStyle/>
+          <a:p>
+            <a:pPr algn="l"/>
+            <a:r>
+              <a:rPr sz="1000" b="1">
+                <a:solidFill>
+                  <a:srgbClr val="2563EB"/>
+                </a:solidFill>
+                <a:latin typeface="Aptos"/>
+              </a:rPr>
+              <a:t>SEMANTICS</a:t>
+            </a:r>
+          </a:p>
+        </p:txBody>
+      </p:sp>
+      <p:sp>
+        <p:nvSpPr>
+          <p:cNvPr id="9" name="TextBox 8"/>
+          <p:cNvSpPr txBox="1"/>
+          <p:nvPr/>
+        </p:nvSpPr>
+        <p:spPr>
+          <a:xfrm>
+            <a:off x="7589520" y="1353312"/>
+            <a:ext cx="1280160" cy="228600"/>
+          </a:xfrm>
+          <a:prstGeom prst="rect">
+            <a:avLst/>
+          </a:prstGeom>
+          <a:noFill/>
+        </p:spPr>
+        <p:txBody>
+          <a:bodyPr wrap="none" lIns="27432">
+            <a:spAutoFit/>
+          </a:bodyPr>
+          <a:lstStyle/>
+          <a:p>
+            <a:pPr algn="l"/>
+            <a:r>
+              <a:rPr sz="1000" b="1">
+                <a:solidFill>
+                  <a:srgbClr val="2563EB"/>
+                </a:solidFill>
+                <a:latin typeface="Aptos"/>
+              </a:rPr>
+              <a:t>ACTIVE</a:t>
+            </a:r>
+          </a:p>
+        </p:txBody>
+      </p:sp>
+      <p:sp>
+        <p:nvSpPr>
+          <p:cNvPr id="10" name="TextBox 9"/>
+          <p:cNvSpPr txBox="1"/>
+          <p:nvPr/>
+        </p:nvSpPr>
+        <p:spPr>
+          <a:xfrm>
+            <a:off x="9052560" y="1353312"/>
+            <a:ext cx="1280160" cy="228600"/>
+          </a:xfrm>
+          <a:prstGeom prst="rect">
+            <a:avLst/>
+          </a:prstGeom>
+          <a:noFill/>
+        </p:spPr>
+        <p:txBody>
+          <a:bodyPr wrap="none" lIns="27432">
+            <a:spAutoFit/>
+          </a:bodyPr>
+          <a:lstStyle/>
+          <a:p>
+            <a:pPr algn="l"/>
+            <a:r>
+              <a:rPr sz="1000" b="1">
+                <a:solidFill>
+                  <a:srgbClr val="2563EB"/>
+                </a:solidFill>
+                <a:latin typeface="Aptos"/>
+              </a:rPr>
+              <a:t>MEDIAN</a:t>
+            </a:r>
+          </a:p>
+        </p:txBody>
+      </p:sp>
+      <p:sp>
+        <p:nvSpPr>
+          <p:cNvPr id="11" name="Rectangle 10"/>
+          <p:cNvSpPr/>
+          <p:nvPr/>
+        </p:nvSpPr>
+        <p:spPr>
+          <a:xfrm>
+            <a:off x="548640" y="1682495"/>
+            <a:ext cx="10789920" cy="365760"/>
+          </a:xfrm>
+          <a:prstGeom prst="rect">
+            <a:avLst/>
+          </a:prstGeom>
+          <a:solidFill>
+            <a:srgbClr val="F1F5F9"/>
+          </a:solidFill>
+          <a:ln>
+            <a:solidFill>
+              <a:srgbClr val="F1F5F9"/>
+            </a:solidFill>
+          </a:ln>
+        </p:spPr>
+        <p:style>
+          <a:lnRef idx="1">
+            <a:schemeClr val="accent1"/>
+          </a:lnRef>
+          <a:fillRef idx="3">
+            <a:schemeClr val="accent1"/>
+          </a:fillRef>
+          <a:effectRef idx="2">
+            <a:schemeClr val="accent1"/>
+          </a:effectRef>
+          <a:fontRef idx="minor">
+            <a:schemeClr val="lt1"/>
+          </a:fontRef>
+        </p:style>
+        <p:txBody>
+          <a:bodyPr rtlCol="0" anchor="ctr"/>
+          <a:lstStyle/>
+          <a:p>
+            <a:pPr algn="ctr"/>
+          </a:p>
+        </p:txBody>
+      </p:sp>
+      <p:sp>
+        <p:nvSpPr>
+          <p:cNvPr id="12" name="TextBox 11"/>
+          <p:cNvSpPr txBox="1"/>
+          <p:nvPr/>
+        </p:nvSpPr>
+        <p:spPr>
+          <a:xfrm>
+            <a:off x="658368" y="1719072"/>
+            <a:ext cx="685800" cy="228600"/>
+          </a:xfrm>
+          <a:prstGeom prst="rect">
+            <a:avLst/>
+          </a:prstGeom>
+          <a:noFill/>
+        </p:spPr>
+        <p:txBody>
+          <a:bodyPr wrap="none" lIns="27432">
+            <a:spAutoFit/>
+          </a:bodyPr>
+          <a:lstStyle/>
+          <a:p>
+            <a:pPr algn="l"/>
+            <a:r>
+              <a:rPr sz="1100" b="1">
+                <a:solidFill>
+                  <a:srgbClr val="111827"/>
+                </a:solidFill>
+                <a:latin typeface="Aptos"/>
+              </a:rPr>
+              <a:t>9537</a:t>
+            </a:r>
+          </a:p>
+        </p:txBody>
+      </p:sp>
+      <p:sp>
+        <p:nvSpPr>
+          <p:cNvPr id="13" name="TextBox 12"/>
+          <p:cNvSpPr txBox="1"/>
+          <p:nvPr/>
+        </p:nvSpPr>
+        <p:spPr>
+          <a:xfrm>
+            <a:off x="1463040" y="1719072"/>
+            <a:ext cx="2286000" cy="228600"/>
+          </a:xfrm>
+          <a:prstGeom prst="rect">
+            <a:avLst/>
+          </a:prstGeom>
+          <a:noFill/>
+        </p:spPr>
+        <p:txBody>
+          <a:bodyPr wrap="none" lIns="27432">
+            <a:spAutoFit/>
+          </a:bodyPr>
+          <a:lstStyle/>
+          <a:p>
+            <a:pPr algn="l"/>
+            <a:r>
+              <a:rPr sz="1000" b="0">
+                <a:solidFill>
+                  <a:srgbClr val="172033"/>
+                </a:solidFill>
+                <a:latin typeface="Aptos"/>
+              </a:rPr>
+              <a:t>_, Test, import</a:t>
+            </a:r>
+          </a:p>
+        </p:txBody>
+      </p:sp>
+      <p:sp>
+        <p:nvSpPr>
+          <p:cNvPr id="14" name="TextBox 13"/>
+          <p:cNvSpPr txBox="1"/>
+          <p:nvPr/>
+        </p:nvSpPr>
+        <p:spPr>
+          <a:xfrm>
+            <a:off x="3886200" y="1719072"/>
+            <a:ext cx="3474720" cy="228600"/>
+          </a:xfrm>
+          <a:prstGeom prst="rect">
+            <a:avLst/>
+          </a:prstGeom>
+          <a:noFill/>
+        </p:spPr>
+        <p:txBody>
+          <a:bodyPr wrap="none" lIns="27432">
+            <a:spAutoFit/>
+          </a:bodyPr>
+          <a:lstStyle/>
+          <a:p>
+            <a:pPr algn="l"/>
+            <a:r>
+              <a:rPr sz="1000" b="0">
+                <a:solidFill>
+                  <a:srgbClr val="172033"/>
+                </a:solidFill>
+                <a:latin typeface="Aptos"/>
+              </a:rPr>
+              <a:t>test class/function</a:t>
+            </a:r>
+          </a:p>
+        </p:txBody>
+      </p:sp>
+      <p:sp>
+        <p:nvSpPr>
+          <p:cNvPr id="15" name="TextBox 14"/>
+          <p:cNvSpPr txBox="1"/>
+          <p:nvPr/>
+        </p:nvSpPr>
+        <p:spPr>
+          <a:xfrm>
+            <a:off x="7635240" y="1719072"/>
+            <a:ext cx="1143000" cy="228600"/>
+          </a:xfrm>
+          <a:prstGeom prst="rect">
+            <a:avLst/>
+          </a:prstGeom>
+          <a:noFill/>
+        </p:spPr>
+        <p:txBody>
+          <a:bodyPr wrap="none" lIns="27432">
+            <a:spAutoFit/>
+          </a:bodyPr>
+          <a:lstStyle/>
+          <a:p>
+            <a:pPr algn="ctr"/>
+            <a:r>
+              <a:rPr sz="1000" b="1">
+                <a:solidFill>
+                  <a:srgbClr val="172033"/>
+                </a:solidFill>
+                <a:latin typeface="Aptos"/>
+              </a:rPr>
+              <a:t>119/119</a:t>
+            </a:r>
+          </a:p>
+        </p:txBody>
+      </p:sp>
+      <p:sp>
+        <p:nvSpPr>
+          <p:cNvPr id="16" name="TextBox 15"/>
+          <p:cNvSpPr txBox="1"/>
+          <p:nvPr/>
+        </p:nvSpPr>
+        <p:spPr>
+          <a:xfrm>
+            <a:off x="9098280" y="1719072"/>
+            <a:ext cx="1097280" cy="228600"/>
+          </a:xfrm>
+          <a:prstGeom prst="rect">
+            <a:avLst/>
+          </a:prstGeom>
+          <a:noFill/>
+        </p:spPr>
+        <p:txBody>
+          <a:bodyPr wrap="none" lIns="27432">
+            <a:spAutoFit/>
+          </a:bodyPr>
+          <a:lstStyle/>
+          <a:p>
+            <a:pPr algn="ctr"/>
+            <a:r>
+              <a:rPr sz="1000" b="0">
+                <a:solidFill>
+                  <a:srgbClr val="172033"/>
+                </a:solidFill>
+                <a:latin typeface="Aptos"/>
+              </a:rPr>
+              <a:t>34.2%</a:t>
+            </a:r>
+          </a:p>
+        </p:txBody>
+      </p:sp>
+      <p:sp>
+        <p:nvSpPr>
+          <p:cNvPr id="17" name="TextBox 16"/>
+          <p:cNvSpPr txBox="1"/>
+          <p:nvPr/>
+        </p:nvSpPr>
+        <p:spPr>
+          <a:xfrm>
+            <a:off x="658368" y="2148839"/>
+            <a:ext cx="685800" cy="228600"/>
+          </a:xfrm>
+          <a:prstGeom prst="rect">
+            <a:avLst/>
+          </a:prstGeom>
+          <a:noFill/>
+        </p:spPr>
+        <p:txBody>
+          <a:bodyPr wrap="none" lIns="27432">
+            <a:spAutoFit/>
+          </a:bodyPr>
+          <a:lstStyle/>
+          <a:p>
+            <a:pPr algn="l"/>
+            <a:r>
+              <a:rPr sz="1100" b="1">
+                <a:solidFill>
+                  <a:srgbClr val="111827"/>
+                </a:solidFill>
+                <a:latin typeface="Aptos"/>
+              </a:rPr>
+              <a:t>12883</a:t>
+            </a:r>
+          </a:p>
+        </p:txBody>
+      </p:sp>
+      <p:sp>
+        <p:nvSpPr>
+          <p:cNvPr id="18" name="TextBox 17"/>
+          <p:cNvSpPr txBox="1"/>
+          <p:nvPr/>
+        </p:nvSpPr>
+        <p:spPr>
+          <a:xfrm>
+            <a:off x="1463040" y="2148839"/>
+            <a:ext cx="2286000" cy="228600"/>
+          </a:xfrm>
+          <a:prstGeom prst="rect">
+            <a:avLst/>
+          </a:prstGeom>
+          <a:noFill/>
+        </p:spPr>
+        <p:txBody>
+          <a:bodyPr wrap="none" lIns="27432">
+            <a:spAutoFit/>
+          </a:bodyPr>
+          <a:lstStyle/>
+          <a:p>
+            <a:pPr algn="l"/>
+            <a:r>
+              <a:rPr sz="1000" b="0">
+                <a:solidFill>
+                  <a:srgbClr val="172033"/>
+                </a:solidFill>
+                <a:latin typeface="Aptos"/>
+              </a:rPr>
+              <a:t>#, test, .py</a:t>
+            </a:r>
+          </a:p>
+        </p:txBody>
+      </p:sp>
+      <p:sp>
+        <p:nvSpPr>
+          <p:cNvPr id="19" name="TextBox 18"/>
+          <p:cNvSpPr txBox="1"/>
+          <p:nvPr/>
+        </p:nvSpPr>
+        <p:spPr>
+          <a:xfrm>
+            <a:off x="3886200" y="2148839"/>
+            <a:ext cx="3474720" cy="228600"/>
+          </a:xfrm>
+          <a:prstGeom prst="rect">
+            <a:avLst/>
+          </a:prstGeom>
+          <a:noFill/>
+        </p:spPr>
+        <p:txBody>
+          <a:bodyPr wrap="none" lIns="27432">
+            <a:spAutoFit/>
+          </a:bodyPr>
+          <a:lstStyle/>
+          <a:p>
+            <a:pPr algn="l"/>
+            <a:r>
+              <a:rPr sz="1000" b="0">
+                <a:solidFill>
+                  <a:srgbClr val="172033"/>
+                </a:solidFill>
+                <a:latin typeface="Aptos"/>
+              </a:rPr>
+              <a:t>test-block boundary</a:t>
+            </a:r>
+          </a:p>
+        </p:txBody>
+      </p:sp>
+      <p:sp>
+        <p:nvSpPr>
+          <p:cNvPr id="20" name="TextBox 19"/>
+          <p:cNvSpPr txBox="1"/>
+          <p:nvPr/>
+        </p:nvSpPr>
+        <p:spPr>
+          <a:xfrm>
+            <a:off x="7635240" y="2148839"/>
+            <a:ext cx="1143000" cy="228600"/>
+          </a:xfrm>
+          <a:prstGeom prst="rect">
+            <a:avLst/>
+          </a:prstGeom>
+          <a:noFill/>
+        </p:spPr>
+        <p:txBody>
+          <a:bodyPr wrap="none" lIns="27432">
+            <a:spAutoFit/>
+          </a:bodyPr>
+          <a:lstStyle/>
+          <a:p>
+            <a:pPr algn="ctr"/>
+            <a:r>
+              <a:rPr sz="1000" b="1">
+                <a:solidFill>
+                  <a:srgbClr val="172033"/>
+                </a:solidFill>
+                <a:latin typeface="Aptos"/>
+              </a:rPr>
+              <a:t>119/119</a:t>
+            </a:r>
+          </a:p>
+        </p:txBody>
+      </p:sp>
+      <p:sp>
+        <p:nvSpPr>
+          <p:cNvPr id="21" name="TextBox 20"/>
+          <p:cNvSpPr txBox="1"/>
+          <p:nvPr/>
+        </p:nvSpPr>
+        <p:spPr>
+          <a:xfrm>
+            <a:off x="9098280" y="2148839"/>
+            <a:ext cx="1097280" cy="228600"/>
+          </a:xfrm>
+          <a:prstGeom prst="rect">
+            <a:avLst/>
+          </a:prstGeom>
+          <a:noFill/>
+        </p:spPr>
+        <p:txBody>
+          <a:bodyPr wrap="none" lIns="27432">
+            <a:spAutoFit/>
+          </a:bodyPr>
+          <a:lstStyle/>
+          <a:p>
+            <a:pPr algn="ctr"/>
+            <a:r>
+              <a:rPr sz="1000" b="0">
+                <a:solidFill>
+                  <a:srgbClr val="172033"/>
+                </a:solidFill>
+                <a:latin typeface="Aptos"/>
+              </a:rPr>
+              <a:t>14.2%</a:t>
+            </a:r>
+          </a:p>
+        </p:txBody>
+      </p:sp>
+      <p:sp>
+        <p:nvSpPr>
+          <p:cNvPr id="22" name="Rectangle 21"/>
+          <p:cNvSpPr/>
+          <p:nvPr/>
+        </p:nvSpPr>
+        <p:spPr>
+          <a:xfrm>
+            <a:off x="548640" y="2542032"/>
+            <a:ext cx="10789920" cy="365760"/>
+          </a:xfrm>
+          <a:prstGeom prst="rect">
+            <a:avLst/>
+          </a:prstGeom>
+          <a:solidFill>
+            <a:srgbClr val="F1F5F9"/>
+          </a:solidFill>
+          <a:ln>
+            <a:solidFill>
+              <a:srgbClr val="F1F5F9"/>
+            </a:solidFill>
+          </a:ln>
+        </p:spPr>
+        <p:style>
+          <a:lnRef idx="1">
+            <a:schemeClr val="accent1"/>
+          </a:lnRef>
+          <a:fillRef idx="3">
+            <a:schemeClr val="accent1"/>
+          </a:fillRef>
+          <a:effectRef idx="2">
+            <a:schemeClr val="accent1"/>
+          </a:effectRef>
+          <a:fontRef idx="minor">
+            <a:schemeClr val="lt1"/>
+          </a:fontRef>
+        </p:style>
+        <p:txBody>
+          <a:bodyPr rtlCol="0" anchor="ctr"/>
+          <a:lstStyle/>
+          <a:p>
+            <a:pPr algn="ctr"/>
+          </a:p>
+        </p:txBody>
+      </p:sp>
+      <p:sp>
+        <p:nvSpPr>
+          <p:cNvPr id="23" name="TextBox 22"/>
+          <p:cNvSpPr txBox="1"/>
+          <p:nvPr/>
+        </p:nvSpPr>
+        <p:spPr>
+          <a:xfrm>
+            <a:off x="658368" y="2578608"/>
+            <a:ext cx="685800" cy="228600"/>
+          </a:xfrm>
+          <a:prstGeom prst="rect">
+            <a:avLst/>
+          </a:prstGeom>
+          <a:noFill/>
+        </p:spPr>
+        <p:txBody>
+          <a:bodyPr wrap="none" lIns="27432">
+            <a:spAutoFit/>
+          </a:bodyPr>
+          <a:lstStyle/>
+          <a:p>
+            <a:pPr algn="l"/>
+            <a:r>
+              <a:rPr sz="1100" b="1">
+                <a:solidFill>
+                  <a:srgbClr val="111827"/>
+                </a:solidFill>
+                <a:latin typeface="Aptos"/>
+              </a:rPr>
+              <a:t>3602</a:t>
+            </a:r>
+          </a:p>
+        </p:txBody>
+      </p:sp>
+      <p:sp>
+        <p:nvSpPr>
+          <p:cNvPr id="24" name="TextBox 23"/>
+          <p:cNvSpPr txBox="1"/>
+          <p:nvPr/>
+        </p:nvSpPr>
+        <p:spPr>
+          <a:xfrm>
+            <a:off x="1463040" y="2578608"/>
+            <a:ext cx="2286000" cy="228600"/>
+          </a:xfrm>
+          <a:prstGeom prst="rect">
+            <a:avLst/>
+          </a:prstGeom>
+          <a:noFill/>
+        </p:spPr>
+        <p:txBody>
+          <a:bodyPr wrap="none" lIns="27432">
+            <a:spAutoFit/>
+          </a:bodyPr>
+          <a:lstStyle/>
+          <a:p>
+            <a:pPr algn="l"/>
+            <a:r>
+              <a:rPr sz="1000" b="0">
+                <a:solidFill>
+                  <a:srgbClr val="172033"/>
+                </a:solidFill>
+                <a:latin typeface="Aptos"/>
+              </a:rPr>
+              <a:t>task_func, import</a:t>
+            </a:r>
+          </a:p>
+        </p:txBody>
+      </p:sp>
+      <p:sp>
+        <p:nvSpPr>
+          <p:cNvPr id="25" name="TextBox 24"/>
+          <p:cNvSpPr txBox="1"/>
+          <p:nvPr/>
+        </p:nvSpPr>
+        <p:spPr>
+          <a:xfrm>
+            <a:off x="3886200" y="2578608"/>
+            <a:ext cx="3474720" cy="228600"/>
+          </a:xfrm>
+          <a:prstGeom prst="rect">
+            <a:avLst/>
+          </a:prstGeom>
+          <a:noFill/>
+        </p:spPr>
+        <p:txBody>
+          <a:bodyPr wrap="none" lIns="27432">
+            <a:spAutoFit/>
+          </a:bodyPr>
+          <a:lstStyle/>
+          <a:p>
+            <a:pPr algn="l"/>
+            <a:r>
+              <a:rPr sz="1000" b="0">
+                <a:solidFill>
+                  <a:srgbClr val="172033"/>
+                </a:solidFill>
+                <a:latin typeface="Aptos"/>
+              </a:rPr>
+              <a:t>use inside tests</a:t>
+            </a:r>
+          </a:p>
+        </p:txBody>
+      </p:sp>
+      <p:sp>
+        <p:nvSpPr>
+          <p:cNvPr id="26" name="TextBox 25"/>
+          <p:cNvSpPr txBox="1"/>
+          <p:nvPr/>
+        </p:nvSpPr>
+        <p:spPr>
+          <a:xfrm>
+            <a:off x="7635240" y="2578608"/>
+            <a:ext cx="1143000" cy="228600"/>
+          </a:xfrm>
+          <a:prstGeom prst="rect">
+            <a:avLst/>
+          </a:prstGeom>
+          <a:noFill/>
+        </p:spPr>
+        <p:txBody>
+          <a:bodyPr wrap="none" lIns="27432">
+            <a:spAutoFit/>
+          </a:bodyPr>
+          <a:lstStyle/>
+          <a:p>
+            <a:pPr algn="ctr"/>
+            <a:r>
+              <a:rPr sz="1000" b="1">
+                <a:solidFill>
+                  <a:srgbClr val="172033"/>
+                </a:solidFill>
+                <a:latin typeface="Aptos"/>
+              </a:rPr>
+              <a:t>119/119</a:t>
+            </a:r>
+          </a:p>
+        </p:txBody>
+      </p:sp>
+      <p:sp>
+        <p:nvSpPr>
+          <p:cNvPr id="27" name="TextBox 26"/>
+          <p:cNvSpPr txBox="1"/>
+          <p:nvPr/>
+        </p:nvSpPr>
+        <p:spPr>
+          <a:xfrm>
+            <a:off x="9098280" y="2578608"/>
+            <a:ext cx="1097280" cy="228600"/>
+          </a:xfrm>
+          <a:prstGeom prst="rect">
+            <a:avLst/>
+          </a:prstGeom>
+          <a:noFill/>
+        </p:spPr>
+        <p:txBody>
+          <a:bodyPr wrap="none" lIns="27432">
+            <a:spAutoFit/>
+          </a:bodyPr>
+          <a:lstStyle/>
+          <a:p>
+            <a:pPr algn="ctr"/>
+            <a:r>
+              <a:rPr sz="1000" b="0">
+                <a:solidFill>
+                  <a:srgbClr val="172033"/>
+                </a:solidFill>
+                <a:latin typeface="Aptos"/>
+              </a:rPr>
+              <a:t>36.9%</a:t>
+            </a:r>
+          </a:p>
+        </p:txBody>
+      </p:sp>
+      <p:sp>
+        <p:nvSpPr>
+          <p:cNvPr id="28" name="TextBox 27"/>
+          <p:cNvSpPr txBox="1"/>
+          <p:nvPr/>
+        </p:nvSpPr>
+        <p:spPr>
+          <a:xfrm>
+            <a:off x="658368" y="3008376"/>
+            <a:ext cx="685800" cy="228600"/>
+          </a:xfrm>
+          <a:prstGeom prst="rect">
+            <a:avLst/>
+          </a:prstGeom>
+          <a:noFill/>
+        </p:spPr>
+        <p:txBody>
+          <a:bodyPr wrap="none" lIns="27432">
+            <a:spAutoFit/>
+          </a:bodyPr>
+          <a:lstStyle/>
+          <a:p>
+            <a:pPr algn="l"/>
+            <a:r>
+              <a:rPr sz="1100" b="1">
+                <a:solidFill>
+                  <a:srgbClr val="F59E0B"/>
+                </a:solidFill>
+                <a:latin typeface="Aptos"/>
+              </a:rPr>
+              <a:t>5422</a:t>
+            </a:r>
+          </a:p>
+        </p:txBody>
+      </p:sp>
+      <p:sp>
+        <p:nvSpPr>
+          <p:cNvPr id="29" name="TextBox 28"/>
+          <p:cNvSpPr txBox="1"/>
+          <p:nvPr/>
+        </p:nvSpPr>
+        <p:spPr>
+          <a:xfrm>
+            <a:off x="1463040" y="3008376"/>
+            <a:ext cx="2286000" cy="228600"/>
+          </a:xfrm>
+          <a:prstGeom prst="rect">
+            <a:avLst/>
+          </a:prstGeom>
+          <a:noFill/>
+        </p:spPr>
+        <p:txBody>
+          <a:bodyPr wrap="none" lIns="27432">
+            <a:spAutoFit/>
+          </a:bodyPr>
+          <a:lstStyle/>
+          <a:p>
+            <a:pPr algn="l"/>
+            <a:r>
+              <a:rPr sz="1000" b="0">
+                <a:solidFill>
+                  <a:srgbClr val="172033"/>
+                </a:solidFill>
+                <a:latin typeface="Aptos"/>
+              </a:rPr>
+              <a:t>test, tests, /, .py</a:t>
+            </a:r>
+          </a:p>
+        </p:txBody>
+      </p:sp>
+      <p:sp>
+        <p:nvSpPr>
+          <p:cNvPr id="30" name="TextBox 29"/>
+          <p:cNvSpPr txBox="1"/>
+          <p:nvPr/>
+        </p:nvSpPr>
+        <p:spPr>
+          <a:xfrm>
+            <a:off x="3886200" y="3008376"/>
+            <a:ext cx="3474720" cy="228600"/>
+          </a:xfrm>
+          <a:prstGeom prst="rect">
+            <a:avLst/>
+          </a:prstGeom>
+          <a:noFill/>
+        </p:spPr>
+        <p:txBody>
+          <a:bodyPr wrap="none" lIns="27432">
+            <a:spAutoFit/>
+          </a:bodyPr>
+          <a:lstStyle/>
+          <a:p>
+            <a:pPr algn="l"/>
+            <a:r>
+              <a:rPr sz="1000" b="0">
+                <a:solidFill>
+                  <a:srgbClr val="172033"/>
+                </a:solidFill>
+                <a:latin typeface="Aptos"/>
+              </a:rPr>
+              <a:t>test-module path</a:t>
+            </a:r>
+          </a:p>
+        </p:txBody>
+      </p:sp>
+      <p:sp>
+        <p:nvSpPr>
+          <p:cNvPr id="31" name="TextBox 30"/>
+          <p:cNvSpPr txBox="1"/>
+          <p:nvPr/>
+        </p:nvSpPr>
+        <p:spPr>
+          <a:xfrm>
+            <a:off x="7635240" y="3008376"/>
+            <a:ext cx="1143000" cy="228600"/>
+          </a:xfrm>
+          <a:prstGeom prst="rect">
+            <a:avLst/>
+          </a:prstGeom>
+          <a:noFill/>
+        </p:spPr>
+        <p:txBody>
+          <a:bodyPr wrap="none" lIns="27432">
+            <a:spAutoFit/>
+          </a:bodyPr>
+          <a:lstStyle/>
+          <a:p>
+            <a:pPr algn="ctr"/>
+            <a:r>
+              <a:rPr sz="1000" b="1">
+                <a:solidFill>
+                  <a:srgbClr val="F59E0B"/>
+                </a:solidFill>
+                <a:latin typeface="Aptos"/>
+              </a:rPr>
+              <a:t>119/119</a:t>
+            </a:r>
+          </a:p>
+        </p:txBody>
+      </p:sp>
+      <p:sp>
+        <p:nvSpPr>
+          <p:cNvPr id="32" name="TextBox 31"/>
+          <p:cNvSpPr txBox="1"/>
+          <p:nvPr/>
+        </p:nvSpPr>
+        <p:spPr>
+          <a:xfrm>
+            <a:off x="9098280" y="3008376"/>
+            <a:ext cx="1097280" cy="228600"/>
+          </a:xfrm>
+          <a:prstGeom prst="rect">
+            <a:avLst/>
+          </a:prstGeom>
+          <a:noFill/>
+        </p:spPr>
+        <p:txBody>
+          <a:bodyPr wrap="none" lIns="27432">
+            <a:spAutoFit/>
+          </a:bodyPr>
+          <a:lstStyle/>
+          <a:p>
+            <a:pPr algn="ctr"/>
+            <a:r>
+              <a:rPr sz="1000" b="0">
+                <a:solidFill>
+                  <a:srgbClr val="172033"/>
+                </a:solidFill>
+                <a:latin typeface="Aptos"/>
+              </a:rPr>
+              <a:t>39.2%</a:t>
+            </a:r>
+          </a:p>
+        </p:txBody>
+      </p:sp>
+      <p:sp>
+        <p:nvSpPr>
+          <p:cNvPr id="33" name="Rectangle 32"/>
+          <p:cNvSpPr/>
+          <p:nvPr/>
+        </p:nvSpPr>
+        <p:spPr>
+          <a:xfrm>
+            <a:off x="548640" y="3401568"/>
+            <a:ext cx="10789920" cy="365760"/>
+          </a:xfrm>
+          <a:prstGeom prst="rect">
+            <a:avLst/>
+          </a:prstGeom>
+          <a:solidFill>
+            <a:srgbClr val="F1F5F9"/>
+          </a:solidFill>
+          <a:ln>
+            <a:solidFill>
+              <a:srgbClr val="F1F5F9"/>
+            </a:solidFill>
+          </a:ln>
+        </p:spPr>
+        <p:style>
+          <a:lnRef idx="1">
+            <a:schemeClr val="accent1"/>
+          </a:lnRef>
+          <a:fillRef idx="3">
+            <a:schemeClr val="accent1"/>
+          </a:fillRef>
+          <a:effectRef idx="2">
+            <a:schemeClr val="accent1"/>
+          </a:effectRef>
+          <a:fontRef idx="minor">
+            <a:schemeClr val="lt1"/>
+          </a:fontRef>
+        </p:style>
+        <p:txBody>
+          <a:bodyPr rtlCol="0" anchor="ctr"/>
+          <a:lstStyle/>
+          <a:p>
+            <a:pPr algn="ctr"/>
+          </a:p>
+        </p:txBody>
+      </p:sp>
+      <p:sp>
+        <p:nvSpPr>
+          <p:cNvPr id="34" name="TextBox 33"/>
+          <p:cNvSpPr txBox="1"/>
+          <p:nvPr/>
+        </p:nvSpPr>
+        <p:spPr>
+          <a:xfrm>
+            <a:off x="658368" y="3438144"/>
+            <a:ext cx="685800" cy="228600"/>
+          </a:xfrm>
+          <a:prstGeom prst="rect">
+            <a:avLst/>
+          </a:prstGeom>
+          <a:noFill/>
+        </p:spPr>
+        <p:txBody>
+          <a:bodyPr wrap="none" lIns="27432">
+            <a:spAutoFit/>
+          </a:bodyPr>
+          <a:lstStyle/>
+          <a:p>
+            <a:pPr algn="l"/>
+            <a:r>
+              <a:rPr sz="1100" b="1">
+                <a:solidFill>
+                  <a:srgbClr val="111827"/>
+                </a:solidFill>
+                <a:latin typeface="Aptos"/>
+              </a:rPr>
+              <a:t>14295</a:t>
+            </a:r>
+          </a:p>
+        </p:txBody>
+      </p:sp>
+      <p:sp>
+        <p:nvSpPr>
+          <p:cNvPr id="35" name="TextBox 34"/>
+          <p:cNvSpPr txBox="1"/>
+          <p:nvPr/>
+        </p:nvSpPr>
+        <p:spPr>
+          <a:xfrm>
+            <a:off x="1463040" y="3438144"/>
+            <a:ext cx="2286000" cy="228600"/>
+          </a:xfrm>
+          <a:prstGeom prst="rect">
+            <a:avLst/>
+          </a:prstGeom>
+          <a:noFill/>
+        </p:spPr>
+        <p:txBody>
+          <a:bodyPr wrap="none" lIns="27432">
+            <a:spAutoFit/>
+          </a:bodyPr>
+          <a:lstStyle/>
+          <a:p>
+            <a:pPr algn="l"/>
+            <a:r>
+              <a:rPr sz="1000" b="0">
+                <a:solidFill>
+                  <a:srgbClr val="172033"/>
+                </a:solidFill>
+                <a:latin typeface="Aptos"/>
+              </a:rPr>
+              <a:t>unittest, assert</a:t>
+            </a:r>
+          </a:p>
+        </p:txBody>
+      </p:sp>
+      <p:sp>
+        <p:nvSpPr>
+          <p:cNvPr id="36" name="TextBox 35"/>
+          <p:cNvSpPr txBox="1"/>
+          <p:nvPr/>
+        </p:nvSpPr>
+        <p:spPr>
+          <a:xfrm>
+            <a:off x="3886200" y="3438144"/>
+            <a:ext cx="3474720" cy="228600"/>
+          </a:xfrm>
+          <a:prstGeom prst="rect">
+            <a:avLst/>
+          </a:prstGeom>
+          <a:noFill/>
+        </p:spPr>
+        <p:txBody>
+          <a:bodyPr wrap="none" lIns="27432">
+            <a:spAutoFit/>
+          </a:bodyPr>
+          <a:lstStyle/>
+          <a:p>
+            <a:pPr algn="l"/>
+            <a:r>
+              <a:rPr sz="1000" b="0">
+                <a:solidFill>
+                  <a:srgbClr val="172033"/>
+                </a:solidFill>
+                <a:latin typeface="Aptos"/>
+              </a:rPr>
+              <a:t>unit-test scaffold</a:t>
+            </a:r>
+          </a:p>
+        </p:txBody>
+      </p:sp>
+      <p:sp>
+        <p:nvSpPr>
+          <p:cNvPr id="37" name="TextBox 36"/>
+          <p:cNvSpPr txBox="1"/>
+          <p:nvPr/>
+        </p:nvSpPr>
+        <p:spPr>
+          <a:xfrm>
+            <a:off x="7635240" y="3438144"/>
+            <a:ext cx="1143000" cy="228600"/>
+          </a:xfrm>
+          <a:prstGeom prst="rect">
+            <a:avLst/>
+          </a:prstGeom>
+          <a:noFill/>
+        </p:spPr>
+        <p:txBody>
+          <a:bodyPr wrap="none" lIns="27432">
+            <a:spAutoFit/>
+          </a:bodyPr>
+          <a:lstStyle/>
+          <a:p>
+            <a:pPr algn="ctr"/>
+            <a:r>
+              <a:rPr sz="1000" b="1">
+                <a:solidFill>
+                  <a:srgbClr val="172033"/>
+                </a:solidFill>
+                <a:latin typeface="Aptos"/>
+              </a:rPr>
+              <a:t>118/119</a:t>
+            </a:r>
+          </a:p>
+        </p:txBody>
+      </p:sp>
+      <p:sp>
+        <p:nvSpPr>
+          <p:cNvPr id="38" name="TextBox 37"/>
+          <p:cNvSpPr txBox="1"/>
+          <p:nvPr/>
+        </p:nvSpPr>
+        <p:spPr>
+          <a:xfrm>
+            <a:off x="9098280" y="3438144"/>
+            <a:ext cx="1097280" cy="228600"/>
+          </a:xfrm>
+          <a:prstGeom prst="rect">
+            <a:avLst/>
+          </a:prstGeom>
+          <a:noFill/>
+        </p:spPr>
+        <p:txBody>
+          <a:bodyPr wrap="none" lIns="27432">
+            <a:spAutoFit/>
+          </a:bodyPr>
+          <a:lstStyle/>
+          <a:p>
+            <a:pPr algn="ctr"/>
+            <a:r>
+              <a:rPr sz="1000" b="0">
+                <a:solidFill>
+                  <a:srgbClr val="172033"/>
+                </a:solidFill>
+                <a:latin typeface="Aptos"/>
+              </a:rPr>
+              <a:t>31.6%</a:t>
+            </a:r>
+          </a:p>
+        </p:txBody>
+      </p:sp>
+      <p:sp>
+        <p:nvSpPr>
+          <p:cNvPr id="39" name="TextBox 38"/>
+          <p:cNvSpPr txBox="1"/>
+          <p:nvPr/>
+        </p:nvSpPr>
+        <p:spPr>
+          <a:xfrm>
+            <a:off x="658368" y="3867911"/>
+            <a:ext cx="685800" cy="228600"/>
+          </a:xfrm>
+          <a:prstGeom prst="rect">
+            <a:avLst/>
+          </a:prstGeom>
+          <a:noFill/>
+        </p:spPr>
+        <p:txBody>
+          <a:bodyPr wrap="none" lIns="27432">
+            <a:spAutoFit/>
+          </a:bodyPr>
+          <a:lstStyle/>
+          <a:p>
+            <a:pPr algn="l"/>
+            <a:r>
+              <a:rPr sz="1100" b="1">
+                <a:solidFill>
+                  <a:srgbClr val="111827"/>
+                </a:solidFill>
+                <a:latin typeface="Aptos"/>
+              </a:rPr>
+              <a:t>13397</a:t>
+            </a:r>
+          </a:p>
+        </p:txBody>
+      </p:sp>
+      <p:sp>
+        <p:nvSpPr>
+          <p:cNvPr id="40" name="TextBox 39"/>
+          <p:cNvSpPr txBox="1"/>
+          <p:nvPr/>
+        </p:nvSpPr>
+        <p:spPr>
+          <a:xfrm>
+            <a:off x="1463040" y="3867911"/>
+            <a:ext cx="2286000" cy="228600"/>
+          </a:xfrm>
+          <a:prstGeom prst="rect">
+            <a:avLst/>
+          </a:prstGeom>
+          <a:noFill/>
+        </p:spPr>
+        <p:txBody>
+          <a:bodyPr wrap="none" lIns="27432">
+            <a:spAutoFit/>
+          </a:bodyPr>
+          <a:lstStyle/>
+          <a:p>
+            <a:pPr algn="l"/>
+            <a:r>
+              <a:rPr sz="1000" b="0">
+                <a:solidFill>
+                  <a:srgbClr val="172033"/>
+                </a:solidFill>
+                <a:latin typeface="Aptos"/>
+              </a:rPr>
+              <a:t>task, expected</a:t>
+            </a:r>
+          </a:p>
+        </p:txBody>
+      </p:sp>
+      <p:sp>
+        <p:nvSpPr>
+          <p:cNvPr id="41" name="TextBox 40"/>
+          <p:cNvSpPr txBox="1"/>
+          <p:nvPr/>
+        </p:nvSpPr>
+        <p:spPr>
+          <a:xfrm>
+            <a:off x="3886200" y="3867911"/>
+            <a:ext cx="3474720" cy="228600"/>
+          </a:xfrm>
+          <a:prstGeom prst="rect">
+            <a:avLst/>
+          </a:prstGeom>
+          <a:noFill/>
+        </p:spPr>
+        <p:txBody>
+          <a:bodyPr wrap="none" lIns="27432">
+            <a:spAutoFit/>
+          </a:bodyPr>
+          <a:lstStyle/>
+          <a:p>
+            <a:pPr algn="l"/>
+            <a:r>
+              <a:rPr sz="1000" b="0">
+                <a:solidFill>
+                  <a:srgbClr val="172033"/>
+                </a:solidFill>
+                <a:latin typeface="Aptos"/>
+              </a:rPr>
+              <a:t>test expectations</a:t>
+            </a:r>
+          </a:p>
+        </p:txBody>
+      </p:sp>
+      <p:sp>
+        <p:nvSpPr>
+          <p:cNvPr id="42" name="TextBox 41"/>
+          <p:cNvSpPr txBox="1"/>
+          <p:nvPr/>
+        </p:nvSpPr>
+        <p:spPr>
+          <a:xfrm>
+            <a:off x="7635240" y="3867911"/>
+            <a:ext cx="1143000" cy="228600"/>
+          </a:xfrm>
+          <a:prstGeom prst="rect">
+            <a:avLst/>
+          </a:prstGeom>
+          <a:noFill/>
+        </p:spPr>
+        <p:txBody>
+          <a:bodyPr wrap="none" lIns="27432">
+            <a:spAutoFit/>
+          </a:bodyPr>
+          <a:lstStyle/>
+          <a:p>
+            <a:pPr algn="ctr"/>
+            <a:r>
+              <a:rPr sz="1000" b="1">
+                <a:solidFill>
+                  <a:srgbClr val="172033"/>
+                </a:solidFill>
+                <a:latin typeface="Aptos"/>
+              </a:rPr>
+              <a:t>119/119</a:t>
+            </a:r>
+          </a:p>
+        </p:txBody>
+      </p:sp>
+      <p:sp>
+        <p:nvSpPr>
+          <p:cNvPr id="43" name="TextBox 42"/>
+          <p:cNvSpPr txBox="1"/>
+          <p:nvPr/>
+        </p:nvSpPr>
+        <p:spPr>
+          <a:xfrm>
+            <a:off x="9098280" y="3867911"/>
+            <a:ext cx="1097280" cy="228600"/>
+          </a:xfrm>
+          <a:prstGeom prst="rect">
+            <a:avLst/>
+          </a:prstGeom>
+          <a:noFill/>
+        </p:spPr>
+        <p:txBody>
+          <a:bodyPr wrap="none" lIns="27432">
+            <a:spAutoFit/>
+          </a:bodyPr>
+          <a:lstStyle/>
+          <a:p>
+            <a:pPr algn="ctr"/>
+            <a:r>
+              <a:rPr sz="1000" b="0">
+                <a:solidFill>
+                  <a:srgbClr val="172033"/>
+                </a:solidFill>
+                <a:latin typeface="Aptos"/>
+              </a:rPr>
+              <a:t>32.0%</a:t>
+            </a:r>
+          </a:p>
+        </p:txBody>
+      </p:sp>
+      <p:sp>
+        <p:nvSpPr>
+          <p:cNvPr id="44" name="Rectangle 43"/>
+          <p:cNvSpPr/>
+          <p:nvPr/>
+        </p:nvSpPr>
+        <p:spPr>
+          <a:xfrm>
+            <a:off x="548640" y="4261103"/>
+            <a:ext cx="10789920" cy="365760"/>
+          </a:xfrm>
+          <a:prstGeom prst="rect">
+            <a:avLst/>
+          </a:prstGeom>
+          <a:solidFill>
+            <a:srgbClr val="F1F5F9"/>
+          </a:solidFill>
+          <a:ln>
+            <a:solidFill>
+              <a:srgbClr val="F1F5F9"/>
+            </a:solidFill>
+          </a:ln>
+        </p:spPr>
+        <p:style>
+          <a:lnRef idx="1">
+            <a:schemeClr val="accent1"/>
+          </a:lnRef>
+          <a:fillRef idx="3">
+            <a:schemeClr val="accent1"/>
+          </a:fillRef>
+          <a:effectRef idx="2">
+            <a:schemeClr val="accent1"/>
+          </a:effectRef>
+          <a:fontRef idx="minor">
+            <a:schemeClr val="lt1"/>
+          </a:fontRef>
+        </p:style>
+        <p:txBody>
+          <a:bodyPr rtlCol="0" anchor="ctr"/>
+          <a:lstStyle/>
+          <a:p>
+            <a:pPr algn="ctr"/>
+          </a:p>
+        </p:txBody>
+      </p:sp>
+      <p:sp>
+        <p:nvSpPr>
+          <p:cNvPr id="45" name="TextBox 44"/>
+          <p:cNvSpPr txBox="1"/>
+          <p:nvPr/>
+        </p:nvSpPr>
+        <p:spPr>
+          <a:xfrm>
+            <a:off x="658368" y="4297679"/>
+            <a:ext cx="685800" cy="228600"/>
+          </a:xfrm>
+          <a:prstGeom prst="rect">
+            <a:avLst/>
+          </a:prstGeom>
+          <a:noFill/>
+        </p:spPr>
+        <p:txBody>
+          <a:bodyPr wrap="none" lIns="27432">
+            <a:spAutoFit/>
+          </a:bodyPr>
+          <a:lstStyle/>
+          <a:p>
+            <a:pPr algn="l"/>
+            <a:r>
+              <a:rPr sz="1100" b="1">
+                <a:solidFill>
+                  <a:srgbClr val="111827"/>
+                </a:solidFill>
+                <a:latin typeface="Aptos"/>
+              </a:rPr>
+              <a:t>15916</a:t>
+            </a:r>
+          </a:p>
+        </p:txBody>
+      </p:sp>
+      <p:sp>
+        <p:nvSpPr>
+          <p:cNvPr id="46" name="TextBox 45"/>
+          <p:cNvSpPr txBox="1"/>
+          <p:nvPr/>
+        </p:nvSpPr>
+        <p:spPr>
+          <a:xfrm>
+            <a:off x="1463040" y="4297679"/>
+            <a:ext cx="2286000" cy="228600"/>
+          </a:xfrm>
+          <a:prstGeom prst="rect">
+            <a:avLst/>
+          </a:prstGeom>
+          <a:noFill/>
+        </p:spPr>
+        <p:txBody>
+          <a:bodyPr wrap="none" lIns="27432">
+            <a:spAutoFit/>
+          </a:bodyPr>
+          <a:lstStyle/>
+          <a:p>
+            <a:pPr algn="l"/>
+            <a:r>
+              <a:rPr sz="1000" b="0">
+                <a:solidFill>
+                  <a:srgbClr val="172033"/>
+                </a:solidFill>
+                <a:latin typeface="Aptos"/>
+              </a:rPr>
+              <a:t>/tests, from, src</a:t>
+            </a:r>
+          </a:p>
+        </p:txBody>
+      </p:sp>
+      <p:sp>
+        <p:nvSpPr>
+          <p:cNvPr id="47" name="TextBox 46"/>
+          <p:cNvSpPr txBox="1"/>
+          <p:nvPr/>
+        </p:nvSpPr>
+        <p:spPr>
+          <a:xfrm>
+            <a:off x="3886200" y="4297679"/>
+            <a:ext cx="3474720" cy="228600"/>
+          </a:xfrm>
+          <a:prstGeom prst="rect">
+            <a:avLst/>
+          </a:prstGeom>
+          <a:noFill/>
+        </p:spPr>
+        <p:txBody>
+          <a:bodyPr wrap="none" lIns="27432">
+            <a:spAutoFit/>
+          </a:bodyPr>
+          <a:lstStyle/>
+          <a:p>
+            <a:pPr algn="l"/>
+            <a:r>
+              <a:rPr sz="1000" b="0">
+                <a:solidFill>
+                  <a:srgbClr val="172033"/>
+                </a:solidFill>
+                <a:latin typeface="Aptos"/>
+              </a:rPr>
+              <a:t>test paths/imports</a:t>
+            </a:r>
+          </a:p>
+        </p:txBody>
+      </p:sp>
+      <p:sp>
+        <p:nvSpPr>
+          <p:cNvPr id="48" name="TextBox 47"/>
+          <p:cNvSpPr txBox="1"/>
+          <p:nvPr/>
+        </p:nvSpPr>
+        <p:spPr>
+          <a:xfrm>
+            <a:off x="7635240" y="4297679"/>
+            <a:ext cx="1143000" cy="228600"/>
+          </a:xfrm>
+          <a:prstGeom prst="rect">
+            <a:avLst/>
+          </a:prstGeom>
+          <a:noFill/>
+        </p:spPr>
+        <p:txBody>
+          <a:bodyPr wrap="none" lIns="27432">
+            <a:spAutoFit/>
+          </a:bodyPr>
+          <a:lstStyle/>
+          <a:p>
+            <a:pPr algn="ctr"/>
+            <a:r>
+              <a:rPr sz="1000" b="1">
+                <a:solidFill>
+                  <a:srgbClr val="172033"/>
+                </a:solidFill>
+                <a:latin typeface="Aptos"/>
+              </a:rPr>
+              <a:t>114/119</a:t>
+            </a:r>
+          </a:p>
+        </p:txBody>
+      </p:sp>
+      <p:sp>
+        <p:nvSpPr>
+          <p:cNvPr id="49" name="TextBox 48"/>
+          <p:cNvSpPr txBox="1"/>
+          <p:nvPr/>
+        </p:nvSpPr>
+        <p:spPr>
+          <a:xfrm>
+            <a:off x="9098280" y="4297679"/>
+            <a:ext cx="1097280" cy="228600"/>
+          </a:xfrm>
+          <a:prstGeom prst="rect">
+            <a:avLst/>
+          </a:prstGeom>
+          <a:noFill/>
+        </p:spPr>
+        <p:txBody>
+          <a:bodyPr wrap="none" lIns="27432">
+            <a:spAutoFit/>
+          </a:bodyPr>
+          <a:lstStyle/>
+          <a:p>
+            <a:pPr algn="ctr"/>
+            <a:r>
+              <a:rPr sz="1000" b="0">
+                <a:solidFill>
+                  <a:srgbClr val="172033"/>
+                </a:solidFill>
+                <a:latin typeface="Aptos"/>
+              </a:rPr>
+              <a:t>39.9%</a:t>
+            </a:r>
+          </a:p>
+        </p:txBody>
+      </p:sp>
+      <p:sp>
+        <p:nvSpPr>
+          <p:cNvPr id="50" name="TextBox 49"/>
+          <p:cNvSpPr txBox="1"/>
+          <p:nvPr/>
+        </p:nvSpPr>
+        <p:spPr>
+          <a:xfrm>
+            <a:off x="658368" y="4727448"/>
+            <a:ext cx="685800" cy="228600"/>
+          </a:xfrm>
+          <a:prstGeom prst="rect">
+            <a:avLst/>
+          </a:prstGeom>
+          <a:noFill/>
+        </p:spPr>
+        <p:txBody>
+          <a:bodyPr wrap="none" lIns="27432">
+            <a:spAutoFit/>
+          </a:bodyPr>
+          <a:lstStyle/>
+          <a:p>
+            <a:pPr algn="l"/>
+            <a:r>
+              <a:rPr sz="1100" b="1">
+                <a:solidFill>
+                  <a:srgbClr val="111827"/>
+                </a:solidFill>
+                <a:latin typeface="Aptos"/>
+              </a:rPr>
+              <a:t>10168</a:t>
+            </a:r>
+          </a:p>
+        </p:txBody>
+      </p:sp>
+      <p:sp>
+        <p:nvSpPr>
+          <p:cNvPr id="51" name="TextBox 50"/>
+          <p:cNvSpPr txBox="1"/>
+          <p:nvPr/>
+        </p:nvSpPr>
+        <p:spPr>
+          <a:xfrm>
+            <a:off x="1463040" y="4727448"/>
+            <a:ext cx="2286000" cy="228600"/>
+          </a:xfrm>
+          <a:prstGeom prst="rect">
+            <a:avLst/>
+          </a:prstGeom>
+          <a:noFill/>
+        </p:spPr>
+        <p:txBody>
+          <a:bodyPr wrap="none" lIns="27432">
+            <a:spAutoFit/>
+          </a:bodyPr>
+          <a:lstStyle/>
+          <a:p>
+            <a:pPr algn="l"/>
+            <a:r>
+              <a:rPr sz="1000" b="0">
+                <a:solidFill>
+                  <a:srgbClr val="172033"/>
+                </a:solidFill>
+                <a:latin typeface="Aptos"/>
+              </a:rPr>
+              <a:t>import, class</a:t>
+            </a:r>
+          </a:p>
+        </p:txBody>
+      </p:sp>
+      <p:sp>
+        <p:nvSpPr>
+          <p:cNvPr id="52" name="TextBox 51"/>
+          <p:cNvSpPr txBox="1"/>
+          <p:nvPr/>
+        </p:nvSpPr>
+        <p:spPr>
+          <a:xfrm>
+            <a:off x="3886200" y="4727448"/>
+            <a:ext cx="3474720" cy="228600"/>
+          </a:xfrm>
+          <a:prstGeom prst="rect">
+            <a:avLst/>
+          </a:prstGeom>
+          <a:noFill/>
+        </p:spPr>
+        <p:txBody>
+          <a:bodyPr wrap="none" lIns="27432">
+            <a:spAutoFit/>
+          </a:bodyPr>
+          <a:lstStyle/>
+          <a:p>
+            <a:pPr algn="l"/>
+            <a:r>
+              <a:rPr sz="1000" b="0">
+                <a:solidFill>
+                  <a:srgbClr val="172033"/>
+                </a:solidFill>
+                <a:latin typeface="Aptos"/>
+              </a:rPr>
+              <a:t>test-class creation</a:t>
+            </a:r>
+          </a:p>
+        </p:txBody>
+      </p:sp>
+      <p:sp>
+        <p:nvSpPr>
+          <p:cNvPr id="53" name="TextBox 52"/>
+          <p:cNvSpPr txBox="1"/>
+          <p:nvPr/>
+        </p:nvSpPr>
+        <p:spPr>
+          <a:xfrm>
+            <a:off x="7635240" y="4727448"/>
+            <a:ext cx="1143000" cy="228600"/>
+          </a:xfrm>
+          <a:prstGeom prst="rect">
+            <a:avLst/>
+          </a:prstGeom>
+          <a:noFill/>
+        </p:spPr>
+        <p:txBody>
+          <a:bodyPr wrap="none" lIns="27432">
+            <a:spAutoFit/>
+          </a:bodyPr>
+          <a:lstStyle/>
+          <a:p>
+            <a:pPr algn="ctr"/>
+            <a:r>
+              <a:rPr sz="1000" b="1">
+                <a:solidFill>
+                  <a:srgbClr val="172033"/>
+                </a:solidFill>
+                <a:latin typeface="Aptos"/>
+              </a:rPr>
+              <a:t>119/119</a:t>
+            </a:r>
+          </a:p>
+        </p:txBody>
+      </p:sp>
+      <p:sp>
+        <p:nvSpPr>
+          <p:cNvPr id="54" name="TextBox 53"/>
+          <p:cNvSpPr txBox="1"/>
+          <p:nvPr/>
+        </p:nvSpPr>
+        <p:spPr>
+          <a:xfrm>
+            <a:off x="9098280" y="4727448"/>
+            <a:ext cx="1097280" cy="228600"/>
+          </a:xfrm>
+          <a:prstGeom prst="rect">
+            <a:avLst/>
+          </a:prstGeom>
+          <a:noFill/>
+        </p:spPr>
+        <p:txBody>
+          <a:bodyPr wrap="none" lIns="27432">
+            <a:spAutoFit/>
+          </a:bodyPr>
+          <a:lstStyle/>
+          <a:p>
+            <a:pPr algn="ctr"/>
+            <a:r>
+              <a:rPr sz="1000" b="0">
+                <a:solidFill>
+                  <a:srgbClr val="172033"/>
+                </a:solidFill>
+                <a:latin typeface="Aptos"/>
+              </a:rPr>
+              <a:t>38.6%</a:t>
+            </a:r>
+          </a:p>
+        </p:txBody>
+      </p:sp>
+      <p:sp>
+        <p:nvSpPr>
+          <p:cNvPr id="55" name="Rectangle 54"/>
+          <p:cNvSpPr/>
+          <p:nvPr/>
+        </p:nvSpPr>
+        <p:spPr>
+          <a:xfrm>
+            <a:off x="548640" y="5120640"/>
+            <a:ext cx="10789920" cy="365760"/>
+          </a:xfrm>
+          <a:prstGeom prst="rect">
+            <a:avLst/>
+          </a:prstGeom>
+          <a:solidFill>
+            <a:srgbClr val="F1F5F9"/>
+          </a:solidFill>
+          <a:ln>
+            <a:solidFill>
+              <a:srgbClr val="F1F5F9"/>
+            </a:solidFill>
+          </a:ln>
+        </p:spPr>
+        <p:style>
+          <a:lnRef idx="1">
+            <a:schemeClr val="accent1"/>
+          </a:lnRef>
+          <a:fillRef idx="3">
+            <a:schemeClr val="accent1"/>
+          </a:fillRef>
+          <a:effectRef idx="2">
+            <a:schemeClr val="accent1"/>
+          </a:effectRef>
+          <a:fontRef idx="minor">
+            <a:schemeClr val="lt1"/>
+          </a:fontRef>
+        </p:style>
+        <p:txBody>
+          <a:bodyPr rtlCol="0" anchor="ctr"/>
+          <a:lstStyle/>
+          <a:p>
+            <a:pPr algn="ctr"/>
+          </a:p>
+        </p:txBody>
+      </p:sp>
+      <p:sp>
+        <p:nvSpPr>
+          <p:cNvPr id="56" name="TextBox 55"/>
+          <p:cNvSpPr txBox="1"/>
+          <p:nvPr/>
+        </p:nvSpPr>
+        <p:spPr>
+          <a:xfrm>
+            <a:off x="658368" y="5157216"/>
+            <a:ext cx="685800" cy="228600"/>
+          </a:xfrm>
+          <a:prstGeom prst="rect">
+            <a:avLst/>
+          </a:prstGeom>
+          <a:noFill/>
+        </p:spPr>
+        <p:txBody>
+          <a:bodyPr wrap="none" lIns="27432">
+            <a:spAutoFit/>
+          </a:bodyPr>
+          <a:lstStyle/>
+          <a:p>
+            <a:pPr algn="l"/>
+            <a:r>
+              <a:rPr sz="1100" b="1">
+                <a:solidFill>
+                  <a:srgbClr val="111827"/>
+                </a:solidFill>
+                <a:latin typeface="Aptos"/>
+              </a:rPr>
+              <a:t>13801</a:t>
+            </a:r>
+          </a:p>
+        </p:txBody>
+      </p:sp>
+      <p:sp>
+        <p:nvSpPr>
+          <p:cNvPr id="57" name="TextBox 56"/>
+          <p:cNvSpPr txBox="1"/>
+          <p:nvPr/>
+        </p:nvSpPr>
+        <p:spPr>
+          <a:xfrm>
+            <a:off x="1463040" y="5157216"/>
+            <a:ext cx="2286000" cy="228600"/>
+          </a:xfrm>
+          <a:prstGeom prst="rect">
+            <a:avLst/>
+          </a:prstGeom>
+          <a:noFill/>
+        </p:spPr>
+        <p:txBody>
+          <a:bodyPr wrap="none" lIns="27432">
+            <a:spAutoFit/>
+          </a:bodyPr>
+          <a:lstStyle/>
+          <a:p>
+            <a:pPr algn="l"/>
+            <a:r>
+              <a:rPr sz="1000" b="0">
+                <a:solidFill>
+                  <a:srgbClr val="172033"/>
+                </a:solidFill>
+                <a:latin typeface="Aptos"/>
+              </a:rPr>
+              <a:t>test, assert, invalid</a:t>
+            </a:r>
+          </a:p>
+        </p:txBody>
+      </p:sp>
+      <p:sp>
+        <p:nvSpPr>
+          <p:cNvPr id="58" name="TextBox 57"/>
+          <p:cNvSpPr txBox="1"/>
+          <p:nvPr/>
+        </p:nvSpPr>
+        <p:spPr>
+          <a:xfrm>
+            <a:off x="3886200" y="5157216"/>
+            <a:ext cx="3474720" cy="228600"/>
+          </a:xfrm>
+          <a:prstGeom prst="rect">
+            <a:avLst/>
+          </a:prstGeom>
+          <a:noFill/>
+        </p:spPr>
+        <p:txBody>
+          <a:bodyPr wrap="none" lIns="27432">
+            <a:spAutoFit/>
+          </a:bodyPr>
+          <a:lstStyle/>
+          <a:p>
+            <a:pPr algn="l"/>
+            <a:r>
+              <a:rPr sz="1000" b="0">
+                <a:solidFill>
+                  <a:srgbClr val="172033"/>
+                </a:solidFill>
+                <a:latin typeface="Aptos"/>
+              </a:rPr>
+              <a:t>cases/assertions</a:t>
+            </a:r>
+          </a:p>
+        </p:txBody>
+      </p:sp>
+      <p:sp>
+        <p:nvSpPr>
+          <p:cNvPr id="59" name="TextBox 58"/>
+          <p:cNvSpPr txBox="1"/>
+          <p:nvPr/>
+        </p:nvSpPr>
+        <p:spPr>
+          <a:xfrm>
+            <a:off x="7635240" y="5157216"/>
+            <a:ext cx="1143000" cy="228600"/>
+          </a:xfrm>
+          <a:prstGeom prst="rect">
+            <a:avLst/>
+          </a:prstGeom>
+          <a:noFill/>
+        </p:spPr>
+        <p:txBody>
+          <a:bodyPr wrap="none" lIns="27432">
+            <a:spAutoFit/>
+          </a:bodyPr>
+          <a:lstStyle/>
+          <a:p>
+            <a:pPr algn="ctr"/>
+            <a:r>
+              <a:rPr sz="1000" b="1">
+                <a:solidFill>
+                  <a:srgbClr val="172033"/>
+                </a:solidFill>
+                <a:latin typeface="Aptos"/>
+              </a:rPr>
+              <a:t>119/119</a:t>
+            </a:r>
+          </a:p>
+        </p:txBody>
+      </p:sp>
+      <p:sp>
+        <p:nvSpPr>
+          <p:cNvPr id="60" name="TextBox 59"/>
+          <p:cNvSpPr txBox="1"/>
+          <p:nvPr/>
+        </p:nvSpPr>
+        <p:spPr>
+          <a:xfrm>
+            <a:off x="9098280" y="5157216"/>
+            <a:ext cx="1097280" cy="228600"/>
+          </a:xfrm>
+          <a:prstGeom prst="rect">
+            <a:avLst/>
+          </a:prstGeom>
+          <a:noFill/>
+        </p:spPr>
+        <p:txBody>
+          <a:bodyPr wrap="none" lIns="27432">
+            <a:spAutoFit/>
+          </a:bodyPr>
+          <a:lstStyle/>
+          <a:p>
+            <a:pPr algn="ctr"/>
+            <a:r>
+              <a:rPr sz="1000" b="0">
+                <a:solidFill>
+                  <a:srgbClr val="172033"/>
+                </a:solidFill>
+                <a:latin typeface="Aptos"/>
+              </a:rPr>
+              <a:t>39.2%</a:t>
+            </a:r>
+          </a:p>
+        </p:txBody>
+      </p:sp>
+      <p:sp>
+        <p:nvSpPr>
+          <p:cNvPr id="61" name="TextBox 60"/>
+          <p:cNvSpPr txBox="1"/>
+          <p:nvPr/>
+        </p:nvSpPr>
+        <p:spPr>
+          <a:xfrm>
+            <a:off x="658368" y="5586983"/>
+            <a:ext cx="685800" cy="228600"/>
+          </a:xfrm>
+          <a:prstGeom prst="rect">
+            <a:avLst/>
+          </a:prstGeom>
+          <a:noFill/>
+        </p:spPr>
+        <p:txBody>
+          <a:bodyPr wrap="none" lIns="27432">
+            <a:spAutoFit/>
+          </a:bodyPr>
+          <a:lstStyle/>
+          <a:p>
+            <a:pPr algn="l"/>
+            <a:r>
+              <a:rPr sz="1100" b="1">
+                <a:solidFill>
+                  <a:srgbClr val="111827"/>
+                </a:solidFill>
+                <a:latin typeface="Aptos"/>
+              </a:rPr>
+              <a:t>12308</a:t>
+            </a:r>
+          </a:p>
+        </p:txBody>
+      </p:sp>
+      <p:sp>
+        <p:nvSpPr>
+          <p:cNvPr id="62" name="TextBox 61"/>
+          <p:cNvSpPr txBox="1"/>
+          <p:nvPr/>
+        </p:nvSpPr>
+        <p:spPr>
+          <a:xfrm>
+            <a:off x="1463040" y="5586983"/>
+            <a:ext cx="2286000" cy="228600"/>
+          </a:xfrm>
+          <a:prstGeom prst="rect">
+            <a:avLst/>
+          </a:prstGeom>
+          <a:noFill/>
+        </p:spPr>
+        <p:txBody>
+          <a:bodyPr wrap="none" lIns="27432">
+            <a:spAutoFit/>
+          </a:bodyPr>
+          <a:lstStyle/>
+          <a:p>
+            <a:pPr algn="l"/>
+            <a:r>
+              <a:rPr sz="1000" b="0">
+                <a:solidFill>
+                  <a:srgbClr val="172033"/>
+                </a:solidFill>
+                <a:latin typeface="Aptos"/>
+              </a:rPr>
+              <a:t>import, test, class</a:t>
+            </a:r>
+          </a:p>
+        </p:txBody>
+      </p:sp>
+      <p:sp>
+        <p:nvSpPr>
+          <p:cNvPr id="63" name="TextBox 62"/>
+          <p:cNvSpPr txBox="1"/>
+          <p:nvPr/>
+        </p:nvSpPr>
+        <p:spPr>
+          <a:xfrm>
+            <a:off x="3886200" y="5586983"/>
+            <a:ext cx="3474720" cy="228600"/>
+          </a:xfrm>
+          <a:prstGeom prst="rect">
+            <a:avLst/>
+          </a:prstGeom>
+          <a:noFill/>
+        </p:spPr>
+        <p:txBody>
+          <a:bodyPr wrap="none" lIns="27432">
+            <a:spAutoFit/>
+          </a:bodyPr>
+          <a:lstStyle/>
+          <a:p>
+            <a:pPr algn="l"/>
+            <a:r>
+              <a:rPr sz="1000" b="0">
+                <a:solidFill>
+                  <a:srgbClr val="172033"/>
+                </a:solidFill>
+                <a:latin typeface="Aptos"/>
+              </a:rPr>
+              <a:t>test scaffold</a:t>
+            </a:r>
+          </a:p>
+        </p:txBody>
+      </p:sp>
+      <p:sp>
+        <p:nvSpPr>
+          <p:cNvPr id="64" name="TextBox 63"/>
+          <p:cNvSpPr txBox="1"/>
+          <p:nvPr/>
+        </p:nvSpPr>
+        <p:spPr>
+          <a:xfrm>
+            <a:off x="7635240" y="5586983"/>
+            <a:ext cx="1143000" cy="228600"/>
+          </a:xfrm>
+          <a:prstGeom prst="rect">
+            <a:avLst/>
+          </a:prstGeom>
+          <a:noFill/>
+        </p:spPr>
+        <p:txBody>
+          <a:bodyPr wrap="none" lIns="27432">
+            <a:spAutoFit/>
+          </a:bodyPr>
+          <a:lstStyle/>
+          <a:p>
+            <a:pPr algn="ctr"/>
+            <a:r>
+              <a:rPr sz="1000" b="1">
+                <a:solidFill>
+                  <a:srgbClr val="172033"/>
+                </a:solidFill>
+                <a:latin typeface="Aptos"/>
+              </a:rPr>
+              <a:t>119/119</a:t>
+            </a:r>
+          </a:p>
+        </p:txBody>
+      </p:sp>
+      <p:sp>
+        <p:nvSpPr>
+          <p:cNvPr id="65" name="TextBox 64"/>
+          <p:cNvSpPr txBox="1"/>
+          <p:nvPr/>
+        </p:nvSpPr>
+        <p:spPr>
+          <a:xfrm>
+            <a:off x="9098280" y="5586983"/>
+            <a:ext cx="1097280" cy="228600"/>
+          </a:xfrm>
+          <a:prstGeom prst="rect">
+            <a:avLst/>
+          </a:prstGeom>
+          <a:noFill/>
+        </p:spPr>
+        <p:txBody>
+          <a:bodyPr wrap="none" lIns="27432">
+            <a:spAutoFit/>
+          </a:bodyPr>
+          <a:lstStyle/>
+          <a:p>
+            <a:pPr algn="ctr"/>
+            <a:r>
+              <a:rPr sz="1000" b="0">
+                <a:solidFill>
+                  <a:srgbClr val="172033"/>
+                </a:solidFill>
+                <a:latin typeface="Aptos"/>
+              </a:rPr>
+              <a:t>39.9%</a:t>
+            </a:r>
+          </a:p>
+        </p:txBody>
+      </p:sp>
+      <p:sp>
+        <p:nvSpPr>
+          <p:cNvPr id="66" name="TextBox 65"/>
+          <p:cNvSpPr txBox="1"/>
+          <p:nvPr/>
+        </p:nvSpPr>
+        <p:spPr>
+          <a:xfrm>
+            <a:off x="731520" y="6172200"/>
+            <a:ext cx="10241280" cy="274320"/>
+          </a:xfrm>
+          <a:prstGeom prst="rect">
+            <a:avLst/>
+          </a:prstGeom>
+          <a:noFill/>
+        </p:spPr>
+        <p:txBody>
+          <a:bodyPr wrap="none" lIns="27432">
+            <a:spAutoFit/>
+          </a:bodyPr>
+          <a:lstStyle/>
+          <a:p>
+            <a:pPr algn="ctr"/>
+            <a:r>
+              <a:rPr sz="1200" b="1">
+                <a:solidFill>
+                  <a:srgbClr val="EF4444"/>
+                </a:solidFill>
+                <a:latin typeface="Aptos"/>
+              </a:rPr>
+              <a:t>Associative features, not yet causally validated directions.</a:t>
+            </a:r>
+          </a:p>
+        </p:txBody>
+      </p:sp>
+      <p:sp>
+        <p:nvSpPr>
+          <p:cNvPr id="67" name="TextBox 66"/>
+          <p:cNvSpPr txBox="1"/>
+          <p:nvPr/>
+        </p:nvSpPr>
+        <p:spPr>
+          <a:xfrm>
+            <a:off x="594360" y="6547104"/>
+            <a:ext cx="6400800" cy="164592"/>
+          </a:xfrm>
+          <a:prstGeom prst="rect">
+            <a:avLst/>
+          </a:prstGeom>
+          <a:noFill/>
+        </p:spPr>
+        <p:txBody>
+          <a:bodyPr wrap="none" lIns="27432">
+            <a:spAutoFit/>
+          </a:bodyPr>
+          <a:lstStyle/>
+          <a:p>
+            <a:pPr algn="l"/>
+            <a:r>
+              <a:rPr sz="800" b="0">
+                <a:solidFill>
+                  <a:srgbClr val="94A3B8"/>
+                </a:solidFill>
+                <a:latin typeface="Aptos"/>
+              </a:rPr>
+              <a:t>DSTK100 - exploratory improvement-feature audit</a:t>
+            </a:r>
+          </a:p>
+        </p:txBody>
+      </p:sp>
+      <p:sp>
+        <p:nvSpPr>
+          <p:cNvPr id="68" name="TextBox 67"/>
+          <p:cNvSpPr txBox="1"/>
+          <p:nvPr/>
+        </p:nvSpPr>
+        <p:spPr>
+          <a:xfrm>
+            <a:off x="11155680" y="6510528"/>
+            <a:ext cx="365760" cy="182880"/>
+          </a:xfrm>
+          <a:prstGeom prst="rect">
+            <a:avLst/>
+          </a:prstGeom>
+          <a:noFill/>
+        </p:spPr>
+        <p:txBody>
+          <a:bodyPr wrap="none" lIns="27432">
+            <a:spAutoFit/>
+          </a:bodyPr>
+          <a:lstStyle/>
+          <a:p>
+            <a:pPr algn="r"/>
+            <a:r>
+              <a:rPr sz="800" b="0">
+                <a:solidFill>
+                  <a:srgbClr val="94A3B8"/>
+                </a:solidFill>
+                <a:latin typeface="Aptos"/>
+              </a:rPr>
+              <a:t>21</a:t>
+            </a:r>
           </a:p>
         </p:txBody>
       </p:sp>

--- a/MODEL DIFFS.pptx
+++ b/MODEL DIFFS.pptx
@@ -29,6 +29,7 @@
     <p:sldId id="274" r:id="rId25"/>
     <p:sldId id="275" r:id="rId26"/>
     <p:sldId id="276" r:id="rId27"/>
+    <p:sldId id="277" r:id="rId28"/>
   </p:sldIdLst>
   <p:sldSz cy="6858000" cx="12191675"/>
   <p:notesSz cx="6858000" cy="9144000"/>
@@ -28020,6 +28021,438 @@
 </p:sld>
 </file>
 
+<file path=ppt/slides/slide22.xml><?xml version="1.0" encoding="utf-8"?>
+<p:sld xmlns:a="http://schemas.openxmlformats.org/drawingml/2006/main" xmlns:p="http://schemas.openxmlformats.org/presentationml/2006/main" xmlns:r="http://schemas.openxmlformats.org/officeDocument/2006/relationships">
+  <p:cSld>
+    <p:spTree>
+      <p:nvGrpSpPr>
+        <p:cNvPr id="1" name=""/>
+        <p:cNvGrpSpPr/>
+        <p:nvPr/>
+      </p:nvGrpSpPr>
+      <p:grpSpPr/>
+      <p:sp>
+        <p:nvSpPr>
+          <p:cNvPr id="3" name="Rectangle 2"/>
+          <p:cNvSpPr/>
+          <p:nvPr/>
+        </p:nvSpPr>
+        <p:spPr>
+          <a:xfrm>
+            <a:off x="0" y="0"/>
+            <a:ext cx="12191675" cy="6858000"/>
+          </a:xfrm>
+          <a:prstGeom prst="rect">
+            <a:avLst/>
+          </a:prstGeom>
+          <a:solidFill>
+            <a:srgbClr val="F8FAFC"/>
+          </a:solidFill>
+          <a:ln>
+            <a:noFill/>
+          </a:ln>
+        </p:spPr>
+        <p:style>
+          <a:lnRef idx="1">
+            <a:schemeClr val="accent1"/>
+          </a:lnRef>
+          <a:fillRef idx="3">
+            <a:schemeClr val="accent1"/>
+          </a:fillRef>
+          <a:effectRef idx="2">
+            <a:schemeClr val="accent1"/>
+          </a:effectRef>
+          <a:fontRef idx="minor">
+            <a:schemeClr val="lt1"/>
+          </a:fontRef>
+        </p:style>
+        <p:txBody>
+          <a:bodyPr rtlCol="0" anchor="ctr"/>
+          <a:lstStyle/>
+          <a:p>
+            <a:pPr algn="ctr"/>
+          </a:p>
+        </p:txBody>
+      </p:sp>
+      <p:sp>
+        <p:nvSpPr>
+          <p:cNvPr id="2" name="Title 1"/>
+          <p:cNvSpPr>
+            <a:spLocks noGrp="1"/>
+          </p:cNvSpPr>
+          <p:nvPr>
+            <p:ph type="title"/>
+          </p:nvPr>
+        </p:nvSpPr>
+        <p:spPr/>
+        <p:txBody>
+          <a:bodyPr/>
+          <a:lstStyle/>
+          <a:p/>
+        </p:txBody>
+      </p:sp>
+      <p:sp>
+        <p:nvSpPr>
+          <p:cNvPr id="4" name="TextBox 3"/>
+          <p:cNvSpPr txBox="1"/>
+          <p:nvPr/>
+        </p:nvSpPr>
+        <p:spPr>
+          <a:xfrm>
+            <a:off x="594360" y="274320"/>
+            <a:ext cx="10972800" cy="228600"/>
+          </a:xfrm>
+          <a:prstGeom prst="rect">
+            <a:avLst/>
+          </a:prstGeom>
+          <a:noFill/>
+        </p:spPr>
+        <p:txBody>
+          <a:bodyPr wrap="none" lIns="27432">
+            <a:spAutoFit/>
+          </a:bodyPr>
+          <a:lstStyle/>
+          <a:p>
+            <a:pPr algn="l"/>
+            <a:r>
+              <a:rPr sz="1000" b="1">
+                <a:solidFill>
+                  <a:srgbClr val="2563EB"/>
+                </a:solidFill>
+                <a:latin typeface="Aptos"/>
+              </a:rPr>
+              <a:t>TIMING DISTRIBUTION</a:t>
+            </a:r>
+          </a:p>
+        </p:txBody>
+      </p:sp>
+      <p:sp>
+        <p:nvSpPr>
+          <p:cNvPr id="5" name="TextBox 4"/>
+          <p:cNvSpPr txBox="1"/>
+          <p:nvPr/>
+        </p:nvSpPr>
+        <p:spPr>
+          <a:xfrm>
+            <a:off x="594360" y="640080"/>
+            <a:ext cx="10972800" cy="594360"/>
+          </a:xfrm>
+          <a:prstGeom prst="rect">
+            <a:avLst/>
+          </a:prstGeom>
+          <a:noFill/>
+        </p:spPr>
+        <p:txBody>
+          <a:bodyPr wrap="none" lIns="27432">
+            <a:spAutoFit/>
+          </a:bodyPr>
+          <a:lstStyle/>
+          <a:p>
+            <a:pPr algn="l"/>
+            <a:r>
+              <a:rPr sz="2700" b="1">
+                <a:solidFill>
+                  <a:srgbClr val="111827"/>
+                </a:solidFill>
+                <a:latin typeface="Aptos"/>
+              </a:rPr>
+              <a:t>Boxplots preserve task-level dispersion across the Top 10</a:t>
+            </a:r>
+          </a:p>
+        </p:txBody>
+      </p:sp>
+      <p:pic>
+        <p:nvPicPr>
+          <p:cNvPr id="6" name="Picture 5" descr="top10_first_activation_boxplots.png"/>
+          <p:cNvPicPr>
+            <a:picLocks noChangeAspect="1"/>
+          </p:cNvPicPr>
+          <p:nvPr/>
+        </p:nvPicPr>
+        <p:blipFill>
+          <a:blip r:embed="rId2"/>
+          <a:stretch>
+            <a:fillRect/>
+          </a:stretch>
+        </p:blipFill>
+        <p:spPr>
+          <a:xfrm>
+            <a:off x="502920" y="1261872"/>
+            <a:ext cx="7955279" cy="4419599"/>
+          </a:xfrm>
+          <a:prstGeom prst="rect">
+            <a:avLst/>
+          </a:prstGeom>
+        </p:spPr>
+      </p:pic>
+      <p:sp>
+        <p:nvSpPr>
+          <p:cNvPr id="7" name="Rounded Rectangle 6"/>
+          <p:cNvSpPr/>
+          <p:nvPr/>
+        </p:nvSpPr>
+        <p:spPr>
+          <a:xfrm>
+            <a:off x="8732520" y="1417320"/>
+            <a:ext cx="2560320" cy="4434840"/>
+          </a:xfrm>
+          <a:prstGeom prst="roundRect">
+            <a:avLst/>
+          </a:prstGeom>
+          <a:solidFill>
+            <a:srgbClr val="FFF7ED"/>
+          </a:solidFill>
+          <a:ln>
+            <a:solidFill>
+              <a:srgbClr val="FDBA74"/>
+            </a:solidFill>
+          </a:ln>
+        </p:spPr>
+        <p:style>
+          <a:lnRef idx="1">
+            <a:schemeClr val="accent1"/>
+          </a:lnRef>
+          <a:fillRef idx="3">
+            <a:schemeClr val="accent1"/>
+          </a:fillRef>
+          <a:effectRef idx="2">
+            <a:schemeClr val="accent1"/>
+          </a:effectRef>
+          <a:fontRef idx="minor">
+            <a:schemeClr val="lt1"/>
+          </a:fontRef>
+        </p:style>
+        <p:txBody>
+          <a:bodyPr rtlCol="0" anchor="ctr"/>
+          <a:lstStyle/>
+          <a:p>
+            <a:pPr algn="ctr"/>
+          </a:p>
+        </p:txBody>
+      </p:sp>
+      <p:sp>
+        <p:nvSpPr>
+          <p:cNvPr id="8" name="TextBox 7"/>
+          <p:cNvSpPr txBox="1"/>
+          <p:nvPr/>
+        </p:nvSpPr>
+        <p:spPr>
+          <a:xfrm>
+            <a:off x="9034272" y="1737360"/>
+            <a:ext cx="1965960" cy="274320"/>
+          </a:xfrm>
+          <a:prstGeom prst="rect">
+            <a:avLst/>
+          </a:prstGeom>
+          <a:noFill/>
+        </p:spPr>
+        <p:txBody>
+          <a:bodyPr wrap="none" lIns="27432">
+            <a:spAutoFit/>
+          </a:bodyPr>
+          <a:lstStyle/>
+          <a:p>
+            <a:pPr algn="l"/>
+            <a:r>
+              <a:rPr sz="1400" b="1">
+                <a:solidFill>
+                  <a:srgbClr val="F59E0B"/>
+                </a:solidFill>
+                <a:latin typeface="Aptos"/>
+              </a:rPr>
+              <a:t>HOW TO READ</a:t>
+            </a:r>
+          </a:p>
+        </p:txBody>
+      </p:sp>
+      <p:sp>
+        <p:nvSpPr>
+          <p:cNvPr id="9" name="TextBox 8"/>
+          <p:cNvSpPr txBox="1"/>
+          <p:nvPr/>
+        </p:nvSpPr>
+        <p:spPr>
+          <a:xfrm>
+            <a:off x="9034272" y="2240280"/>
+            <a:ext cx="1965960" cy="2468880"/>
+          </a:xfrm>
+          <a:prstGeom prst="rect">
+            <a:avLst/>
+          </a:prstGeom>
+          <a:noFill/>
+        </p:spPr>
+        <p:txBody>
+          <a:bodyPr wrap="none" lIns="27432">
+            <a:spAutoFit/>
+          </a:bodyPr>
+          <a:lstStyle/>
+          <a:p>
+            <a:pPr algn="l"/>
+            <a:r>
+              <a:rPr sz="1300" b="0">
+                <a:solidFill>
+                  <a:srgbClr val="172033"/>
+                </a:solidFill>
+                <a:latin typeface="Aptos"/>
+              </a:rPr>
+              <a:t>Box: middle 50% of tasks
+Red line: median
+Whiskers: values within 1.5x IQR
+Outliers hidden for readability
+Only active contamination cases</a:t>
+            </a:r>
+          </a:p>
+        </p:txBody>
+      </p:sp>
+      <p:sp>
+        <p:nvSpPr>
+          <p:cNvPr id="10" name="TextBox 9"/>
+          <p:cNvSpPr txBox="1"/>
+          <p:nvPr/>
+        </p:nvSpPr>
+        <p:spPr>
+          <a:xfrm>
+            <a:off x="9034272" y="4983480"/>
+            <a:ext cx="1965960" cy="548640"/>
+          </a:xfrm>
+          <a:prstGeom prst="rect">
+            <a:avLst/>
+          </a:prstGeom>
+          <a:noFill/>
+        </p:spPr>
+        <p:txBody>
+          <a:bodyPr wrap="none" lIns="27432">
+            <a:spAutoFit/>
+          </a:bodyPr>
+          <a:lstStyle/>
+          <a:p>
+            <a:pPr algn="ctr"/>
+            <a:r>
+              <a:rPr sz="1400" b="1">
+                <a:solidFill>
+                  <a:srgbClr val="2563EB"/>
+                </a:solidFill>
+                <a:latin typeface="Aptos"/>
+              </a:rPr>
+              <a:t>5422 median: 39.2%
+n = 119/119 active</a:t>
+            </a:r>
+          </a:p>
+        </p:txBody>
+      </p:sp>
+      <p:sp>
+        <p:nvSpPr>
+          <p:cNvPr id="11" name="TextBox 10"/>
+          <p:cNvSpPr txBox="1"/>
+          <p:nvPr/>
+        </p:nvSpPr>
+        <p:spPr>
+          <a:xfrm>
+            <a:off x="914400" y="6144768"/>
+            <a:ext cx="10241280" cy="274320"/>
+          </a:xfrm>
+          <a:prstGeom prst="rect">
+            <a:avLst/>
+          </a:prstGeom>
+          <a:noFill/>
+        </p:spPr>
+        <p:txBody>
+          <a:bodyPr wrap="none" lIns="27432">
+            <a:spAutoFit/>
+          </a:bodyPr>
+          <a:lstStyle/>
+          <a:p>
+            <a:pPr algn="ctr"/>
+            <a:r>
+              <a:rPr sz="1100" b="1">
+                <a:solidFill>
+                  <a:srgbClr val="EF4444"/>
+                </a:solidFill>
+                <a:latin typeface="Aptos"/>
+              </a:rPr>
+              <a:t>Position is measured over extraction-v4 evaluated-code tokens; it does not establish precedence to the first test marker.</a:t>
+            </a:r>
+          </a:p>
+        </p:txBody>
+      </p:sp>
+      <p:sp>
+        <p:nvSpPr>
+          <p:cNvPr id="12" name="TextBox 11"/>
+          <p:cNvSpPr txBox="1"/>
+          <p:nvPr/>
+        </p:nvSpPr>
+        <p:spPr>
+          <a:xfrm>
+            <a:off x="594360" y="6547104"/>
+            <a:ext cx="6400800" cy="164592"/>
+          </a:xfrm>
+          <a:prstGeom prst="rect">
+            <a:avLst/>
+          </a:prstGeom>
+          <a:noFill/>
+        </p:spPr>
+        <p:txBody>
+          <a:bodyPr wrap="none" lIns="27432">
+            <a:spAutoFit/>
+          </a:bodyPr>
+          <a:lstStyle/>
+          <a:p>
+            <a:pPr algn="l"/>
+            <a:r>
+              <a:rPr sz="800" b="0">
+                <a:solidFill>
+                  <a:srgbClr val="94A3B8"/>
+                </a:solidFill>
+                <a:latin typeface="Aptos"/>
+              </a:rPr>
+              <a:t>DSTK100 - exploratory improvement-feature audit</a:t>
+            </a:r>
+          </a:p>
+        </p:txBody>
+      </p:sp>
+      <p:sp>
+        <p:nvSpPr>
+          <p:cNvPr id="13" name="TextBox 12"/>
+          <p:cNvSpPr txBox="1"/>
+          <p:nvPr/>
+        </p:nvSpPr>
+        <p:spPr>
+          <a:xfrm>
+            <a:off x="11155680" y="6510528"/>
+            <a:ext cx="365760" cy="182880"/>
+          </a:xfrm>
+          <a:prstGeom prst="rect">
+            <a:avLst/>
+          </a:prstGeom>
+          <a:noFill/>
+        </p:spPr>
+        <p:txBody>
+          <a:bodyPr wrap="none" lIns="27432">
+            <a:spAutoFit/>
+          </a:bodyPr>
+          <a:lstStyle/>
+          <a:p>
+            <a:pPr algn="r"/>
+            <a:r>
+              <a:rPr sz="800" b="0">
+                <a:solidFill>
+                  <a:srgbClr val="94A3B8"/>
+                </a:solidFill>
+                <a:latin typeface="Aptos"/>
+              </a:rPr>
+              <a:t>22</a:t>
+            </a:r>
+          </a:p>
+        </p:txBody>
+      </p:sp>
+    </p:spTree>
+  </p:cSld>
+  <p:clrMapOvr>
+    <a:masterClrMapping/>
+  </p:clrMapOvr>
+</p:sld>
+</file>
+
 <file path=ppt/slides/slide3.xml><?xml version="1.0" encoding="utf-8"?>
 <p:sld xmlns:a="http://schemas.openxmlformats.org/drawingml/2006/main" xmlns:r="http://schemas.openxmlformats.org/officeDocument/2006/relationships" xmlns:mc="http://schemas.openxmlformats.org/markup-compatibility/2006" xmlns:mv="urn:schemas-microsoft-com:mac:vml" xmlns:p="http://schemas.openxmlformats.org/presentationml/2006/main" xmlns:c="http://schemas.openxmlformats.org/drawingml/2006/chart" xmlns:dgm="http://schemas.openxmlformats.org/drawingml/2006/diagram" xmlns:o="urn:schemas-microsoft-com:office:office" xmlns:v="urn:schemas-microsoft-com:vml" xmlns:pvml="urn:schemas-microsoft-com:office:powerpoint" xmlns:com="http://schemas.openxmlformats.org/drawingml/2006/compatibility" xmlns:p14="http://schemas.microsoft.com/office/powerpoint/2010/main" xmlns:p15="http://schemas.microsoft.com/office/powerpoint/2012/main" xmlns:ahyp="http://schemas.microsoft.com/office/drawing/2018/hyperlinkcolor">
   <p:cSld>

--- a/MODEL DIFFS.pptx
+++ b/MODEL DIFFS.pptx
@@ -30,6 +30,13 @@
     <p:sldId id="275" r:id="rId26"/>
     <p:sldId id="276" r:id="rId27"/>
     <p:sldId id="277" r:id="rId28"/>
+    <p:sldId id="278" r:id="rId29"/>
+    <p:sldId id="279" r:id="rId30"/>
+    <p:sldId id="280" r:id="rId31"/>
+    <p:sldId id="281" r:id="rId32"/>
+    <p:sldId id="282" r:id="rId33"/>
+    <p:sldId id="283" r:id="rId34"/>
+    <p:sldId id="284" r:id="rId35"/>
   </p:sldIdLst>
   <p:sldSz cy="6858000" cx="12191675"/>
   <p:notesSz cx="6858000" cy="9144000"/>
@@ -28453,6 +28460,419 @@
 </p:sld>
 </file>
 
+<file path=ppt/slides/slide23.xml><?xml version="1.0" encoding="utf-8"?>
+<p:sld xmlns:a="http://schemas.openxmlformats.org/drawingml/2006/main" xmlns:p="http://schemas.openxmlformats.org/presentationml/2006/main" xmlns:r="http://schemas.openxmlformats.org/officeDocument/2006/relationships">
+  <p:cSld>
+    <p:spTree>
+      <p:nvGrpSpPr>
+        <p:cNvPr id="1" name=""/>
+        <p:cNvGrpSpPr/>
+        <p:nvPr/>
+      </p:nvGrpSpPr>
+      <p:grpSpPr/>
+      <p:sp>
+        <p:nvSpPr>
+          <p:cNvPr id="2" name="Title 1"/>
+          <p:cNvSpPr>
+            <a:spLocks noGrp="1"/>
+          </p:cNvSpPr>
+          <p:nvPr>
+            <p:ph type="title"/>
+          </p:nvPr>
+        </p:nvSpPr>
+        <p:spPr/>
+        <p:txBody>
+          <a:bodyPr/>
+          <a:lstStyle/>
+          <a:p/>
+        </p:txBody>
+      </p:sp>
+      <p:pic>
+        <p:nvPicPr>
+          <p:cNvPr id="3" name="Picture 2" descr="slide_23_eight_screens.png"/>
+          <p:cNvPicPr>
+            <a:picLocks noChangeAspect="1"/>
+          </p:cNvPicPr>
+          <p:nvPr/>
+        </p:nvPicPr>
+        <p:blipFill>
+          <a:blip r:embed="rId2"/>
+          <a:stretch>
+            <a:fillRect/>
+          </a:stretch>
+        </p:blipFill>
+        <p:spPr>
+          <a:xfrm>
+            <a:off x="0" y="0"/>
+            <a:ext cx="12191675" cy="6858000"/>
+          </a:xfrm>
+          <a:prstGeom prst="rect">
+            <a:avLst/>
+          </a:prstGeom>
+        </p:spPr>
+      </p:pic>
+    </p:spTree>
+  </p:cSld>
+  <p:clrMapOvr>
+    <a:masterClrMapping/>
+  </p:clrMapOvr>
+</p:sld>
+</file>
+
+<file path=ppt/slides/slide24.xml><?xml version="1.0" encoding="utf-8"?>
+<p:sld xmlns:a="http://schemas.openxmlformats.org/drawingml/2006/main" xmlns:p="http://schemas.openxmlformats.org/presentationml/2006/main" xmlns:r="http://schemas.openxmlformats.org/officeDocument/2006/relationships">
+  <p:cSld>
+    <p:spTree>
+      <p:nvGrpSpPr>
+        <p:cNvPr id="1" name=""/>
+        <p:cNvGrpSpPr/>
+        <p:nvPr/>
+      </p:nvGrpSpPr>
+      <p:grpSpPr/>
+      <p:sp>
+        <p:nvSpPr>
+          <p:cNvPr id="2" name="Title 1"/>
+          <p:cNvSpPr>
+            <a:spLocks noGrp="1"/>
+          </p:cNvSpPr>
+          <p:nvPr>
+            <p:ph type="title"/>
+          </p:nvPr>
+        </p:nvSpPr>
+        <p:spPr/>
+        <p:txBody>
+          <a:bodyPr/>
+          <a:lstStyle/>
+          <a:p/>
+        </p:txBody>
+      </p:sp>
+      <p:pic>
+        <p:nvPicPr>
+          <p:cNvPr id="3" name="Picture 2" descr="slide_24_alpha3_sweep.png"/>
+          <p:cNvPicPr>
+            <a:picLocks noChangeAspect="1"/>
+          </p:cNvPicPr>
+          <p:nvPr/>
+        </p:nvPicPr>
+        <p:blipFill>
+          <a:blip r:embed="rId2"/>
+          <a:stretch>
+            <a:fillRect/>
+          </a:stretch>
+        </p:blipFill>
+        <p:spPr>
+          <a:xfrm>
+            <a:off x="0" y="0"/>
+            <a:ext cx="12191675" cy="6858000"/>
+          </a:xfrm>
+          <a:prstGeom prst="rect">
+            <a:avLst/>
+          </a:prstGeom>
+        </p:spPr>
+      </p:pic>
+    </p:spTree>
+  </p:cSld>
+  <p:clrMapOvr>
+    <a:masterClrMapping/>
+  </p:clrMapOvr>
+</p:sld>
+</file>
+
+<file path=ppt/slides/slide25.xml><?xml version="1.0" encoding="utf-8"?>
+<p:sld xmlns:a="http://schemas.openxmlformats.org/drawingml/2006/main" xmlns:p="http://schemas.openxmlformats.org/presentationml/2006/main" xmlns:r="http://schemas.openxmlformats.org/officeDocument/2006/relationships">
+  <p:cSld>
+    <p:spTree>
+      <p:nvGrpSpPr>
+        <p:cNvPr id="1" name=""/>
+        <p:cNvGrpSpPr/>
+        <p:nvPr/>
+      </p:nvGrpSpPr>
+      <p:grpSpPr/>
+      <p:sp>
+        <p:nvSpPr>
+          <p:cNvPr id="2" name="Title 1"/>
+          <p:cNvSpPr>
+            <a:spLocks noGrp="1"/>
+          </p:cNvSpPr>
+          <p:nvPr>
+            <p:ph type="title"/>
+          </p:nvPr>
+        </p:nvSpPr>
+        <p:spPr/>
+        <p:txBody>
+          <a:bodyPr/>
+          <a:lstStyle/>
+          <a:p/>
+        </p:txBody>
+      </p:sp>
+      <p:pic>
+        <p:nvPicPr>
+          <p:cNvPr id="3" name="Picture 2" descr="slide_25_semantics.png"/>
+          <p:cNvPicPr>
+            <a:picLocks noChangeAspect="1"/>
+          </p:cNvPicPr>
+          <p:nvPr/>
+        </p:nvPicPr>
+        <p:blipFill>
+          <a:blip r:embed="rId2"/>
+          <a:stretch>
+            <a:fillRect/>
+          </a:stretch>
+        </p:blipFill>
+        <p:spPr>
+          <a:xfrm>
+            <a:off x="0" y="0"/>
+            <a:ext cx="12191675" cy="6858000"/>
+          </a:xfrm>
+          <a:prstGeom prst="rect">
+            <a:avLst/>
+          </a:prstGeom>
+        </p:spPr>
+      </p:pic>
+    </p:spTree>
+  </p:cSld>
+  <p:clrMapOvr>
+    <a:masterClrMapping/>
+  </p:clrMapOvr>
+</p:sld>
+</file>
+
+<file path=ppt/slides/slide26.xml><?xml version="1.0" encoding="utf-8"?>
+<p:sld xmlns:a="http://schemas.openxmlformats.org/drawingml/2006/main" xmlns:p="http://schemas.openxmlformats.org/presentationml/2006/main" xmlns:r="http://schemas.openxmlformats.org/officeDocument/2006/relationships">
+  <p:cSld>
+    <p:spTree>
+      <p:nvGrpSpPr>
+        <p:cNvPr id="1" name=""/>
+        <p:cNvGrpSpPr/>
+        <p:nvPr/>
+      </p:nvGrpSpPr>
+      <p:grpSpPr/>
+      <p:sp>
+        <p:nvSpPr>
+          <p:cNvPr id="2" name="Title 1"/>
+          <p:cNvSpPr>
+            <a:spLocks noGrp="1"/>
+          </p:cNvSpPr>
+          <p:nvPr>
+            <p:ph type="title"/>
+          </p:nvPr>
+        </p:nvSpPr>
+        <p:spPr/>
+        <p:txBody>
+          <a:bodyPr/>
+          <a:lstStyle/>
+          <a:p/>
+        </p:txBody>
+      </p:sp>
+      <p:pic>
+        <p:nvPicPr>
+          <p:cNvPr id="3" name="Picture 2" descr="slide_26_f3048_controls.png"/>
+          <p:cNvPicPr>
+            <a:picLocks noChangeAspect="1"/>
+          </p:cNvPicPr>
+          <p:nvPr/>
+        </p:nvPicPr>
+        <p:blipFill>
+          <a:blip r:embed="rId2"/>
+          <a:stretch>
+            <a:fillRect/>
+          </a:stretch>
+        </p:blipFill>
+        <p:spPr>
+          <a:xfrm>
+            <a:off x="0" y="0"/>
+            <a:ext cx="12191675" cy="6858000"/>
+          </a:xfrm>
+          <a:prstGeom prst="rect">
+            <a:avLst/>
+          </a:prstGeom>
+        </p:spPr>
+      </p:pic>
+    </p:spTree>
+  </p:cSld>
+  <p:clrMapOvr>
+    <a:masterClrMapping/>
+  </p:clrMapOvr>
+</p:sld>
+</file>
+
+<file path=ppt/slides/slide27.xml><?xml version="1.0" encoding="utf-8"?>
+<p:sld xmlns:a="http://schemas.openxmlformats.org/drawingml/2006/main" xmlns:p="http://schemas.openxmlformats.org/presentationml/2006/main" xmlns:r="http://schemas.openxmlformats.org/officeDocument/2006/relationships">
+  <p:cSld>
+    <p:spTree>
+      <p:nvGrpSpPr>
+        <p:cNvPr id="1" name=""/>
+        <p:cNvGrpSpPr/>
+        <p:nvPr/>
+      </p:nvGrpSpPr>
+      <p:grpSpPr/>
+      <p:sp>
+        <p:nvSpPr>
+          <p:cNvPr id="2" name="Title 1"/>
+          <p:cNvSpPr>
+            <a:spLocks noGrp="1"/>
+          </p:cNvSpPr>
+          <p:nvPr>
+            <p:ph type="title"/>
+          </p:nvPr>
+        </p:nvSpPr>
+        <p:spPr/>
+        <p:txBody>
+          <a:bodyPr/>
+          <a:lstStyle/>
+          <a:p/>
+        </p:txBody>
+      </p:sp>
+      <p:pic>
+        <p:nvPicPr>
+          <p:cNvPr id="3" name="Picture 2" descr="slide_27_f13147_controls.png"/>
+          <p:cNvPicPr>
+            <a:picLocks noChangeAspect="1"/>
+          </p:cNvPicPr>
+          <p:nvPr/>
+        </p:nvPicPr>
+        <p:blipFill>
+          <a:blip r:embed="rId2"/>
+          <a:stretch>
+            <a:fillRect/>
+          </a:stretch>
+        </p:blipFill>
+        <p:spPr>
+          <a:xfrm>
+            <a:off x="0" y="0"/>
+            <a:ext cx="12191675" cy="6858000"/>
+          </a:xfrm>
+          <a:prstGeom prst="rect">
+            <a:avLst/>
+          </a:prstGeom>
+        </p:spPr>
+      </p:pic>
+    </p:spTree>
+  </p:cSld>
+  <p:clrMapOvr>
+    <a:masterClrMapping/>
+  </p:clrMapOvr>
+</p:sld>
+</file>
+
+<file path=ppt/slides/slide28.xml><?xml version="1.0" encoding="utf-8"?>
+<p:sld xmlns:a="http://schemas.openxmlformats.org/drawingml/2006/main" xmlns:p="http://schemas.openxmlformats.org/presentationml/2006/main" xmlns:r="http://schemas.openxmlformats.org/officeDocument/2006/relationships">
+  <p:cSld>
+    <p:spTree>
+      <p:nvGrpSpPr>
+        <p:cNvPr id="1" name=""/>
+        <p:cNvGrpSpPr/>
+        <p:nvPr/>
+      </p:nvGrpSpPr>
+      <p:grpSpPr/>
+      <p:sp>
+        <p:nvSpPr>
+          <p:cNvPr id="2" name="Title 1"/>
+          <p:cNvSpPr>
+            <a:spLocks noGrp="1"/>
+          </p:cNvSpPr>
+          <p:nvPr>
+            <p:ph type="title"/>
+          </p:nvPr>
+        </p:nvSpPr>
+        <p:spPr/>
+        <p:txBody>
+          <a:bodyPr/>
+          <a:lstStyle/>
+          <a:p/>
+        </p:txBody>
+      </p:sp>
+      <p:pic>
+        <p:nvPicPr>
+          <p:cNvPr id="3" name="Picture 2" descr="slide_28_change_taxonomy.png"/>
+          <p:cNvPicPr>
+            <a:picLocks noChangeAspect="1"/>
+          </p:cNvPicPr>
+          <p:nvPr/>
+        </p:nvPicPr>
+        <p:blipFill>
+          <a:blip r:embed="rId2"/>
+          <a:stretch>
+            <a:fillRect/>
+          </a:stretch>
+        </p:blipFill>
+        <p:spPr>
+          <a:xfrm>
+            <a:off x="0" y="0"/>
+            <a:ext cx="12191675" cy="6858000"/>
+          </a:xfrm>
+          <a:prstGeom prst="rect">
+            <a:avLst/>
+          </a:prstGeom>
+        </p:spPr>
+      </p:pic>
+    </p:spTree>
+  </p:cSld>
+  <p:clrMapOvr>
+    <a:masterClrMapping/>
+  </p:clrMapOvr>
+</p:sld>
+</file>
+
+<file path=ppt/slides/slide29.xml><?xml version="1.0" encoding="utf-8"?>
+<p:sld xmlns:a="http://schemas.openxmlformats.org/drawingml/2006/main" xmlns:p="http://schemas.openxmlformats.org/presentationml/2006/main" xmlns:r="http://schemas.openxmlformats.org/officeDocument/2006/relationships">
+  <p:cSld>
+    <p:spTree>
+      <p:nvGrpSpPr>
+        <p:cNvPr id="1" name=""/>
+        <p:cNvGrpSpPr/>
+        <p:nvPr/>
+      </p:nvGrpSpPr>
+      <p:grpSpPr/>
+      <p:sp>
+        <p:nvSpPr>
+          <p:cNvPr id="2" name="Title 1"/>
+          <p:cNvSpPr>
+            <a:spLocks noGrp="1"/>
+          </p:cNvSpPr>
+          <p:nvPr>
+            <p:ph type="title"/>
+          </p:nvPr>
+        </p:nvSpPr>
+        <p:spPr/>
+        <p:txBody>
+          <a:bodyPr/>
+          <a:lstStyle/>
+          <a:p/>
+        </p:txBody>
+      </p:sp>
+      <p:pic>
+        <p:nvPicPr>
+          <p:cNvPr id="3" name="Picture 2" descr="slide_29_revised_claims.png"/>
+          <p:cNvPicPr>
+            <a:picLocks noChangeAspect="1"/>
+          </p:cNvPicPr>
+          <p:nvPr/>
+        </p:nvPicPr>
+        <p:blipFill>
+          <a:blip r:embed="rId2"/>
+          <a:stretch>
+            <a:fillRect/>
+          </a:stretch>
+        </p:blipFill>
+        <p:spPr>
+          <a:xfrm>
+            <a:off x="0" y="0"/>
+            <a:ext cx="12191675" cy="6858000"/>
+          </a:xfrm>
+          <a:prstGeom prst="rect">
+            <a:avLst/>
+          </a:prstGeom>
+        </p:spPr>
+      </p:pic>
+    </p:spTree>
+  </p:cSld>
+  <p:clrMapOvr>
+    <a:masterClrMapping/>
+  </p:clrMapOvr>
+</p:sld>
+</file>
+
 <file path=ppt/slides/slide3.xml><?xml version="1.0" encoding="utf-8"?>
 <p:sld xmlns:a="http://schemas.openxmlformats.org/drawingml/2006/main" xmlns:r="http://schemas.openxmlformats.org/officeDocument/2006/relationships" xmlns:mc="http://schemas.openxmlformats.org/markup-compatibility/2006" xmlns:mv="urn:schemas-microsoft-com:mac:vml" xmlns:p="http://schemas.openxmlformats.org/presentationml/2006/main" xmlns:c="http://schemas.openxmlformats.org/drawingml/2006/chart" xmlns:dgm="http://schemas.openxmlformats.org/drawingml/2006/diagram" xmlns:o="urn:schemas-microsoft-com:office:office" xmlns:v="urn:schemas-microsoft-com:vml" xmlns:pvml="urn:schemas-microsoft-com:office:powerpoint" xmlns:com="http://schemas.openxmlformats.org/drawingml/2006/compatibility" xmlns:p14="http://schemas.microsoft.com/office/powerpoint/2010/main" xmlns:p15="http://schemas.microsoft.com/office/powerpoint/2012/main" xmlns:ahyp="http://schemas.microsoft.com/office/drawing/2018/hyperlinkcolor">
   <p:cSld>
